--- a/ATLAS_提案_MRDI.pptx
+++ b/ATLAS_提案_MRDI.pptx
@@ -18947,20 +18947,22 @@
       </p:sp>
       <p:sp>
         <p:nvSpPr>
-          <p:cNvPr id="4" name="Rectangle 3"/>
+          <p:cNvPr id="4" name="Rounded Rectangle 3"/>
           <p:cNvSpPr/>
           <p:nvPr/>
         </p:nvSpPr>
         <p:spPr>
           <a:xfrm>
-            <a:off x="612648" y="1298448"/>
-            <a:ext cx="7918704" cy="11430"/>
-          </a:xfrm>
-          <a:prstGeom prst="rect">
-            <a:avLst/>
+            <a:off x="612648" y="1316736"/>
+            <a:ext cx="7918704" cy="521207"/>
+          </a:xfrm>
+          <a:prstGeom prst="roundRect">
+            <a:avLst>
+              <a:gd name="adj" fmla="val 16000"/>
+            </a:avLst>
           </a:prstGeom>
           <a:solidFill>
-            <a:srgbClr val="00B388"/>
+            <a:srgbClr val="F5F5F5"/>
           </a:solidFill>
           <a:ln>
             <a:noFill/>
@@ -18991,184 +18993,16 @@
       </p:sp>
       <p:sp>
         <p:nvSpPr>
-          <p:cNvPr id="5" name="TextBox 4"/>
-          <p:cNvSpPr txBox="1"/>
-          <p:nvPr/>
-        </p:nvSpPr>
-        <p:spPr>
-          <a:xfrm>
-            <a:off x="612648" y="1353312"/>
-            <a:ext cx="1389888" cy="489204"/>
-          </a:xfrm>
-          <a:prstGeom prst="rect">
-            <a:avLst/>
-          </a:prstGeom>
-          <a:noFill/>
-        </p:spPr>
-        <p:txBody>
-          <a:bodyPr wrap="square" anchor="t" lIns="0" rIns="0" tIns="0" bIns="0">
-            <a:spAutoFit/>
-          </a:bodyPr>
-          <a:lstStyle/>
-          <a:p>
-            <a:pPr>
-              <a:lnSpc>
-                <a:spcPct val="115000"/>
-              </a:lnSpc>
-              <a:spcBef>
-                <a:spcPts val="0"/>
-              </a:spcBef>
-              <a:spcAft>
-                <a:spcPts val="200"/>
-              </a:spcAft>
-            </a:pPr>
-            <a:r>
-              <a:rPr sz="750">
-                <a:solidFill>
-                  <a:srgbClr val="191919"/>
-                </a:solidFill>
-                <a:latin typeface="AvenirNext LT Pro Medium"/>
-              </a:rPr>
-              <a:t>RHEED online analysis</a:t>
-            </a:r>
-          </a:p>
-        </p:txBody>
-      </p:sp>
-      <p:sp>
-        <p:nvSpPr>
-          <p:cNvPr id="6" name="TextBox 5"/>
-          <p:cNvSpPr txBox="1"/>
-          <p:nvPr/>
-        </p:nvSpPr>
-        <p:spPr>
-          <a:xfrm>
-            <a:off x="2121408" y="1353312"/>
-            <a:ext cx="4983480" cy="489204"/>
-          </a:xfrm>
-          <a:prstGeom prst="rect">
-            <a:avLst/>
-          </a:prstGeom>
-          <a:noFill/>
-        </p:spPr>
-        <p:txBody>
-          <a:bodyPr wrap="square" anchor="t" lIns="0" rIns="0" tIns="0" bIns="0">
-            <a:spAutoFit/>
-          </a:bodyPr>
-          <a:lstStyle/>
-          <a:p>
-            <a:pPr>
-              <a:lnSpc>
-                <a:spcPct val="116000"/>
-              </a:lnSpc>
-              <a:spcBef>
-                <a:spcPts val="0"/>
-              </a:spcBef>
-              <a:spcAft>
-                <a:spcPts val="200"/>
-              </a:spcAft>
-            </a:pPr>
-            <a:r>
-              <a:rPr sz="720">
-                <a:solidFill>
-                  <a:srgbClr val="191919"/>
-                </a:solidFill>
-                <a:latin typeface="AvenirNext LT Pro Medium"/>
-              </a:rPr>
-              <a:t>PNNL — Pacific Northwest National Laboratory (US DOE; Kaspar et al.). </a:t>
-            </a:r>
-            <a:r>
-              <a:rPr sz="720">
-                <a:solidFill>
-                  <a:srgbClr val="191919"/>
-                </a:solidFill>
-                <a:latin typeface="AvenirNext LT Pro Regular"/>
-              </a:rPr>
-              <a:t>Built RHAAPsody: unsupervised, material-agnostic on-the-fly RHEED analysis — pretrained-CNN features, changepoint detection, graph clustering. On live TiO2 MBE growth: &lt;1 s/frame, transitions flagged ~1 min faster than the human expert. Open source; perception only — control is their stated next phase.</a:t>
-            </a:r>
-          </a:p>
-        </p:txBody>
-      </p:sp>
-      <p:sp>
-        <p:nvSpPr>
-          <p:cNvPr id="7" name="TextBox 6"/>
-          <p:cNvSpPr txBox="1"/>
-          <p:nvPr/>
-        </p:nvSpPr>
-        <p:spPr>
-          <a:xfrm>
-            <a:off x="7242048" y="1353312"/>
-            <a:ext cx="1289304" cy="489204"/>
-          </a:xfrm>
-          <a:prstGeom prst="rect">
-            <a:avLst/>
-          </a:prstGeom>
-          <a:noFill/>
-        </p:spPr>
-        <p:txBody>
-          <a:bodyPr wrap="square" anchor="t" lIns="0" rIns="0" tIns="0" bIns="0">
-            <a:spAutoFit/>
-          </a:bodyPr>
-          <a:lstStyle/>
-          <a:p>
-            <a:pPr>
-              <a:lnSpc>
-                <a:spcPct val="110000"/>
-              </a:lnSpc>
-              <a:spcBef>
-                <a:spcPts val="0"/>
-              </a:spcBef>
-              <a:spcAft>
-                <a:spcPts val="300"/>
-              </a:spcAft>
-            </a:pPr>
-            <a:r>
-              <a:rPr sz="700">
-                <a:solidFill>
-                  <a:srgbClr val="00B388"/>
-                </a:solidFill>
-                <a:latin typeface="AvenirNext LT Pro Regular"/>
-                <a:hlinkClick r:id="rId3"/>
-              </a:rPr>
-              <a:t>JVST A 43, 032702 (2025)</a:t>
-            </a:r>
-          </a:p>
-          <a:p>
-            <a:pPr>
-              <a:lnSpc>
-                <a:spcPct val="110000"/>
-              </a:lnSpc>
-              <a:spcBef>
-                <a:spcPts val="0"/>
-              </a:spcBef>
-              <a:spcAft>
-                <a:spcPts val="300"/>
-              </a:spcAft>
-            </a:pPr>
-            <a:r>
-              <a:rPr sz="700">
-                <a:solidFill>
-                  <a:srgbClr val="00B388"/>
-                </a:solidFill>
-                <a:latin typeface="AvenirNext LT Pro Regular"/>
-                <a:hlinkClick r:id="rId4"/>
-              </a:rPr>
-              <a:t>GitHub: pnnl/RHAAPSODY</a:t>
-            </a:r>
-          </a:p>
-        </p:txBody>
-      </p:sp>
-      <p:sp>
-        <p:nvSpPr>
-          <p:cNvPr id="8" name="Rectangle 7"/>
+          <p:cNvPr id="5" name="Oval 4"/>
           <p:cNvSpPr/>
           <p:nvPr/>
         </p:nvSpPr>
         <p:spPr>
           <a:xfrm>
-            <a:off x="612648" y="1860804"/>
-            <a:ext cx="7918704" cy="11430"/>
-          </a:xfrm>
-          <a:prstGeom prst="rect">
+            <a:off x="731520" y="1467612"/>
+            <a:ext cx="219456" cy="219456"/>
+          </a:xfrm>
+          <a:prstGeom prst="ellipse">
             <a:avLst/>
           </a:prstGeom>
           <a:solidFill>
@@ -19194,23 +19028,32 @@
           </a:fontRef>
         </p:style>
         <p:txBody>
-          <a:bodyPr rtlCol="0" anchor="ctr"/>
+          <a:bodyPr rtlCol="0" anchor="ctr" lIns="0" rIns="0" tIns="0" bIns="0" wrap="none"/>
           <a:lstStyle/>
           <a:p>
             <a:pPr algn="ctr"/>
-          </a:p>
-        </p:txBody>
-      </p:sp>
-      <p:sp>
-        <p:nvSpPr>
-          <p:cNvPr id="9" name="TextBox 8"/>
+            <a:r>
+              <a:rPr sz="750">
+                <a:solidFill>
+                  <a:srgbClr val="FFFFFF"/>
+                </a:solidFill>
+                <a:latin typeface="AvenirNext LT Pro Medium"/>
+              </a:rPr>
+              <a:t>1</a:t>
+            </a:r>
+          </a:p>
+        </p:txBody>
+      </p:sp>
+      <p:sp>
+        <p:nvSpPr>
+          <p:cNvPr id="6" name="TextBox 5"/>
           <p:cNvSpPr txBox="1"/>
           <p:nvPr/>
         </p:nvSpPr>
         <p:spPr>
           <a:xfrm>
-            <a:off x="612648" y="1915668"/>
-            <a:ext cx="1389888" cy="489204"/>
+            <a:off x="1042415" y="1380744"/>
+            <a:ext cx="1097280" cy="429768"/>
           </a:xfrm>
           <a:prstGeom prst="rect">
             <a:avLst/>
@@ -19225,37 +19068,34 @@
           <a:p>
             <a:pPr>
               <a:lnSpc>
-                <a:spcPct val="115000"/>
+                <a:spcPct val="112000"/>
               </a:lnSpc>
-              <a:spcBef>
-                <a:spcPts val="0"/>
-              </a:spcBef>
               <a:spcAft>
                 <a:spcPts val="200"/>
               </a:spcAft>
             </a:pPr>
             <a:r>
-              <a:rPr sz="750">
+              <a:rPr sz="720">
                 <a:solidFill>
                   <a:srgbClr val="191919"/>
                 </a:solidFill>
                 <a:latin typeface="AvenirNext LT Pro Medium"/>
               </a:rPr>
-              <a:t>MBE real-time closed loop</a:t>
-            </a:r>
-          </a:p>
-        </p:txBody>
-      </p:sp>
-      <p:sp>
-        <p:nvSpPr>
-          <p:cNvPr id="10" name="TextBox 9"/>
+              <a:t>RHEED online analysis</a:t>
+            </a:r>
+          </a:p>
+        </p:txBody>
+      </p:sp>
+      <p:sp>
+        <p:nvSpPr>
+          <p:cNvPr id="7" name="TextBox 6"/>
           <p:cNvSpPr txBox="1"/>
           <p:nvPr/>
         </p:nvSpPr>
         <p:spPr>
           <a:xfrm>
-            <a:off x="2121408" y="1915668"/>
-            <a:ext cx="4983480" cy="489204"/>
+            <a:off x="2231136" y="1380744"/>
+            <a:ext cx="4828032" cy="429768"/>
           </a:xfrm>
           <a:prstGeom prst="rect">
             <a:avLst/>
@@ -19270,46 +19110,43 @@
           <a:p>
             <a:pPr>
               <a:lnSpc>
-                <a:spcPct val="116000"/>
+                <a:spcPct val="115000"/>
               </a:lnSpc>
-              <a:spcBef>
-                <a:spcPts val="0"/>
-              </a:spcBef>
               <a:spcAft>
                 <a:spcPts val="200"/>
               </a:spcAft>
             </a:pPr>
             <a:r>
-              <a:rPr sz="720">
+              <a:rPr sz="700">
                 <a:solidFill>
                   <a:srgbClr val="191919"/>
                 </a:solidFill>
                 <a:latin typeface="AvenirNext LT Pro Medium"/>
               </a:rPr>
-              <a:t>Chinese Academy of Sciences (Shen et al.); follow-up QD-laser work. </a:t>
-            </a:r>
-            <a:r>
-              <a:rPr sz="720">
+              <a:t>PNNL — Pacific Northwest National Laboratory (US DOE; Kaspar et al.). </a:t>
+            </a:r>
+            <a:r>
+              <a:rPr sz="700">
                 <a:solidFill>
                   <a:srgbClr val="191919"/>
                 </a:solidFill>
                 <a:latin typeface="AvenirNext LT Pro Regular"/>
               </a:rPr>
-              <a:t>3D ResNet-50 on RHEED video predicts InAs/GaAs quantum-dot density in-run; the closed loop dials density across 3.8×10⁸–1.4×10¹¹ cm⁻² (~2.5 orders of magnitude), fully automated. The 2025 follow-up self-optimizes QD-laser growth: PL 3.2× the manual baseline, ~0.85 s per decision.</a:t>
-            </a:r>
-          </a:p>
-        </p:txBody>
-      </p:sp>
-      <p:sp>
-        <p:nvSpPr>
-          <p:cNvPr id="11" name="TextBox 10"/>
+              <a:t>Built RHAAPsody: unsupervised, material-agnostic on-the-fly RHEED analysis — pretrained-CNN features, changepoint detection, graph clustering. On live TiO2 MBE growth: &lt;1 s/frame, transitions flagged ~1 min faster than the human expert. Open source; perception only — control is their stated next phase.</a:t>
+            </a:r>
+          </a:p>
+        </p:txBody>
+      </p:sp>
+      <p:sp>
+        <p:nvSpPr>
+          <p:cNvPr id="8" name="TextBox 7"/>
           <p:cNvSpPr txBox="1"/>
           <p:nvPr/>
         </p:nvSpPr>
         <p:spPr>
           <a:xfrm>
-            <a:off x="7242048" y="1915668"/>
-            <a:ext cx="1289304" cy="489204"/>
+            <a:off x="7168896" y="1380744"/>
+            <a:ext cx="1261872" cy="429768"/>
           </a:xfrm>
           <a:prstGeom prst="rect">
             <a:avLst/>
@@ -19326,22 +19163,19 @@
               <a:lnSpc>
                 <a:spcPct val="110000"/>
               </a:lnSpc>
-              <a:spcBef>
-                <a:spcPts val="0"/>
-              </a:spcBef>
               <a:spcAft>
                 <a:spcPts val="300"/>
               </a:spcAft>
             </a:pPr>
             <a:r>
-              <a:rPr sz="700">
+              <a:rPr sz="680">
                 <a:solidFill>
                   <a:srgbClr val="00B388"/>
                 </a:solidFill>
                 <a:latin typeface="AvenirNext LT Pro Regular"/>
-                <a:hlinkClick r:id="rId5"/>
+                <a:hlinkClick r:id="rId3"/>
               </a:rPr>
-              <a:t>Nat. Commun. 15, 2724 (2024)</a:t>
+              <a:t>JVST A 43, 032702 (2025)</a:t>
             </a:r>
           </a:p>
           <a:p>
@@ -19349,42 +19183,41 @@
               <a:lnSpc>
                 <a:spcPct val="110000"/>
               </a:lnSpc>
-              <a:spcBef>
-                <a:spcPts val="0"/>
-              </a:spcBef>
               <a:spcAft>
                 <a:spcPts val="300"/>
               </a:spcAft>
             </a:pPr>
             <a:r>
-              <a:rPr sz="700">
+              <a:rPr sz="680">
                 <a:solidFill>
                   <a:srgbClr val="00B388"/>
                 </a:solidFill>
                 <a:latin typeface="AvenirNext LT Pro Regular"/>
-                <a:hlinkClick r:id="rId6"/>
+                <a:hlinkClick r:id="rId4"/>
               </a:rPr>
-              <a:t>QD-laser (2025, PMC)</a:t>
-            </a:r>
-          </a:p>
-        </p:txBody>
-      </p:sp>
-      <p:sp>
-        <p:nvSpPr>
-          <p:cNvPr id="12" name="Rectangle 11"/>
+              <a:t>GitHub: pnnl/RHAAPSODY</a:t>
+            </a:r>
+          </a:p>
+        </p:txBody>
+      </p:sp>
+      <p:sp>
+        <p:nvSpPr>
+          <p:cNvPr id="9" name="Rounded Rectangle 8"/>
           <p:cNvSpPr/>
           <p:nvPr/>
         </p:nvSpPr>
         <p:spPr>
           <a:xfrm>
-            <a:off x="612648" y="2423160"/>
-            <a:ext cx="7918704" cy="11430"/>
-          </a:xfrm>
-          <a:prstGeom prst="rect">
-            <a:avLst/>
+            <a:off x="612648" y="1879091"/>
+            <a:ext cx="7918704" cy="521207"/>
+          </a:xfrm>
+          <a:prstGeom prst="roundRect">
+            <a:avLst>
+              <a:gd name="adj" fmla="val 16000"/>
+            </a:avLst>
           </a:prstGeom>
           <a:solidFill>
-            <a:srgbClr val="00B388"/>
+            <a:srgbClr val="F5F5F5"/>
           </a:solidFill>
           <a:ln>
             <a:noFill/>
@@ -19415,161 +19248,16 @@
       </p:sp>
       <p:sp>
         <p:nvSpPr>
-          <p:cNvPr id="13" name="TextBox 12"/>
-          <p:cNvSpPr txBox="1"/>
-          <p:nvPr/>
-        </p:nvSpPr>
-        <p:spPr>
-          <a:xfrm>
-            <a:off x="612648" y="2478024"/>
-            <a:ext cx="1389888" cy="489204"/>
-          </a:xfrm>
-          <a:prstGeom prst="rect">
-            <a:avLst/>
-          </a:prstGeom>
-          <a:noFill/>
-        </p:spPr>
-        <p:txBody>
-          <a:bodyPr wrap="square" anchor="t" lIns="0" rIns="0" tIns="0" bIns="0">
-            <a:spAutoFit/>
-          </a:bodyPr>
-          <a:lstStyle/>
-          <a:p>
-            <a:pPr>
-              <a:lnSpc>
-                <a:spcPct val="115000"/>
-              </a:lnSpc>
-              <a:spcBef>
-                <a:spcPts val="0"/>
-              </a:spcBef>
-              <a:spcAft>
-                <a:spcPts val="200"/>
-              </a:spcAft>
-            </a:pPr>
-            <a:r>
-              <a:rPr sz="750">
-                <a:solidFill>
-                  <a:srgbClr val="191919"/>
-                </a:solidFill>
-                <a:latin typeface="AvenirNext LT Pro Medium"/>
-              </a:rPr>
-              <a:t>MBE unattended operation</a:t>
-            </a:r>
-          </a:p>
-        </p:txBody>
-      </p:sp>
-      <p:sp>
-        <p:nvSpPr>
-          <p:cNvPr id="14" name="TextBox 13"/>
-          <p:cNvSpPr txBox="1"/>
-          <p:nvPr/>
-        </p:nvSpPr>
-        <p:spPr>
-          <a:xfrm>
-            <a:off x="2121408" y="2478024"/>
-            <a:ext cx="4983480" cy="489204"/>
-          </a:xfrm>
-          <a:prstGeom prst="rect">
-            <a:avLst/>
-          </a:prstGeom>
-          <a:noFill/>
-        </p:spPr>
-        <p:txBody>
-          <a:bodyPr wrap="square" anchor="t" lIns="0" rIns="0" tIns="0" bIns="0">
-            <a:spAutoFit/>
-          </a:bodyPr>
-          <a:lstStyle/>
-          <a:p>
-            <a:pPr>
-              <a:lnSpc>
-                <a:spcPct val="116000"/>
-              </a:lnSpc>
-              <a:spcBef>
-                <a:spcPts val="0"/>
-              </a:spcBef>
-              <a:spcAft>
-                <a:spcPts val="200"/>
-              </a:spcAft>
-            </a:pPr>
-            <a:r>
-              <a:rPr sz="720">
-                <a:solidFill>
-                  <a:srgbClr val="191919"/>
-                </a:solidFill>
-                <a:latin typeface="AvenirNext LT Pro Medium"/>
-              </a:rPr>
-              <a:t>IVWorks — Korean GaN epiwafer foundry. </a:t>
-            </a:r>
-            <a:r>
-              <a:rPr sz="720">
-                <a:solidFill>
-                  <a:srgbClr val="191919"/>
-                </a:solidFill>
-                <a:latin typeface="AvenirNext LT Pro Regular"/>
-              </a:rPr>
-              <a:t>DOMM Agent drives the MBE control PC: scheduled load–grow–unload runs execute unattended on nights/holidays with real-time pass/fail prediction. Commercial existence proof of the route — no yield / unattended-hours / dispersion figures published; cite strictly as a vendor claim.</a:t>
-            </a:r>
-          </a:p>
-        </p:txBody>
-      </p:sp>
-      <p:sp>
-        <p:nvSpPr>
-          <p:cNvPr id="15" name="TextBox 14"/>
-          <p:cNvSpPr txBox="1"/>
-          <p:nvPr/>
-        </p:nvSpPr>
-        <p:spPr>
-          <a:xfrm>
-            <a:off x="7242048" y="2478024"/>
-            <a:ext cx="1289304" cy="489204"/>
-          </a:xfrm>
-          <a:prstGeom prst="rect">
-            <a:avLst/>
-          </a:prstGeom>
-          <a:noFill/>
-        </p:spPr>
-        <p:txBody>
-          <a:bodyPr wrap="square" anchor="t" lIns="0" rIns="0" tIns="0" bIns="0">
-            <a:spAutoFit/>
-          </a:bodyPr>
-          <a:lstStyle/>
-          <a:p>
-            <a:pPr>
-              <a:lnSpc>
-                <a:spcPct val="110000"/>
-              </a:lnSpc>
-              <a:spcBef>
-                <a:spcPts val="0"/>
-              </a:spcBef>
-              <a:spcAft>
-                <a:spcPts val="300"/>
-              </a:spcAft>
-            </a:pPr>
-            <a:r>
-              <a:rPr sz="700">
-                <a:solidFill>
-                  <a:srgbClr val="00B388"/>
-                </a:solidFill>
-                <a:latin typeface="AvenirNext LT Pro Regular"/>
-                <a:hlinkClick r:id="rId7"/>
-              </a:rPr>
-              <a:t>IVWorks announcement (Jun 2025)</a:t>
-            </a:r>
-          </a:p>
-        </p:txBody>
-      </p:sp>
-      <p:sp>
-        <p:nvSpPr>
-          <p:cNvPr id="16" name="Rectangle 15"/>
+          <p:cNvPr id="10" name="Oval 9"/>
           <p:cNvSpPr/>
           <p:nvPr/>
         </p:nvSpPr>
         <p:spPr>
           <a:xfrm>
-            <a:off x="612648" y="2985516"/>
-            <a:ext cx="7918704" cy="11430"/>
-          </a:xfrm>
-          <a:prstGeom prst="rect">
+            <a:off x="731520" y="2029967"/>
+            <a:ext cx="219456" cy="219456"/>
+          </a:xfrm>
+          <a:prstGeom prst="ellipse">
             <a:avLst/>
           </a:prstGeom>
           <a:solidFill>
@@ -19595,23 +19283,32 @@
           </a:fontRef>
         </p:style>
         <p:txBody>
-          <a:bodyPr rtlCol="0" anchor="ctr"/>
+          <a:bodyPr rtlCol="0" anchor="ctr" lIns="0" rIns="0" tIns="0" bIns="0" wrap="none"/>
           <a:lstStyle/>
           <a:p>
             <a:pPr algn="ctr"/>
-          </a:p>
-        </p:txBody>
-      </p:sp>
-      <p:sp>
-        <p:nvSpPr>
-          <p:cNvPr id="17" name="TextBox 16"/>
+            <a:r>
+              <a:rPr sz="750">
+                <a:solidFill>
+                  <a:srgbClr val="FFFFFF"/>
+                </a:solidFill>
+                <a:latin typeface="AvenirNext LT Pro Medium"/>
+              </a:rPr>
+              <a:t>2</a:t>
+            </a:r>
+          </a:p>
+        </p:txBody>
+      </p:sp>
+      <p:sp>
+        <p:nvSpPr>
+          <p:cNvPr id="11" name="TextBox 10"/>
           <p:cNvSpPr txBox="1"/>
           <p:nvPr/>
         </p:nvSpPr>
         <p:spPr>
           <a:xfrm>
-            <a:off x="612648" y="3040380"/>
-            <a:ext cx="1389888" cy="489204"/>
+            <a:off x="1042415" y="1943099"/>
+            <a:ext cx="1097280" cy="429768"/>
           </a:xfrm>
           <a:prstGeom prst="rect">
             <a:avLst/>
@@ -19626,37 +19323,34 @@
           <a:p>
             <a:pPr>
               <a:lnSpc>
-                <a:spcPct val="115000"/>
+                <a:spcPct val="112000"/>
               </a:lnSpc>
-              <a:spcBef>
-                <a:spcPts val="0"/>
-              </a:spcBef>
               <a:spcAft>
                 <a:spcPts val="200"/>
               </a:spcAft>
             </a:pPr>
             <a:r>
-              <a:rPr sz="750">
+              <a:rPr sz="720">
                 <a:solidFill>
                   <a:srgbClr val="191919"/>
                 </a:solidFill>
                 <a:latin typeface="AvenirNext LT Pro Medium"/>
               </a:rPr>
-              <a:t>Autonomous experimentation, real sputter tool</a:t>
-            </a:r>
-          </a:p>
-        </p:txBody>
-      </p:sp>
-      <p:sp>
-        <p:nvSpPr>
-          <p:cNvPr id="18" name="TextBox 17"/>
+              <a:t>MBE real-time closed loop</a:t>
+            </a:r>
+          </a:p>
+        </p:txBody>
+      </p:sp>
+      <p:sp>
+        <p:nvSpPr>
+          <p:cNvPr id="12" name="TextBox 11"/>
           <p:cNvSpPr txBox="1"/>
           <p:nvPr/>
         </p:nvSpPr>
         <p:spPr>
           <a:xfrm>
-            <a:off x="2121408" y="3040380"/>
-            <a:ext cx="4983480" cy="489204"/>
+            <a:off x="2231136" y="1943099"/>
+            <a:ext cx="4828032" cy="429768"/>
           </a:xfrm>
           <a:prstGeom prst="rect">
             <a:avLst/>
@@ -19671,46 +19365,43 @@
           <a:p>
             <a:pPr>
               <a:lnSpc>
-                <a:spcPct val="116000"/>
+                <a:spcPct val="115000"/>
               </a:lnSpc>
-              <a:spcBef>
-                <a:spcPts val="0"/>
-              </a:spcBef>
               <a:spcAft>
                 <a:spcPts val="200"/>
               </a:spcAft>
             </a:pPr>
             <a:r>
-              <a:rPr sz="720">
+              <a:rPr sz="700">
                 <a:solidFill>
                   <a:srgbClr val="191919"/>
                 </a:solidFill>
                 <a:latin typeface="AvenirNext LT Pro Medium"/>
               </a:rPr>
-              <a:t>Empa — Swiss Federal Laboratories for Materials Science &amp; Technology (Wieczorek, Siol et al.). </a:t>
-            </a:r>
-            <a:r>
-              <a:rPr sz="720">
+              <a:t>Chinese Academy of Sciences (Shen et al.); follow-up QD-laser work. </a:t>
+            </a:r>
+            <a:r>
+              <a:rPr sz="700">
                 <a:solidFill>
                   <a:srgbClr val="191919"/>
                 </a:solidFill>
                 <a:latin typeface="AvenirNext LT Pro Regular"/>
               </a:rPr>
-              <a:t>Autonomous Bayesian sampling (BayBE / BoTorch GP) on a real bipolar-HiPIMS rig: &gt;3,000 conditions across a 6-D space, unattended, SHAP-interpreted, data CC-BY. Their own finding was negative (positive pulse mostly hurts rate) — we cite method + dataset; our RIG kernel passed calibration acceptance on exactly this dataset.</a:t>
-            </a:r>
-          </a:p>
-        </p:txBody>
-      </p:sp>
-      <p:sp>
-        <p:nvSpPr>
-          <p:cNvPr id="19" name="TextBox 18"/>
+              <a:t>3D ResNet-50 on RHEED video predicts InAs/GaAs quantum-dot density in-run; the closed loop dials density across 3.8×10⁸–1.4×10¹¹ cm⁻² (~2.5 orders of magnitude), fully automated. The 2025 follow-up self-optimizes QD-laser growth: PL 3.2× the manual baseline, ~0.85 s per decision.</a:t>
+            </a:r>
+          </a:p>
+        </p:txBody>
+      </p:sp>
+      <p:sp>
+        <p:nvSpPr>
+          <p:cNvPr id="13" name="TextBox 12"/>
           <p:cNvSpPr txBox="1"/>
           <p:nvPr/>
         </p:nvSpPr>
         <p:spPr>
           <a:xfrm>
-            <a:off x="7242048" y="3040380"/>
-            <a:ext cx="1289304" cy="489204"/>
+            <a:off x="7168896" y="1943099"/>
+            <a:ext cx="1261872" cy="429768"/>
           </a:xfrm>
           <a:prstGeom prst="rect">
             <a:avLst/>
@@ -19727,22 +19418,19 @@
               <a:lnSpc>
                 <a:spcPct val="110000"/>
               </a:lnSpc>
-              <a:spcBef>
-                <a:spcPts val="0"/>
-              </a:spcBef>
               <a:spcAft>
                 <a:spcPts val="300"/>
               </a:spcAft>
             </a:pPr>
             <a:r>
-              <a:rPr sz="700">
+              <a:rPr sz="680">
                 <a:solidFill>
                   <a:srgbClr val="00B388"/>
                 </a:solidFill>
                 <a:latin typeface="AvenirNext LT Pro Regular"/>
-                <a:hlinkClick r:id="rId8"/>
+                <a:hlinkClick r:id="rId5"/>
               </a:rPr>
-              <a:t>Digital Discovery (2026)</a:t>
+              <a:t>Nat. Commun. 15, 2724 (2024)</a:t>
             </a:r>
           </a:p>
           <a:p>
@@ -19750,42 +19438,41 @@
               <a:lnSpc>
                 <a:spcPct val="110000"/>
               </a:lnSpc>
-              <a:spcBef>
-                <a:spcPts val="0"/>
-              </a:spcBef>
               <a:spcAft>
                 <a:spcPts val="300"/>
               </a:spcAft>
             </a:pPr>
             <a:r>
-              <a:rPr sz="700">
+              <a:rPr sz="680">
                 <a:solidFill>
                   <a:srgbClr val="00B388"/>
                 </a:solidFill>
                 <a:latin typeface="AvenirNext LT Pro Regular"/>
-                <a:hlinkClick r:id="rId9"/>
+                <a:hlinkClick r:id="rId6"/>
               </a:rPr>
-              <a:t>Zenodo dataset (CC-BY-4.0)</a:t>
-            </a:r>
-          </a:p>
-        </p:txBody>
-      </p:sp>
-      <p:sp>
-        <p:nvSpPr>
-          <p:cNvPr id="20" name="Rectangle 19"/>
+              <a:t>QD-laser (2025, PMC)</a:t>
+            </a:r>
+          </a:p>
+        </p:txBody>
+      </p:sp>
+      <p:sp>
+        <p:nvSpPr>
+          <p:cNvPr id="14" name="Rounded Rectangle 13"/>
           <p:cNvSpPr/>
           <p:nvPr/>
         </p:nvSpPr>
         <p:spPr>
           <a:xfrm>
-            <a:off x="612648" y="3547872"/>
-            <a:ext cx="7918704" cy="11430"/>
-          </a:xfrm>
-          <a:prstGeom prst="rect">
-            <a:avLst/>
+            <a:off x="612648" y="2441448"/>
+            <a:ext cx="7918704" cy="521207"/>
+          </a:xfrm>
+          <a:prstGeom prst="roundRect">
+            <a:avLst>
+              <a:gd name="adj" fmla="val 16000"/>
+            </a:avLst>
           </a:prstGeom>
           <a:solidFill>
-            <a:srgbClr val="00B388"/>
+            <a:srgbClr val="F5F5F5"/>
           </a:solidFill>
           <a:ln>
             <a:noFill/>
@@ -19816,161 +19503,16 @@
       </p:sp>
       <p:sp>
         <p:nvSpPr>
-          <p:cNvPr id="21" name="TextBox 20"/>
-          <p:cNvSpPr txBox="1"/>
-          <p:nvPr/>
-        </p:nvSpPr>
-        <p:spPr>
-          <a:xfrm>
-            <a:off x="612648" y="3602736"/>
-            <a:ext cx="1389888" cy="489204"/>
-          </a:xfrm>
-          <a:prstGeom prst="rect">
-            <a:avLst/>
-          </a:prstGeom>
-          <a:noFill/>
-        </p:spPr>
-        <p:txBody>
-          <a:bodyPr wrap="square" anchor="t" lIns="0" rIns="0" tIns="0" bIns="0">
-            <a:spAutoFit/>
-          </a:bodyPr>
-          <a:lstStyle/>
-          <a:p>
-            <a:pPr>
-              <a:lnSpc>
-                <a:spcPct val="115000"/>
-              </a:lnSpc>
-              <a:spcBef>
-                <a:spcPts val="0"/>
-              </a:spcBef>
-              <a:spcAft>
-                <a:spcPts val="200"/>
-              </a:spcAft>
-            </a:pPr>
-            <a:r>
-              <a:rPr sz="750">
-                <a:solidFill>
-                  <a:srgbClr val="191919"/>
-                </a:solidFill>
-                <a:latin typeface="AvenirNext LT Pro Medium"/>
-              </a:rPr>
-              <a:t>Self-driving PVD to a target spec</a:t>
-            </a:r>
-          </a:p>
-        </p:txBody>
-      </p:sp>
-      <p:sp>
-        <p:nvSpPr>
-          <p:cNvPr id="22" name="TextBox 21"/>
-          <p:cNvSpPr txBox="1"/>
-          <p:nvPr/>
-        </p:nvSpPr>
-        <p:spPr>
-          <a:xfrm>
-            <a:off x="2121408" y="3602736"/>
-            <a:ext cx="4983480" cy="489204"/>
-          </a:xfrm>
-          <a:prstGeom prst="rect">
-            <a:avLst/>
-          </a:prstGeom>
-          <a:noFill/>
-        </p:spPr>
-        <p:txBody>
-          <a:bodyPr wrap="square" anchor="t" lIns="0" rIns="0" tIns="0" bIns="0">
-            <a:spAutoFit/>
-          </a:bodyPr>
-          <a:lstStyle/>
-          <a:p>
-            <a:pPr>
-              <a:lnSpc>
-                <a:spcPct val="116000"/>
-              </a:lnSpc>
-              <a:spcBef>
-                <a:spcPts val="0"/>
-              </a:spcBef>
-              <a:spcAft>
-                <a:spcPts val="200"/>
-              </a:spcAft>
-            </a:pPr>
-            <a:r>
-              <a:rPr sz="720">
-                <a:solidFill>
-                  <a:srgbClr val="191919"/>
-                </a:solidFill>
-                <a:latin typeface="AvenirNext LT Pro Medium"/>
-              </a:rPr>
-              <a:t>npj Computational Materials (2025) — self-driving sputter lab. </a:t>
-            </a:r>
-            <a:r>
-              <a:rPr sz="720">
-                <a:solidFill>
-                  <a:srgbClr val="191919"/>
-                </a:solidFill>
-                <a:latin typeface="AvenirNext LT Pro Regular"/>
-              </a:rPr>
-              <a:t>Fully autonomous silver-film deposition: sputter hardware + in-situ optical spectroscopy + Bayesian ML with no human in the loop, aborting unpromising runs early. Hit the target optical spec in 2.3 attempts on average (vs 3.6 ablated), 98 s per cycle, &gt;20,000 data points over 38 samples.</a:t>
-            </a:r>
-          </a:p>
-        </p:txBody>
-      </p:sp>
-      <p:sp>
-        <p:nvSpPr>
-          <p:cNvPr id="23" name="TextBox 22"/>
-          <p:cNvSpPr txBox="1"/>
-          <p:nvPr/>
-        </p:nvSpPr>
-        <p:spPr>
-          <a:xfrm>
-            <a:off x="7242048" y="3602736"/>
-            <a:ext cx="1289304" cy="489204"/>
-          </a:xfrm>
-          <a:prstGeom prst="rect">
-            <a:avLst/>
-          </a:prstGeom>
-          <a:noFill/>
-        </p:spPr>
-        <p:txBody>
-          <a:bodyPr wrap="square" anchor="t" lIns="0" rIns="0" tIns="0" bIns="0">
-            <a:spAutoFit/>
-          </a:bodyPr>
-          <a:lstStyle/>
-          <a:p>
-            <a:pPr>
-              <a:lnSpc>
-                <a:spcPct val="110000"/>
-              </a:lnSpc>
-              <a:spcBef>
-                <a:spcPts val="0"/>
-              </a:spcBef>
-              <a:spcAft>
-                <a:spcPts val="300"/>
-              </a:spcAft>
-            </a:pPr>
-            <a:r>
-              <a:rPr sz="700">
-                <a:solidFill>
-                  <a:srgbClr val="00B388"/>
-                </a:solidFill>
-                <a:latin typeface="AvenirNext LT Pro Regular"/>
-                <a:hlinkClick r:id="rId10"/>
-              </a:rPr>
-              <a:t>npj Comput. Mater. (2025)</a:t>
-            </a:r>
-          </a:p>
-        </p:txBody>
-      </p:sp>
-      <p:sp>
-        <p:nvSpPr>
-          <p:cNvPr id="24" name="Rectangle 23"/>
+          <p:cNvPr id="15" name="Oval 14"/>
           <p:cNvSpPr/>
           <p:nvPr/>
         </p:nvSpPr>
         <p:spPr>
           <a:xfrm>
-            <a:off x="612648" y="4110228"/>
-            <a:ext cx="7918704" cy="11430"/>
-          </a:xfrm>
-          <a:prstGeom prst="rect">
+            <a:off x="731520" y="2592324"/>
+            <a:ext cx="219456" cy="219456"/>
+          </a:xfrm>
+          <a:prstGeom prst="ellipse">
             <a:avLst/>
           </a:prstGeom>
           <a:solidFill>
@@ -19996,23 +19538,32 @@
           </a:fontRef>
         </p:style>
         <p:txBody>
-          <a:bodyPr rtlCol="0" anchor="ctr"/>
+          <a:bodyPr rtlCol="0" anchor="ctr" lIns="0" rIns="0" tIns="0" bIns="0" wrap="none"/>
           <a:lstStyle/>
           <a:p>
             <a:pPr algn="ctr"/>
-          </a:p>
-        </p:txBody>
-      </p:sp>
-      <p:sp>
-        <p:nvSpPr>
-          <p:cNvPr id="25" name="TextBox 24"/>
+            <a:r>
+              <a:rPr sz="750">
+                <a:solidFill>
+                  <a:srgbClr val="FFFFFF"/>
+                </a:solidFill>
+                <a:latin typeface="AvenirNext LT Pro Medium"/>
+              </a:rPr>
+              <a:t>3</a:t>
+            </a:r>
+          </a:p>
+        </p:txBody>
+      </p:sp>
+      <p:sp>
+        <p:nvSpPr>
+          <p:cNvPr id="16" name="TextBox 15"/>
           <p:cNvSpPr txBox="1"/>
           <p:nvPr/>
         </p:nvSpPr>
         <p:spPr>
           <a:xfrm>
-            <a:off x="612648" y="4165092"/>
-            <a:ext cx="1389888" cy="489204"/>
+            <a:off x="1042415" y="2505456"/>
+            <a:ext cx="1097280" cy="429768"/>
           </a:xfrm>
           <a:prstGeom prst="rect">
             <a:avLst/>
@@ -20027,37 +19578,34 @@
           <a:p>
             <a:pPr>
               <a:lnSpc>
-                <a:spcPct val="115000"/>
+                <a:spcPct val="112000"/>
               </a:lnSpc>
-              <a:spcBef>
-                <a:spcPts val="0"/>
-              </a:spcBef>
               <a:spcAft>
                 <a:spcPts val="200"/>
               </a:spcAft>
             </a:pPr>
             <a:r>
-              <a:rPr sz="750">
+              <a:rPr sz="720">
                 <a:solidFill>
                   <a:srgbClr val="191919"/>
                 </a:solidFill>
                 <a:latin typeface="AvenirNext LT Pro Medium"/>
               </a:rPr>
-              <a:t>Run-to-run APC + virtual metrology</a:t>
-            </a:r>
-          </a:p>
-        </p:txBody>
-      </p:sp>
-      <p:sp>
-        <p:nvSpPr>
-          <p:cNvPr id="26" name="TextBox 25"/>
+              <a:t>MBE unattended operation</a:t>
+            </a:r>
+          </a:p>
+        </p:txBody>
+      </p:sp>
+      <p:sp>
+        <p:nvSpPr>
+          <p:cNvPr id="17" name="TextBox 16"/>
           <p:cNvSpPr txBox="1"/>
           <p:nvPr/>
         </p:nvSpPr>
         <p:spPr>
           <a:xfrm>
-            <a:off x="2121408" y="4165092"/>
-            <a:ext cx="4983480" cy="489204"/>
+            <a:off x="2231136" y="2505456"/>
+            <a:ext cx="4828032" cy="429768"/>
           </a:xfrm>
           <a:prstGeom prst="rect">
             <a:avLst/>
@@ -20072,46 +19620,43 @@
           <a:p>
             <a:pPr>
               <a:lnSpc>
-                <a:spcPct val="116000"/>
+                <a:spcPct val="115000"/>
               </a:lnSpc>
-              <a:spcBef>
-                <a:spcPts val="0"/>
-              </a:spcBef>
               <a:spcAft>
                 <a:spcPts val="200"/>
               </a:spcAft>
             </a:pPr>
             <a:r>
-              <a:rPr sz="720">
+              <a:rPr sz="700">
                 <a:solidFill>
                   <a:srgbClr val="191919"/>
                 </a:solidFill>
                 <a:latin typeface="AvenirNext LT Pro Medium"/>
               </a:rPr>
-              <a:t>Industry practice (PVD). </a:t>
-            </a:r>
-            <a:r>
-              <a:rPr sz="720">
+              <a:t>IVWorks — Korean GaN epiwafer foundry. </a:t>
+            </a:r>
+            <a:r>
+              <a:rPr sz="700">
                 <a:solidFill>
                   <a:srgbClr val="191919"/>
                 </a:solidFill>
                 <a:latin typeface="AvenirNext LT Pro Regular"/>
               </a:rPr>
-              <a:t>Published sputter-APC case: EWMA run-to-run compensation of target-erosion drift lifts Cpk from &lt;1.4 to &gt;2.0 — a retrospective simulation on historical fab data (vendor case study, not audited). Tree-ensemble virtual metrology for PVD film properties: Chen et al., ISA Trans. 103 (2020).</a:t>
-            </a:r>
-          </a:p>
-        </p:txBody>
-      </p:sp>
-      <p:sp>
-        <p:nvSpPr>
-          <p:cNvPr id="27" name="TextBox 26"/>
+              <a:t>DOMM Agent drives the MBE control PC: scheduled load–grow–unload runs execute unattended on nights/holidays with real-time pass/fail prediction. Commercial existence proof of the route — no yield / unattended-hours / dispersion figures published; cite strictly as a vendor claim.</a:t>
+            </a:r>
+          </a:p>
+        </p:txBody>
+      </p:sp>
+      <p:sp>
+        <p:nvSpPr>
+          <p:cNvPr id="18" name="TextBox 17"/>
           <p:cNvSpPr txBox="1"/>
           <p:nvPr/>
         </p:nvSpPr>
         <p:spPr>
           <a:xfrm>
-            <a:off x="7242048" y="4165092"/>
-            <a:ext cx="1289304" cy="489204"/>
+            <a:off x="7168896" y="2505456"/>
+            <a:ext cx="1261872" cy="429768"/>
           </a:xfrm>
           <a:prstGeom prst="rect">
             <a:avLst/>
@@ -20128,42 +19673,41 @@
               <a:lnSpc>
                 <a:spcPct val="110000"/>
               </a:lnSpc>
-              <a:spcBef>
-                <a:spcPts val="0"/>
-              </a:spcBef>
               <a:spcAft>
                 <a:spcPts val="300"/>
               </a:spcAft>
             </a:pPr>
             <a:r>
-              <a:rPr sz="700">
+              <a:rPr sz="680">
                 <a:solidFill>
                   <a:srgbClr val="00B388"/>
                 </a:solidFill>
                 <a:latin typeface="AvenirNext LT Pro Regular"/>
-                <a:hlinkClick r:id="rId11"/>
+                <a:hlinkClick r:id="rId7"/>
               </a:rPr>
-              <a:t>Spotfire sputter-APC article</a:t>
-            </a:r>
-          </a:p>
-        </p:txBody>
-      </p:sp>
-      <p:sp>
-        <p:nvSpPr>
-          <p:cNvPr id="28" name="Rectangle 27"/>
+              <a:t>IVWorks announcement (Jun 2025)</a:t>
+            </a:r>
+          </a:p>
+        </p:txBody>
+      </p:sp>
+      <p:sp>
+        <p:nvSpPr>
+          <p:cNvPr id="19" name="Rounded Rectangle 18"/>
           <p:cNvSpPr/>
           <p:nvPr/>
         </p:nvSpPr>
         <p:spPr>
           <a:xfrm>
-            <a:off x="612648" y="4672584"/>
-            <a:ext cx="7918704" cy="11430"/>
-          </a:xfrm>
-          <a:prstGeom prst="rect">
-            <a:avLst/>
+            <a:off x="612648" y="3003804"/>
+            <a:ext cx="7918704" cy="521207"/>
+          </a:xfrm>
+          <a:prstGeom prst="roundRect">
+            <a:avLst>
+              <a:gd name="adj" fmla="val 16000"/>
+            </a:avLst>
           </a:prstGeom>
           <a:solidFill>
-            <a:srgbClr val="00B388"/>
+            <a:srgbClr val="F5F5F5"/>
           </a:solidFill>
           <a:ln>
             <a:noFill/>
@@ -20189,6 +19733,685 @@
           <a:lstStyle/>
           <a:p>
             <a:pPr algn="ctr"/>
+          </a:p>
+        </p:txBody>
+      </p:sp>
+      <p:sp>
+        <p:nvSpPr>
+          <p:cNvPr id="20" name="Oval 19"/>
+          <p:cNvSpPr/>
+          <p:nvPr/>
+        </p:nvSpPr>
+        <p:spPr>
+          <a:xfrm>
+            <a:off x="731520" y="3154680"/>
+            <a:ext cx="219456" cy="219456"/>
+          </a:xfrm>
+          <a:prstGeom prst="ellipse">
+            <a:avLst/>
+          </a:prstGeom>
+          <a:solidFill>
+            <a:srgbClr val="00B388"/>
+          </a:solidFill>
+          <a:ln>
+            <a:noFill/>
+          </a:ln>
+          <a:effectLst/>
+        </p:spPr>
+        <p:style>
+          <a:lnRef idx="1">
+            <a:schemeClr val="accent1"/>
+          </a:lnRef>
+          <a:fillRef idx="3">
+            <a:schemeClr val="accent1"/>
+          </a:fillRef>
+          <a:effectRef idx="2">
+            <a:schemeClr val="accent1"/>
+          </a:effectRef>
+          <a:fontRef idx="minor">
+            <a:schemeClr val="lt1"/>
+          </a:fontRef>
+        </p:style>
+        <p:txBody>
+          <a:bodyPr rtlCol="0" anchor="ctr" lIns="0" rIns="0" tIns="0" bIns="0" wrap="none"/>
+          <a:lstStyle/>
+          <a:p>
+            <a:pPr algn="ctr"/>
+            <a:r>
+              <a:rPr sz="750">
+                <a:solidFill>
+                  <a:srgbClr val="FFFFFF"/>
+                </a:solidFill>
+                <a:latin typeface="AvenirNext LT Pro Medium"/>
+              </a:rPr>
+              <a:t>4</a:t>
+            </a:r>
+          </a:p>
+        </p:txBody>
+      </p:sp>
+      <p:sp>
+        <p:nvSpPr>
+          <p:cNvPr id="21" name="TextBox 20"/>
+          <p:cNvSpPr txBox="1"/>
+          <p:nvPr/>
+        </p:nvSpPr>
+        <p:spPr>
+          <a:xfrm>
+            <a:off x="1042415" y="3067812"/>
+            <a:ext cx="1097280" cy="429768"/>
+          </a:xfrm>
+          <a:prstGeom prst="rect">
+            <a:avLst/>
+          </a:prstGeom>
+          <a:noFill/>
+        </p:spPr>
+        <p:txBody>
+          <a:bodyPr wrap="square" anchor="t" lIns="0" rIns="0" tIns="0" bIns="0">
+            <a:spAutoFit/>
+          </a:bodyPr>
+          <a:lstStyle/>
+          <a:p>
+            <a:pPr>
+              <a:lnSpc>
+                <a:spcPct val="112000"/>
+              </a:lnSpc>
+              <a:spcAft>
+                <a:spcPts val="200"/>
+              </a:spcAft>
+            </a:pPr>
+            <a:r>
+              <a:rPr sz="720">
+                <a:solidFill>
+                  <a:srgbClr val="191919"/>
+                </a:solidFill>
+                <a:latin typeface="AvenirNext LT Pro Medium"/>
+              </a:rPr>
+              <a:t>Autonomous experimentation, real sputter tool</a:t>
+            </a:r>
+          </a:p>
+        </p:txBody>
+      </p:sp>
+      <p:sp>
+        <p:nvSpPr>
+          <p:cNvPr id="22" name="TextBox 21"/>
+          <p:cNvSpPr txBox="1"/>
+          <p:nvPr/>
+        </p:nvSpPr>
+        <p:spPr>
+          <a:xfrm>
+            <a:off x="2231136" y="3067812"/>
+            <a:ext cx="4828032" cy="429768"/>
+          </a:xfrm>
+          <a:prstGeom prst="rect">
+            <a:avLst/>
+          </a:prstGeom>
+          <a:noFill/>
+        </p:spPr>
+        <p:txBody>
+          <a:bodyPr wrap="square" anchor="t" lIns="0" rIns="0" tIns="0" bIns="0">
+            <a:spAutoFit/>
+          </a:bodyPr>
+          <a:lstStyle/>
+          <a:p>
+            <a:pPr>
+              <a:lnSpc>
+                <a:spcPct val="115000"/>
+              </a:lnSpc>
+              <a:spcAft>
+                <a:spcPts val="200"/>
+              </a:spcAft>
+            </a:pPr>
+            <a:r>
+              <a:rPr sz="700">
+                <a:solidFill>
+                  <a:srgbClr val="191919"/>
+                </a:solidFill>
+                <a:latin typeface="AvenirNext LT Pro Medium"/>
+              </a:rPr>
+              <a:t>Empa — Swiss Federal Laboratories for Materials Science &amp; Technology (Wieczorek, Siol et al.). </a:t>
+            </a:r>
+            <a:r>
+              <a:rPr sz="700">
+                <a:solidFill>
+                  <a:srgbClr val="191919"/>
+                </a:solidFill>
+                <a:latin typeface="AvenirNext LT Pro Regular"/>
+              </a:rPr>
+              <a:t>Autonomous Bayesian sampling (BayBE / BoTorch GP) on a real bipolar-HiPIMS rig: &gt;3,000 conditions across a 6-D space, unattended, SHAP-interpreted, data CC-BY. Their own finding was negative — we cite method + dataset; our RIG kernel passed calibration acceptance on exactly this dataset.</a:t>
+            </a:r>
+          </a:p>
+        </p:txBody>
+      </p:sp>
+      <p:sp>
+        <p:nvSpPr>
+          <p:cNvPr id="23" name="TextBox 22"/>
+          <p:cNvSpPr txBox="1"/>
+          <p:nvPr/>
+        </p:nvSpPr>
+        <p:spPr>
+          <a:xfrm>
+            <a:off x="7168896" y="3067812"/>
+            <a:ext cx="1261872" cy="429768"/>
+          </a:xfrm>
+          <a:prstGeom prst="rect">
+            <a:avLst/>
+          </a:prstGeom>
+          <a:noFill/>
+        </p:spPr>
+        <p:txBody>
+          <a:bodyPr wrap="square" anchor="t" lIns="0" rIns="0" tIns="0" bIns="0">
+            <a:spAutoFit/>
+          </a:bodyPr>
+          <a:lstStyle/>
+          <a:p>
+            <a:pPr>
+              <a:lnSpc>
+                <a:spcPct val="110000"/>
+              </a:lnSpc>
+              <a:spcAft>
+                <a:spcPts val="300"/>
+              </a:spcAft>
+            </a:pPr>
+            <a:r>
+              <a:rPr sz="680">
+                <a:solidFill>
+                  <a:srgbClr val="00B388"/>
+                </a:solidFill>
+                <a:latin typeface="AvenirNext LT Pro Regular"/>
+                <a:hlinkClick r:id="rId8"/>
+              </a:rPr>
+              <a:t>Digital Discovery (2026)</a:t>
+            </a:r>
+          </a:p>
+          <a:p>
+            <a:pPr>
+              <a:lnSpc>
+                <a:spcPct val="110000"/>
+              </a:lnSpc>
+              <a:spcAft>
+                <a:spcPts val="300"/>
+              </a:spcAft>
+            </a:pPr>
+            <a:r>
+              <a:rPr sz="680">
+                <a:solidFill>
+                  <a:srgbClr val="00B388"/>
+                </a:solidFill>
+                <a:latin typeface="AvenirNext LT Pro Regular"/>
+                <a:hlinkClick r:id="rId9"/>
+              </a:rPr>
+              <a:t>Zenodo dataset (CC-BY-4.0)</a:t>
+            </a:r>
+          </a:p>
+        </p:txBody>
+      </p:sp>
+      <p:sp>
+        <p:nvSpPr>
+          <p:cNvPr id="24" name="Rounded Rectangle 23"/>
+          <p:cNvSpPr/>
+          <p:nvPr/>
+        </p:nvSpPr>
+        <p:spPr>
+          <a:xfrm>
+            <a:off x="612648" y="3566160"/>
+            <a:ext cx="7918704" cy="521207"/>
+          </a:xfrm>
+          <a:prstGeom prst="roundRect">
+            <a:avLst>
+              <a:gd name="adj" fmla="val 16000"/>
+            </a:avLst>
+          </a:prstGeom>
+          <a:solidFill>
+            <a:srgbClr val="F5F5F5"/>
+          </a:solidFill>
+          <a:ln>
+            <a:noFill/>
+          </a:ln>
+          <a:effectLst/>
+        </p:spPr>
+        <p:style>
+          <a:lnRef idx="1">
+            <a:schemeClr val="accent1"/>
+          </a:lnRef>
+          <a:fillRef idx="3">
+            <a:schemeClr val="accent1"/>
+          </a:fillRef>
+          <a:effectRef idx="2">
+            <a:schemeClr val="accent1"/>
+          </a:effectRef>
+          <a:fontRef idx="minor">
+            <a:schemeClr val="lt1"/>
+          </a:fontRef>
+        </p:style>
+        <p:txBody>
+          <a:bodyPr rtlCol="0" anchor="ctr"/>
+          <a:lstStyle/>
+          <a:p>
+            <a:pPr algn="ctr"/>
+          </a:p>
+        </p:txBody>
+      </p:sp>
+      <p:sp>
+        <p:nvSpPr>
+          <p:cNvPr id="25" name="Oval 24"/>
+          <p:cNvSpPr/>
+          <p:nvPr/>
+        </p:nvSpPr>
+        <p:spPr>
+          <a:xfrm>
+            <a:off x="731520" y="3717036"/>
+            <a:ext cx="219456" cy="219456"/>
+          </a:xfrm>
+          <a:prstGeom prst="ellipse">
+            <a:avLst/>
+          </a:prstGeom>
+          <a:solidFill>
+            <a:srgbClr val="00B388"/>
+          </a:solidFill>
+          <a:ln>
+            <a:noFill/>
+          </a:ln>
+          <a:effectLst/>
+        </p:spPr>
+        <p:style>
+          <a:lnRef idx="1">
+            <a:schemeClr val="accent1"/>
+          </a:lnRef>
+          <a:fillRef idx="3">
+            <a:schemeClr val="accent1"/>
+          </a:fillRef>
+          <a:effectRef idx="2">
+            <a:schemeClr val="accent1"/>
+          </a:effectRef>
+          <a:fontRef idx="minor">
+            <a:schemeClr val="lt1"/>
+          </a:fontRef>
+        </p:style>
+        <p:txBody>
+          <a:bodyPr rtlCol="0" anchor="ctr" lIns="0" rIns="0" tIns="0" bIns="0" wrap="none"/>
+          <a:lstStyle/>
+          <a:p>
+            <a:pPr algn="ctr"/>
+            <a:r>
+              <a:rPr sz="750">
+                <a:solidFill>
+                  <a:srgbClr val="FFFFFF"/>
+                </a:solidFill>
+                <a:latin typeface="AvenirNext LT Pro Medium"/>
+              </a:rPr>
+              <a:t>5</a:t>
+            </a:r>
+          </a:p>
+        </p:txBody>
+      </p:sp>
+      <p:sp>
+        <p:nvSpPr>
+          <p:cNvPr id="26" name="TextBox 25"/>
+          <p:cNvSpPr txBox="1"/>
+          <p:nvPr/>
+        </p:nvSpPr>
+        <p:spPr>
+          <a:xfrm>
+            <a:off x="1042415" y="3630168"/>
+            <a:ext cx="1097280" cy="429768"/>
+          </a:xfrm>
+          <a:prstGeom prst="rect">
+            <a:avLst/>
+          </a:prstGeom>
+          <a:noFill/>
+        </p:spPr>
+        <p:txBody>
+          <a:bodyPr wrap="square" anchor="t" lIns="0" rIns="0" tIns="0" bIns="0">
+            <a:spAutoFit/>
+          </a:bodyPr>
+          <a:lstStyle/>
+          <a:p>
+            <a:pPr>
+              <a:lnSpc>
+                <a:spcPct val="112000"/>
+              </a:lnSpc>
+              <a:spcAft>
+                <a:spcPts val="200"/>
+              </a:spcAft>
+            </a:pPr>
+            <a:r>
+              <a:rPr sz="720">
+                <a:solidFill>
+                  <a:srgbClr val="191919"/>
+                </a:solidFill>
+                <a:latin typeface="AvenirNext LT Pro Medium"/>
+              </a:rPr>
+              <a:t>Self-driving PVD to a target spec</a:t>
+            </a:r>
+          </a:p>
+        </p:txBody>
+      </p:sp>
+      <p:sp>
+        <p:nvSpPr>
+          <p:cNvPr id="27" name="TextBox 26"/>
+          <p:cNvSpPr txBox="1"/>
+          <p:nvPr/>
+        </p:nvSpPr>
+        <p:spPr>
+          <a:xfrm>
+            <a:off x="2231136" y="3630168"/>
+            <a:ext cx="4828032" cy="429768"/>
+          </a:xfrm>
+          <a:prstGeom prst="rect">
+            <a:avLst/>
+          </a:prstGeom>
+          <a:noFill/>
+        </p:spPr>
+        <p:txBody>
+          <a:bodyPr wrap="square" anchor="t" lIns="0" rIns="0" tIns="0" bIns="0">
+            <a:spAutoFit/>
+          </a:bodyPr>
+          <a:lstStyle/>
+          <a:p>
+            <a:pPr>
+              <a:lnSpc>
+                <a:spcPct val="115000"/>
+              </a:lnSpc>
+              <a:spcAft>
+                <a:spcPts val="200"/>
+              </a:spcAft>
+            </a:pPr>
+            <a:r>
+              <a:rPr sz="700">
+                <a:solidFill>
+                  <a:srgbClr val="191919"/>
+                </a:solidFill>
+                <a:latin typeface="AvenirNext LT Pro Medium"/>
+              </a:rPr>
+              <a:t>npj Computational Materials (2025) — self-driving sputter lab. </a:t>
+            </a:r>
+            <a:r>
+              <a:rPr sz="700">
+                <a:solidFill>
+                  <a:srgbClr val="191919"/>
+                </a:solidFill>
+                <a:latin typeface="AvenirNext LT Pro Regular"/>
+              </a:rPr>
+              <a:t>Fully autonomous silver-film deposition: sputter hardware + in-situ optical spectroscopy + Bayesian ML with no human in the loop, aborting unpromising runs early. Hit the target optical spec in 2.3 attempts on average (vs 3.6 ablated), 98 s per cycle, &gt;20,000 data points over 38 samples.</a:t>
+            </a:r>
+          </a:p>
+        </p:txBody>
+      </p:sp>
+      <p:sp>
+        <p:nvSpPr>
+          <p:cNvPr id="28" name="TextBox 27"/>
+          <p:cNvSpPr txBox="1"/>
+          <p:nvPr/>
+        </p:nvSpPr>
+        <p:spPr>
+          <a:xfrm>
+            <a:off x="7168896" y="3630168"/>
+            <a:ext cx="1261872" cy="429768"/>
+          </a:xfrm>
+          <a:prstGeom prst="rect">
+            <a:avLst/>
+          </a:prstGeom>
+          <a:noFill/>
+        </p:spPr>
+        <p:txBody>
+          <a:bodyPr wrap="square" anchor="t" lIns="0" rIns="0" tIns="0" bIns="0">
+            <a:spAutoFit/>
+          </a:bodyPr>
+          <a:lstStyle/>
+          <a:p>
+            <a:pPr>
+              <a:lnSpc>
+                <a:spcPct val="110000"/>
+              </a:lnSpc>
+              <a:spcAft>
+                <a:spcPts val="300"/>
+              </a:spcAft>
+            </a:pPr>
+            <a:r>
+              <a:rPr sz="680">
+                <a:solidFill>
+                  <a:srgbClr val="00B388"/>
+                </a:solidFill>
+                <a:latin typeface="AvenirNext LT Pro Regular"/>
+                <a:hlinkClick r:id="rId10"/>
+              </a:rPr>
+              <a:t>npj Comput. Mater. (2025)</a:t>
+            </a:r>
+          </a:p>
+        </p:txBody>
+      </p:sp>
+      <p:sp>
+        <p:nvSpPr>
+          <p:cNvPr id="29" name="Rounded Rectangle 28"/>
+          <p:cNvSpPr/>
+          <p:nvPr/>
+        </p:nvSpPr>
+        <p:spPr>
+          <a:xfrm>
+            <a:off x="612648" y="4128516"/>
+            <a:ext cx="7918704" cy="521207"/>
+          </a:xfrm>
+          <a:prstGeom prst="roundRect">
+            <a:avLst>
+              <a:gd name="adj" fmla="val 16000"/>
+            </a:avLst>
+          </a:prstGeom>
+          <a:solidFill>
+            <a:srgbClr val="F5F5F5"/>
+          </a:solidFill>
+          <a:ln>
+            <a:noFill/>
+          </a:ln>
+          <a:effectLst/>
+        </p:spPr>
+        <p:style>
+          <a:lnRef idx="1">
+            <a:schemeClr val="accent1"/>
+          </a:lnRef>
+          <a:fillRef idx="3">
+            <a:schemeClr val="accent1"/>
+          </a:fillRef>
+          <a:effectRef idx="2">
+            <a:schemeClr val="accent1"/>
+          </a:effectRef>
+          <a:fontRef idx="minor">
+            <a:schemeClr val="lt1"/>
+          </a:fontRef>
+        </p:style>
+        <p:txBody>
+          <a:bodyPr rtlCol="0" anchor="ctr"/>
+          <a:lstStyle/>
+          <a:p>
+            <a:pPr algn="ctr"/>
+          </a:p>
+        </p:txBody>
+      </p:sp>
+      <p:sp>
+        <p:nvSpPr>
+          <p:cNvPr id="30" name="Oval 29"/>
+          <p:cNvSpPr/>
+          <p:nvPr/>
+        </p:nvSpPr>
+        <p:spPr>
+          <a:xfrm>
+            <a:off x="731520" y="4279392"/>
+            <a:ext cx="219456" cy="219456"/>
+          </a:xfrm>
+          <a:prstGeom prst="ellipse">
+            <a:avLst/>
+          </a:prstGeom>
+          <a:solidFill>
+            <a:srgbClr val="00B388"/>
+          </a:solidFill>
+          <a:ln>
+            <a:noFill/>
+          </a:ln>
+          <a:effectLst/>
+        </p:spPr>
+        <p:style>
+          <a:lnRef idx="1">
+            <a:schemeClr val="accent1"/>
+          </a:lnRef>
+          <a:fillRef idx="3">
+            <a:schemeClr val="accent1"/>
+          </a:fillRef>
+          <a:effectRef idx="2">
+            <a:schemeClr val="accent1"/>
+          </a:effectRef>
+          <a:fontRef idx="minor">
+            <a:schemeClr val="lt1"/>
+          </a:fontRef>
+        </p:style>
+        <p:txBody>
+          <a:bodyPr rtlCol="0" anchor="ctr" lIns="0" rIns="0" tIns="0" bIns="0" wrap="none"/>
+          <a:lstStyle/>
+          <a:p>
+            <a:pPr algn="ctr"/>
+            <a:r>
+              <a:rPr sz="750">
+                <a:solidFill>
+                  <a:srgbClr val="FFFFFF"/>
+                </a:solidFill>
+                <a:latin typeface="AvenirNext LT Pro Medium"/>
+              </a:rPr>
+              <a:t>6</a:t>
+            </a:r>
+          </a:p>
+        </p:txBody>
+      </p:sp>
+      <p:sp>
+        <p:nvSpPr>
+          <p:cNvPr id="31" name="TextBox 30"/>
+          <p:cNvSpPr txBox="1"/>
+          <p:nvPr/>
+        </p:nvSpPr>
+        <p:spPr>
+          <a:xfrm>
+            <a:off x="1042415" y="4192524"/>
+            <a:ext cx="1097280" cy="429768"/>
+          </a:xfrm>
+          <a:prstGeom prst="rect">
+            <a:avLst/>
+          </a:prstGeom>
+          <a:noFill/>
+        </p:spPr>
+        <p:txBody>
+          <a:bodyPr wrap="square" anchor="t" lIns="0" rIns="0" tIns="0" bIns="0">
+            <a:spAutoFit/>
+          </a:bodyPr>
+          <a:lstStyle/>
+          <a:p>
+            <a:pPr>
+              <a:lnSpc>
+                <a:spcPct val="112000"/>
+              </a:lnSpc>
+              <a:spcAft>
+                <a:spcPts val="200"/>
+              </a:spcAft>
+            </a:pPr>
+            <a:r>
+              <a:rPr sz="720">
+                <a:solidFill>
+                  <a:srgbClr val="191919"/>
+                </a:solidFill>
+                <a:latin typeface="AvenirNext LT Pro Medium"/>
+              </a:rPr>
+              <a:t>Run-to-run APC + virtual metrology</a:t>
+            </a:r>
+          </a:p>
+        </p:txBody>
+      </p:sp>
+      <p:sp>
+        <p:nvSpPr>
+          <p:cNvPr id="32" name="TextBox 31"/>
+          <p:cNvSpPr txBox="1"/>
+          <p:nvPr/>
+        </p:nvSpPr>
+        <p:spPr>
+          <a:xfrm>
+            <a:off x="2231136" y="4192524"/>
+            <a:ext cx="4828032" cy="429768"/>
+          </a:xfrm>
+          <a:prstGeom prst="rect">
+            <a:avLst/>
+          </a:prstGeom>
+          <a:noFill/>
+        </p:spPr>
+        <p:txBody>
+          <a:bodyPr wrap="square" anchor="t" lIns="0" rIns="0" tIns="0" bIns="0">
+            <a:spAutoFit/>
+          </a:bodyPr>
+          <a:lstStyle/>
+          <a:p>
+            <a:pPr>
+              <a:lnSpc>
+                <a:spcPct val="115000"/>
+              </a:lnSpc>
+              <a:spcAft>
+                <a:spcPts val="200"/>
+              </a:spcAft>
+            </a:pPr>
+            <a:r>
+              <a:rPr sz="700">
+                <a:solidFill>
+                  <a:srgbClr val="191919"/>
+                </a:solidFill>
+                <a:latin typeface="AvenirNext LT Pro Medium"/>
+              </a:rPr>
+              <a:t>Industry practice (PVD). </a:t>
+            </a:r>
+            <a:r>
+              <a:rPr sz="700">
+                <a:solidFill>
+                  <a:srgbClr val="191919"/>
+                </a:solidFill>
+                <a:latin typeface="AvenirNext LT Pro Regular"/>
+              </a:rPr>
+              <a:t>Published sputter-APC case: EWMA run-to-run compensation of target-erosion drift lifts Cpk from &lt;1.4 to &gt;2.0 — a retrospective simulation on historical fab data (vendor case study, not audited). Tree-ensemble virtual metrology for PVD film properties: Chen et al., ISA Trans. 103 (2020).</a:t>
+            </a:r>
+          </a:p>
+        </p:txBody>
+      </p:sp>
+      <p:sp>
+        <p:nvSpPr>
+          <p:cNvPr id="33" name="TextBox 32"/>
+          <p:cNvSpPr txBox="1"/>
+          <p:nvPr/>
+        </p:nvSpPr>
+        <p:spPr>
+          <a:xfrm>
+            <a:off x="7168896" y="4192524"/>
+            <a:ext cx="1261872" cy="429768"/>
+          </a:xfrm>
+          <a:prstGeom prst="rect">
+            <a:avLst/>
+          </a:prstGeom>
+          <a:noFill/>
+        </p:spPr>
+        <p:txBody>
+          <a:bodyPr wrap="square" anchor="t" lIns="0" rIns="0" tIns="0" bIns="0">
+            <a:spAutoFit/>
+          </a:bodyPr>
+          <a:lstStyle/>
+          <a:p>
+            <a:pPr>
+              <a:lnSpc>
+                <a:spcPct val="110000"/>
+              </a:lnSpc>
+              <a:spcAft>
+                <a:spcPts val="300"/>
+              </a:spcAft>
+            </a:pPr>
+            <a:r>
+              <a:rPr sz="680">
+                <a:solidFill>
+                  <a:srgbClr val="00B388"/>
+                </a:solidFill>
+                <a:latin typeface="AvenirNext LT Pro Regular"/>
+                <a:hlinkClick r:id="rId11"/>
+              </a:rPr>
+              <a:t>Spotfire sputter-APC article</a:t>
+            </a:r>
           </a:p>
         </p:txBody>
       </p:sp>
@@ -20290,9 +20513,6 @@
               <a:lnSpc>
                 <a:spcPct val="120000"/>
               </a:lnSpc>
-              <a:spcBef>
-                <a:spcPts val="0"/>
-              </a:spcBef>
               <a:spcAft>
                 <a:spcPts val="200"/>
               </a:spcAft>
@@ -20311,425 +20531,22 @@
       </p:sp>
       <p:sp>
         <p:nvSpPr>
-          <p:cNvPr id="5" name="TextBox 4"/>
-          <p:cNvSpPr txBox="1"/>
-          <p:nvPr/>
-        </p:nvSpPr>
-        <p:spPr>
-          <a:xfrm>
-            <a:off x="612648" y="1627632"/>
-            <a:ext cx="502920" cy="502920"/>
-          </a:xfrm>
-          <a:prstGeom prst="rect">
-            <a:avLst/>
-          </a:prstGeom>
-          <a:noFill/>
-        </p:spPr>
-        <p:txBody>
-          <a:bodyPr wrap="square" anchor="t" lIns="0" rIns="0" tIns="0" bIns="0">
-            <a:spAutoFit/>
-          </a:bodyPr>
-          <a:lstStyle/>
-          <a:p>
-            <a:pPr>
-              <a:lnSpc>
-                <a:spcPct val="100000"/>
-              </a:lnSpc>
-              <a:spcBef>
-                <a:spcPts val="0"/>
-              </a:spcBef>
-              <a:spcAft>
-                <a:spcPts val="200"/>
-              </a:spcAft>
-            </a:pPr>
-            <a:r>
-              <a:rPr sz="3000">
-                <a:solidFill>
-                  <a:srgbClr val="191919"/>
-                </a:solidFill>
-                <a:latin typeface="AvenirNext LT Pro Light"/>
-              </a:rPr>
-              <a:t>1</a:t>
-            </a:r>
-          </a:p>
-        </p:txBody>
-      </p:sp>
-      <p:sp>
-        <p:nvSpPr>
-          <p:cNvPr id="6" name="TextBox 5"/>
-          <p:cNvSpPr txBox="1"/>
-          <p:nvPr/>
-        </p:nvSpPr>
-        <p:spPr>
-          <a:xfrm>
-            <a:off x="1088136" y="1700784"/>
-            <a:ext cx="2103120" cy="219456"/>
-          </a:xfrm>
-          <a:prstGeom prst="rect">
-            <a:avLst/>
-          </a:prstGeom>
-          <a:noFill/>
-        </p:spPr>
-        <p:txBody>
-          <a:bodyPr wrap="square" anchor="t" lIns="0" rIns="0" tIns="0" bIns="0">
-            <a:spAutoFit/>
-          </a:bodyPr>
-          <a:lstStyle/>
-          <a:p>
-            <a:pPr>
-              <a:lnSpc>
-                <a:spcPct val="100000"/>
-              </a:lnSpc>
-              <a:spcBef>
-                <a:spcPts val="0"/>
-              </a:spcBef>
-              <a:spcAft>
-                <a:spcPts val="200"/>
-              </a:spcAft>
-            </a:pPr>
-            <a:r>
-              <a:rPr sz="1000">
-                <a:solidFill>
-                  <a:srgbClr val="191919"/>
-                </a:solidFill>
-                <a:latin typeface="AvenirNext LT Pro Medium"/>
-              </a:rPr>
-              <a:t>Latency</a:t>
-            </a:r>
-          </a:p>
-        </p:txBody>
-      </p:sp>
-      <p:sp>
-        <p:nvSpPr>
-          <p:cNvPr id="7" name="TextBox 6"/>
-          <p:cNvSpPr txBox="1"/>
-          <p:nvPr/>
-        </p:nvSpPr>
-        <p:spPr>
-          <a:xfrm>
-            <a:off x="1088136" y="1956816"/>
-            <a:ext cx="2103120" cy="731520"/>
-          </a:xfrm>
-          <a:prstGeom prst="rect">
-            <a:avLst/>
-          </a:prstGeom>
-          <a:noFill/>
-        </p:spPr>
-        <p:txBody>
-          <a:bodyPr wrap="square" anchor="t" lIns="0" rIns="0" tIns="0" bIns="0">
-            <a:spAutoFit/>
-          </a:bodyPr>
-          <a:lstStyle/>
-          <a:p>
-            <a:pPr>
-              <a:lnSpc>
-                <a:spcPct val="122000"/>
-              </a:lnSpc>
-              <a:spcBef>
-                <a:spcPts val="0"/>
-              </a:spcBef>
-              <a:spcAft>
-                <a:spcPts val="200"/>
-              </a:spcAft>
-            </a:pPr>
-            <a:r>
-              <a:rPr sz="750">
-                <a:solidFill>
-                  <a:srgbClr val="191919"/>
-                </a:solidFill>
-                <a:latin typeface="AvenirNext LT Pro Regular"/>
-              </a:rPr>
-              <a:t>A human reacts to an anomaly in minutes. Growth-stage transitions — AlN nucleation giving way to streak recovery — open and close in seconds.</a:t>
-            </a:r>
-          </a:p>
-        </p:txBody>
-      </p:sp>
-      <p:sp>
-        <p:nvSpPr>
-          <p:cNvPr id="8" name="TextBox 7"/>
-          <p:cNvSpPr txBox="1"/>
-          <p:nvPr/>
-        </p:nvSpPr>
-        <p:spPr>
-          <a:xfrm>
-            <a:off x="3310128" y="1627632"/>
-            <a:ext cx="502920" cy="502920"/>
-          </a:xfrm>
-          <a:prstGeom prst="rect">
-            <a:avLst/>
-          </a:prstGeom>
-          <a:noFill/>
-        </p:spPr>
-        <p:txBody>
-          <a:bodyPr wrap="square" anchor="t" lIns="0" rIns="0" tIns="0" bIns="0">
-            <a:spAutoFit/>
-          </a:bodyPr>
-          <a:lstStyle/>
-          <a:p>
-            <a:pPr>
-              <a:lnSpc>
-                <a:spcPct val="100000"/>
-              </a:lnSpc>
-              <a:spcBef>
-                <a:spcPts val="0"/>
-              </a:spcBef>
-              <a:spcAft>
-                <a:spcPts val="200"/>
-              </a:spcAft>
-            </a:pPr>
-            <a:r>
-              <a:rPr sz="3000">
-                <a:solidFill>
-                  <a:srgbClr val="191919"/>
-                </a:solidFill>
-                <a:latin typeface="AvenirNext LT Pro Light"/>
-              </a:rPr>
-              <a:t>2</a:t>
-            </a:r>
-          </a:p>
-        </p:txBody>
-      </p:sp>
-      <p:sp>
-        <p:nvSpPr>
-          <p:cNvPr id="9" name="TextBox 8"/>
-          <p:cNvSpPr txBox="1"/>
-          <p:nvPr/>
-        </p:nvSpPr>
-        <p:spPr>
-          <a:xfrm>
-            <a:off x="3785616" y="1700784"/>
-            <a:ext cx="2103120" cy="219456"/>
-          </a:xfrm>
-          <a:prstGeom prst="rect">
-            <a:avLst/>
-          </a:prstGeom>
-          <a:noFill/>
-        </p:spPr>
-        <p:txBody>
-          <a:bodyPr wrap="square" anchor="t" lIns="0" rIns="0" tIns="0" bIns="0">
-            <a:spAutoFit/>
-          </a:bodyPr>
-          <a:lstStyle/>
-          <a:p>
-            <a:pPr>
-              <a:lnSpc>
-                <a:spcPct val="100000"/>
-              </a:lnSpc>
-              <a:spcBef>
-                <a:spcPts val="0"/>
-              </a:spcBef>
-              <a:spcAft>
-                <a:spcPts val="200"/>
-              </a:spcAft>
-            </a:pPr>
-            <a:r>
-              <a:rPr sz="1000">
-                <a:solidFill>
-                  <a:srgbClr val="191919"/>
-                </a:solidFill>
-                <a:latin typeface="AvenirNext LT Pro Medium"/>
-              </a:rPr>
-              <a:t>Not reproducible</a:t>
-            </a:r>
-          </a:p>
-        </p:txBody>
-      </p:sp>
-      <p:sp>
-        <p:nvSpPr>
-          <p:cNvPr id="10" name="TextBox 9"/>
-          <p:cNvSpPr txBox="1"/>
-          <p:nvPr/>
-        </p:nvSpPr>
-        <p:spPr>
-          <a:xfrm>
-            <a:off x="3785616" y="1956816"/>
-            <a:ext cx="2103120" cy="731520"/>
-          </a:xfrm>
-          <a:prstGeom prst="rect">
-            <a:avLst/>
-          </a:prstGeom>
-          <a:noFill/>
-        </p:spPr>
-        <p:txBody>
-          <a:bodyPr wrap="square" anchor="t" lIns="0" rIns="0" tIns="0" bIns="0">
-            <a:spAutoFit/>
-          </a:bodyPr>
-          <a:lstStyle/>
-          <a:p>
-            <a:pPr>
-              <a:lnSpc>
-                <a:spcPct val="122000"/>
-              </a:lnSpc>
-              <a:spcBef>
-                <a:spcPts val="0"/>
-              </a:spcBef>
-              <a:spcAft>
-                <a:spcPts val="200"/>
-              </a:spcAft>
-            </a:pPr>
-            <a:r>
-              <a:rPr sz="750">
-                <a:solidFill>
-                  <a:srgbClr val="191919"/>
-                </a:solidFill>
-                <a:latin typeface="AvenirNext LT Pro Regular"/>
-              </a:rPr>
-              <a:t>The same recipe spreads across shifts and operators. That spread is one of the main sources of yield loss.</a:t>
-            </a:r>
-          </a:p>
-        </p:txBody>
-      </p:sp>
-      <p:sp>
-        <p:nvSpPr>
-          <p:cNvPr id="11" name="TextBox 10"/>
-          <p:cNvSpPr txBox="1"/>
-          <p:nvPr/>
-        </p:nvSpPr>
-        <p:spPr>
-          <a:xfrm>
-            <a:off x="6007608" y="1627632"/>
-            <a:ext cx="502920" cy="502920"/>
-          </a:xfrm>
-          <a:prstGeom prst="rect">
-            <a:avLst/>
-          </a:prstGeom>
-          <a:noFill/>
-        </p:spPr>
-        <p:txBody>
-          <a:bodyPr wrap="square" anchor="t" lIns="0" rIns="0" tIns="0" bIns="0">
-            <a:spAutoFit/>
-          </a:bodyPr>
-          <a:lstStyle/>
-          <a:p>
-            <a:pPr>
-              <a:lnSpc>
-                <a:spcPct val="100000"/>
-              </a:lnSpc>
-              <a:spcBef>
-                <a:spcPts val="0"/>
-              </a:spcBef>
-              <a:spcAft>
-                <a:spcPts val="200"/>
-              </a:spcAft>
-            </a:pPr>
-            <a:r>
-              <a:rPr sz="3000">
-                <a:solidFill>
-                  <a:srgbClr val="191919"/>
-                </a:solidFill>
-                <a:latin typeface="AvenirNext LT Pro Light"/>
-              </a:rPr>
-              <a:t>3</a:t>
-            </a:r>
-          </a:p>
-        </p:txBody>
-      </p:sp>
-      <p:sp>
-        <p:nvSpPr>
-          <p:cNvPr id="12" name="TextBox 11"/>
-          <p:cNvSpPr txBox="1"/>
-          <p:nvPr/>
-        </p:nvSpPr>
-        <p:spPr>
-          <a:xfrm>
-            <a:off x="6483096" y="1700784"/>
-            <a:ext cx="2103120" cy="219456"/>
-          </a:xfrm>
-          <a:prstGeom prst="rect">
-            <a:avLst/>
-          </a:prstGeom>
-          <a:noFill/>
-        </p:spPr>
-        <p:txBody>
-          <a:bodyPr wrap="square" anchor="t" lIns="0" rIns="0" tIns="0" bIns="0">
-            <a:spAutoFit/>
-          </a:bodyPr>
-          <a:lstStyle/>
-          <a:p>
-            <a:pPr>
-              <a:lnSpc>
-                <a:spcPct val="100000"/>
-              </a:lnSpc>
-              <a:spcBef>
-                <a:spcPts val="0"/>
-              </a:spcBef>
-              <a:spcAft>
-                <a:spcPts val="200"/>
-              </a:spcAft>
-            </a:pPr>
-            <a:r>
-              <a:rPr sz="1000">
-                <a:solidFill>
-                  <a:srgbClr val="191919"/>
-                </a:solidFill>
-                <a:latin typeface="AvenirNext LT Pro Medium"/>
-              </a:rPr>
-              <a:t>Does not scale</a:t>
-            </a:r>
-          </a:p>
-        </p:txBody>
-      </p:sp>
-      <p:sp>
-        <p:nvSpPr>
-          <p:cNvPr id="13" name="TextBox 12"/>
-          <p:cNvSpPr txBox="1"/>
-          <p:nvPr/>
-        </p:nvSpPr>
-        <p:spPr>
-          <a:xfrm>
-            <a:off x="6483096" y="1956816"/>
-            <a:ext cx="2103120" cy="731520"/>
-          </a:xfrm>
-          <a:prstGeom prst="rect">
-            <a:avLst/>
-          </a:prstGeom>
-          <a:noFill/>
-        </p:spPr>
-        <p:txBody>
-          <a:bodyPr wrap="square" anchor="t" lIns="0" rIns="0" tIns="0" bIns="0">
-            <a:spAutoFit/>
-          </a:bodyPr>
-          <a:lstStyle/>
-          <a:p>
-            <a:pPr>
-              <a:lnSpc>
-                <a:spcPct val="122000"/>
-              </a:lnSpc>
-              <a:spcBef>
-                <a:spcPts val="0"/>
-              </a:spcBef>
-              <a:spcAft>
-                <a:spcPts val="200"/>
-              </a:spcAft>
-            </a:pPr>
-            <a:r>
-              <a:rPr sz="750">
-                <a:solidFill>
-                  <a:srgbClr val="191919"/>
-                </a:solidFill>
-                <a:latin typeface="AvenirNext LT Pro Regular"/>
-              </a:rPr>
-              <a:t>Doubling capacity means doubling skilled engineers — and skilled engineers cannot be produced on that schedule.</a:t>
-            </a:r>
-          </a:p>
-        </p:txBody>
-      </p:sp>
-      <p:sp>
-        <p:nvSpPr>
-          <p:cNvPr id="14" name="Rectangle 13"/>
+          <p:cNvPr id="5" name="Rounded Rectangle 4"/>
           <p:cNvSpPr/>
           <p:nvPr/>
         </p:nvSpPr>
         <p:spPr>
           <a:xfrm>
-            <a:off x="612648" y="2834640"/>
-            <a:ext cx="7918704" cy="11430"/>
-          </a:xfrm>
-          <a:prstGeom prst="rect">
-            <a:avLst/>
+            <a:off x="612648" y="1609344"/>
+            <a:ext cx="2551176" cy="1078992"/>
+          </a:xfrm>
+          <a:prstGeom prst="roundRect">
+            <a:avLst>
+              <a:gd name="adj" fmla="val 12000"/>
+            </a:avLst>
           </a:prstGeom>
           <a:solidFill>
-            <a:srgbClr val="00B388"/>
+            <a:srgbClr val="F5F5F5"/>
           </a:solidFill>
           <a:ln>
             <a:noFill/>
@@ -20760,14 +20577,67 @@
       </p:sp>
       <p:sp>
         <p:nvSpPr>
-          <p:cNvPr id="15" name="TextBox 14"/>
+          <p:cNvPr id="6" name="Oval 5"/>
+          <p:cNvSpPr/>
+          <p:nvPr/>
+        </p:nvSpPr>
+        <p:spPr>
+          <a:xfrm>
+            <a:off x="740664" y="1737360"/>
+            <a:ext cx="274320" cy="274320"/>
+          </a:xfrm>
+          <a:prstGeom prst="ellipse">
+            <a:avLst/>
+          </a:prstGeom>
+          <a:solidFill>
+            <a:srgbClr val="00B388"/>
+          </a:solidFill>
+          <a:ln>
+            <a:noFill/>
+          </a:ln>
+          <a:effectLst/>
+        </p:spPr>
+        <p:style>
+          <a:lnRef idx="1">
+            <a:schemeClr val="accent1"/>
+          </a:lnRef>
+          <a:fillRef idx="3">
+            <a:schemeClr val="accent1"/>
+          </a:fillRef>
+          <a:effectRef idx="2">
+            <a:schemeClr val="accent1"/>
+          </a:effectRef>
+          <a:fontRef idx="minor">
+            <a:schemeClr val="lt1"/>
+          </a:fontRef>
+        </p:style>
+        <p:txBody>
+          <a:bodyPr rtlCol="0" anchor="ctr" lIns="0" rIns="0" tIns="0" bIns="0" wrap="none"/>
+          <a:lstStyle/>
+          <a:p>
+            <a:pPr algn="ctr"/>
+            <a:r>
+              <a:rPr sz="800">
+                <a:solidFill>
+                  <a:srgbClr val="FFFFFF"/>
+                </a:solidFill>
+                <a:latin typeface="AvenirNext LT Pro Medium"/>
+              </a:rPr>
+              <a:t>01</a:t>
+            </a:r>
+          </a:p>
+        </p:txBody>
+      </p:sp>
+      <p:sp>
+        <p:nvSpPr>
+          <p:cNvPr id="7" name="TextBox 6"/>
           <p:cNvSpPr txBox="1"/>
           <p:nvPr/>
         </p:nvSpPr>
         <p:spPr>
           <a:xfrm>
-            <a:off x="612648" y="2926080"/>
-            <a:ext cx="1188720" cy="182880"/>
+            <a:off x="1106424" y="1773936"/>
+            <a:ext cx="1920240" cy="219456"/>
           </a:xfrm>
           <a:prstGeom prst="rect">
             <a:avLst/>
@@ -20784,35 +20654,32 @@
               <a:lnSpc>
                 <a:spcPct val="120000"/>
               </a:lnSpc>
-              <a:spcBef>
-                <a:spcPts val="0"/>
-              </a:spcBef>
               <a:spcAft>
                 <a:spcPts val="200"/>
               </a:spcAft>
             </a:pPr>
             <a:r>
-              <a:rPr sz="800" spc="60">
-                <a:solidFill>
-                  <a:srgbClr val="00B388"/>
+              <a:rPr sz="1000">
+                <a:solidFill>
+                  <a:srgbClr val="191919"/>
                 </a:solidFill>
                 <a:latin typeface="AvenirNext LT Pro Medium"/>
               </a:rPr>
-              <a:t>OBJECTIVE</a:t>
-            </a:r>
-          </a:p>
-        </p:txBody>
-      </p:sp>
-      <p:sp>
-        <p:nvSpPr>
-          <p:cNvPr id="16" name="TextBox 15"/>
+              <a:t>Latency</a:t>
+            </a:r>
+          </a:p>
+        </p:txBody>
+      </p:sp>
+      <p:sp>
+        <p:nvSpPr>
+          <p:cNvPr id="8" name="TextBox 7"/>
           <p:cNvSpPr txBox="1"/>
           <p:nvPr/>
         </p:nvSpPr>
         <p:spPr>
           <a:xfrm>
-            <a:off x="1847088" y="2907792"/>
-            <a:ext cx="6684264" cy="384048"/>
+            <a:off x="740664" y="2084831"/>
+            <a:ext cx="2295144" cy="566928"/>
           </a:xfrm>
           <a:prstGeom prst="rect">
             <a:avLst/>
@@ -20827,37 +20694,133 @@
           <a:p>
             <a:pPr>
               <a:lnSpc>
-                <a:spcPct val="125000"/>
+                <a:spcPct val="120000"/>
               </a:lnSpc>
-              <a:spcBef>
-                <a:spcPts val="0"/>
-              </a:spcBef>
               <a:spcAft>
                 <a:spcPts val="200"/>
               </a:spcAft>
             </a:pPr>
             <a:r>
-              <a:rPr sz="850">
+              <a:rPr sz="740">
                 <a:solidFill>
                   <a:srgbClr val="191919"/>
+                </a:solidFill>
+                <a:latin typeface="AvenirNext LT Pro Regular"/>
+              </a:rPr>
+              <a:t>A human reacts to an anomaly in minutes. Growth-stage transitions — AlN nucleation giving way to streak recovery — open and close in seconds.</a:t>
+            </a:r>
+          </a:p>
+        </p:txBody>
+      </p:sp>
+      <p:sp>
+        <p:nvSpPr>
+          <p:cNvPr id="9" name="Rounded Rectangle 8"/>
+          <p:cNvSpPr/>
+          <p:nvPr/>
+        </p:nvSpPr>
+        <p:spPr>
+          <a:xfrm>
+            <a:off x="3310128" y="1609344"/>
+            <a:ext cx="2551176" cy="1078992"/>
+          </a:xfrm>
+          <a:prstGeom prst="roundRect">
+            <a:avLst>
+              <a:gd name="adj" fmla="val 12000"/>
+            </a:avLst>
+          </a:prstGeom>
+          <a:solidFill>
+            <a:srgbClr val="F5F5F5"/>
+          </a:solidFill>
+          <a:ln>
+            <a:noFill/>
+          </a:ln>
+          <a:effectLst/>
+        </p:spPr>
+        <p:style>
+          <a:lnRef idx="1">
+            <a:schemeClr val="accent1"/>
+          </a:lnRef>
+          <a:fillRef idx="3">
+            <a:schemeClr val="accent1"/>
+          </a:fillRef>
+          <a:effectRef idx="2">
+            <a:schemeClr val="accent1"/>
+          </a:effectRef>
+          <a:fontRef idx="minor">
+            <a:schemeClr val="lt1"/>
+          </a:fontRef>
+        </p:style>
+        <p:txBody>
+          <a:bodyPr rtlCol="0" anchor="ctr"/>
+          <a:lstStyle/>
+          <a:p>
+            <a:pPr algn="ctr"/>
+          </a:p>
+        </p:txBody>
+      </p:sp>
+      <p:sp>
+        <p:nvSpPr>
+          <p:cNvPr id="10" name="Oval 9"/>
+          <p:cNvSpPr/>
+          <p:nvPr/>
+        </p:nvSpPr>
+        <p:spPr>
+          <a:xfrm>
+            <a:off x="3438144" y="1737360"/>
+            <a:ext cx="274320" cy="274320"/>
+          </a:xfrm>
+          <a:prstGeom prst="ellipse">
+            <a:avLst/>
+          </a:prstGeom>
+          <a:solidFill>
+            <a:srgbClr val="00B388"/>
+          </a:solidFill>
+          <a:ln>
+            <a:noFill/>
+          </a:ln>
+          <a:effectLst/>
+        </p:spPr>
+        <p:style>
+          <a:lnRef idx="1">
+            <a:schemeClr val="accent1"/>
+          </a:lnRef>
+          <a:fillRef idx="3">
+            <a:schemeClr val="accent1"/>
+          </a:fillRef>
+          <a:effectRef idx="2">
+            <a:schemeClr val="accent1"/>
+          </a:effectRef>
+          <a:fontRef idx="minor">
+            <a:schemeClr val="lt1"/>
+          </a:fontRef>
+        </p:style>
+        <p:txBody>
+          <a:bodyPr rtlCol="0" anchor="ctr" lIns="0" rIns="0" tIns="0" bIns="0" wrap="none"/>
+          <a:lstStyle/>
+          <a:p>
+            <a:pPr algn="ctr"/>
+            <a:r>
+              <a:rPr sz="800">
+                <a:solidFill>
+                  <a:srgbClr val="FFFFFF"/>
                 </a:solidFill>
                 <a:latin typeface="AvenirNext LT Pro Medium"/>
               </a:rPr>
-              <a:t>Run the equipment unattended: judge process state from in-situ signals, correct the control variables, and turn engineering intuition into an auditable, reusable software asset.</a:t>
-            </a:r>
-          </a:p>
-        </p:txBody>
-      </p:sp>
-      <p:sp>
-        <p:nvSpPr>
-          <p:cNvPr id="17" name="TextBox 16"/>
+              <a:t>02</a:t>
+            </a:r>
+          </a:p>
+        </p:txBody>
+      </p:sp>
+      <p:sp>
+        <p:nvSpPr>
+          <p:cNvPr id="11" name="TextBox 10"/>
           <p:cNvSpPr txBox="1"/>
           <p:nvPr/>
         </p:nvSpPr>
         <p:spPr>
           <a:xfrm>
-            <a:off x="612648" y="3493008"/>
-            <a:ext cx="7918704" cy="164592"/>
+            <a:off x="3803904" y="1773936"/>
+            <a:ext cx="1920240" cy="219456"/>
           </a:xfrm>
           <a:prstGeom prst="rect">
             <a:avLst/>
@@ -20874,22 +20837,290 @@
               <a:lnSpc>
                 <a:spcPct val="120000"/>
               </a:lnSpc>
-              <a:spcBef>
-                <a:spcPts val="0"/>
-              </a:spcBef>
               <a:spcAft>
                 <a:spcPts val="200"/>
               </a:spcAft>
             </a:pPr>
             <a:r>
-              <a:rPr sz="750" spc="60">
-                <a:solidFill>
-                  <a:srgbClr val="666666"/>
+              <a:rPr sz="1000">
+                <a:solidFill>
+                  <a:srgbClr val="191919"/>
                 </a:solidFill>
                 <a:latin typeface="AvenirNext LT Pro Medium"/>
               </a:rPr>
-              <a:t>WHAT “AUTONOMOUS AGENT” MEANS HERE — THE STRICT DEFINITION</a:t>
-            </a:r>
+              <a:t>Not reproducible</a:t>
+            </a:r>
+          </a:p>
+        </p:txBody>
+      </p:sp>
+      <p:sp>
+        <p:nvSpPr>
+          <p:cNvPr id="12" name="TextBox 11"/>
+          <p:cNvSpPr txBox="1"/>
+          <p:nvPr/>
+        </p:nvSpPr>
+        <p:spPr>
+          <a:xfrm>
+            <a:off x="3438144" y="2084831"/>
+            <a:ext cx="2295144" cy="566928"/>
+          </a:xfrm>
+          <a:prstGeom prst="rect">
+            <a:avLst/>
+          </a:prstGeom>
+          <a:noFill/>
+        </p:spPr>
+        <p:txBody>
+          <a:bodyPr wrap="square" anchor="t" lIns="0" rIns="0" tIns="0" bIns="0">
+            <a:spAutoFit/>
+          </a:bodyPr>
+          <a:lstStyle/>
+          <a:p>
+            <a:pPr>
+              <a:lnSpc>
+                <a:spcPct val="120000"/>
+              </a:lnSpc>
+              <a:spcAft>
+                <a:spcPts val="200"/>
+              </a:spcAft>
+            </a:pPr>
+            <a:r>
+              <a:rPr sz="740">
+                <a:solidFill>
+                  <a:srgbClr val="191919"/>
+                </a:solidFill>
+                <a:latin typeface="AvenirNext LT Pro Regular"/>
+              </a:rPr>
+              <a:t>The same recipe spreads across shifts and operators. That spread is one of the main sources of yield loss.</a:t>
+            </a:r>
+          </a:p>
+        </p:txBody>
+      </p:sp>
+      <p:sp>
+        <p:nvSpPr>
+          <p:cNvPr id="13" name="Rounded Rectangle 12"/>
+          <p:cNvSpPr/>
+          <p:nvPr/>
+        </p:nvSpPr>
+        <p:spPr>
+          <a:xfrm>
+            <a:off x="6007608" y="1609344"/>
+            <a:ext cx="2551176" cy="1078992"/>
+          </a:xfrm>
+          <a:prstGeom prst="roundRect">
+            <a:avLst>
+              <a:gd name="adj" fmla="val 12000"/>
+            </a:avLst>
+          </a:prstGeom>
+          <a:solidFill>
+            <a:srgbClr val="F5F5F5"/>
+          </a:solidFill>
+          <a:ln>
+            <a:noFill/>
+          </a:ln>
+          <a:effectLst/>
+        </p:spPr>
+        <p:style>
+          <a:lnRef idx="1">
+            <a:schemeClr val="accent1"/>
+          </a:lnRef>
+          <a:fillRef idx="3">
+            <a:schemeClr val="accent1"/>
+          </a:fillRef>
+          <a:effectRef idx="2">
+            <a:schemeClr val="accent1"/>
+          </a:effectRef>
+          <a:fontRef idx="minor">
+            <a:schemeClr val="lt1"/>
+          </a:fontRef>
+        </p:style>
+        <p:txBody>
+          <a:bodyPr rtlCol="0" anchor="ctr"/>
+          <a:lstStyle/>
+          <a:p>
+            <a:pPr algn="ctr"/>
+          </a:p>
+        </p:txBody>
+      </p:sp>
+      <p:sp>
+        <p:nvSpPr>
+          <p:cNvPr id="14" name="Oval 13"/>
+          <p:cNvSpPr/>
+          <p:nvPr/>
+        </p:nvSpPr>
+        <p:spPr>
+          <a:xfrm>
+            <a:off x="6135624" y="1737360"/>
+            <a:ext cx="274320" cy="274320"/>
+          </a:xfrm>
+          <a:prstGeom prst="ellipse">
+            <a:avLst/>
+          </a:prstGeom>
+          <a:solidFill>
+            <a:srgbClr val="00B388"/>
+          </a:solidFill>
+          <a:ln>
+            <a:noFill/>
+          </a:ln>
+          <a:effectLst/>
+        </p:spPr>
+        <p:style>
+          <a:lnRef idx="1">
+            <a:schemeClr val="accent1"/>
+          </a:lnRef>
+          <a:fillRef idx="3">
+            <a:schemeClr val="accent1"/>
+          </a:fillRef>
+          <a:effectRef idx="2">
+            <a:schemeClr val="accent1"/>
+          </a:effectRef>
+          <a:fontRef idx="minor">
+            <a:schemeClr val="lt1"/>
+          </a:fontRef>
+        </p:style>
+        <p:txBody>
+          <a:bodyPr rtlCol="0" anchor="ctr" lIns="0" rIns="0" tIns="0" bIns="0" wrap="none"/>
+          <a:lstStyle/>
+          <a:p>
+            <a:pPr algn="ctr"/>
+            <a:r>
+              <a:rPr sz="800">
+                <a:solidFill>
+                  <a:srgbClr val="FFFFFF"/>
+                </a:solidFill>
+                <a:latin typeface="AvenirNext LT Pro Medium"/>
+              </a:rPr>
+              <a:t>03</a:t>
+            </a:r>
+          </a:p>
+        </p:txBody>
+      </p:sp>
+      <p:sp>
+        <p:nvSpPr>
+          <p:cNvPr id="15" name="TextBox 14"/>
+          <p:cNvSpPr txBox="1"/>
+          <p:nvPr/>
+        </p:nvSpPr>
+        <p:spPr>
+          <a:xfrm>
+            <a:off x="6501384" y="1773936"/>
+            <a:ext cx="1920240" cy="219456"/>
+          </a:xfrm>
+          <a:prstGeom prst="rect">
+            <a:avLst/>
+          </a:prstGeom>
+          <a:noFill/>
+        </p:spPr>
+        <p:txBody>
+          <a:bodyPr wrap="square" anchor="t" lIns="0" rIns="0" tIns="0" bIns="0">
+            <a:spAutoFit/>
+          </a:bodyPr>
+          <a:lstStyle/>
+          <a:p>
+            <a:pPr>
+              <a:lnSpc>
+                <a:spcPct val="120000"/>
+              </a:lnSpc>
+              <a:spcAft>
+                <a:spcPts val="200"/>
+              </a:spcAft>
+            </a:pPr>
+            <a:r>
+              <a:rPr sz="1000">
+                <a:solidFill>
+                  <a:srgbClr val="191919"/>
+                </a:solidFill>
+                <a:latin typeface="AvenirNext LT Pro Medium"/>
+              </a:rPr>
+              <a:t>Does not scale</a:t>
+            </a:r>
+          </a:p>
+        </p:txBody>
+      </p:sp>
+      <p:sp>
+        <p:nvSpPr>
+          <p:cNvPr id="16" name="TextBox 15"/>
+          <p:cNvSpPr txBox="1"/>
+          <p:nvPr/>
+        </p:nvSpPr>
+        <p:spPr>
+          <a:xfrm>
+            <a:off x="6135624" y="2084831"/>
+            <a:ext cx="2295144" cy="566928"/>
+          </a:xfrm>
+          <a:prstGeom prst="rect">
+            <a:avLst/>
+          </a:prstGeom>
+          <a:noFill/>
+        </p:spPr>
+        <p:txBody>
+          <a:bodyPr wrap="square" anchor="t" lIns="0" rIns="0" tIns="0" bIns="0">
+            <a:spAutoFit/>
+          </a:bodyPr>
+          <a:lstStyle/>
+          <a:p>
+            <a:pPr>
+              <a:lnSpc>
+                <a:spcPct val="120000"/>
+              </a:lnSpc>
+              <a:spcAft>
+                <a:spcPts val="200"/>
+              </a:spcAft>
+            </a:pPr>
+            <a:r>
+              <a:rPr sz="740">
+                <a:solidFill>
+                  <a:srgbClr val="191919"/>
+                </a:solidFill>
+                <a:latin typeface="AvenirNext LT Pro Regular"/>
+              </a:rPr>
+              <a:t>Doubling capacity means doubling skilled engineers — and skilled engineers cannot be produced on that schedule.</a:t>
+            </a:r>
+          </a:p>
+        </p:txBody>
+      </p:sp>
+      <p:sp>
+        <p:nvSpPr>
+          <p:cNvPr id="17" name="Rounded Rectangle 16"/>
+          <p:cNvSpPr/>
+          <p:nvPr/>
+        </p:nvSpPr>
+        <p:spPr>
+          <a:xfrm>
+            <a:off x="612648" y="2834640"/>
+            <a:ext cx="7918704" cy="457200"/>
+          </a:xfrm>
+          <a:prstGeom prst="roundRect">
+            <a:avLst>
+              <a:gd name="adj" fmla="val 28000"/>
+            </a:avLst>
+          </a:prstGeom>
+          <a:solidFill>
+            <a:srgbClr val="191919"/>
+          </a:solidFill>
+          <a:ln>
+            <a:noFill/>
+          </a:ln>
+          <a:effectLst/>
+        </p:spPr>
+        <p:style>
+          <a:lnRef idx="1">
+            <a:schemeClr val="accent1"/>
+          </a:lnRef>
+          <a:fillRef idx="3">
+            <a:schemeClr val="accent1"/>
+          </a:fillRef>
+          <a:effectRef idx="2">
+            <a:schemeClr val="accent1"/>
+          </a:effectRef>
+          <a:fontRef idx="minor">
+            <a:schemeClr val="lt1"/>
+          </a:fontRef>
+        </p:style>
+        <p:txBody>
+          <a:bodyPr rtlCol="0" anchor="ctr"/>
+          <a:lstStyle/>
+          <a:p>
+            <a:pPr algn="ctr"/>
           </a:p>
         </p:txBody>
       </p:sp>
@@ -20901,8 +21132,50 @@
         </p:nvSpPr>
         <p:spPr>
           <a:xfrm>
-            <a:off x="612648" y="3749039"/>
-            <a:ext cx="969264" cy="365760"/>
+            <a:off x="795528" y="2999232"/>
+            <a:ext cx="1097280" cy="182880"/>
+          </a:xfrm>
+          <a:prstGeom prst="rect">
+            <a:avLst/>
+          </a:prstGeom>
+          <a:noFill/>
+        </p:spPr>
+        <p:txBody>
+          <a:bodyPr wrap="square" anchor="t" lIns="0" rIns="0" tIns="0" bIns="0">
+            <a:spAutoFit/>
+          </a:bodyPr>
+          <a:lstStyle/>
+          <a:p>
+            <a:pPr>
+              <a:lnSpc>
+                <a:spcPct val="120000"/>
+              </a:lnSpc>
+              <a:spcAft>
+                <a:spcPts val="200"/>
+              </a:spcAft>
+            </a:pPr>
+            <a:r>
+              <a:rPr sz="800" spc="60">
+                <a:solidFill>
+                  <a:srgbClr val="00B388"/>
+                </a:solidFill>
+                <a:latin typeface="AvenirNext LT Pro Medium"/>
+              </a:rPr>
+              <a:t>OBJECTIVE</a:t>
+            </a:r>
+          </a:p>
+        </p:txBody>
+      </p:sp>
+      <p:sp>
+        <p:nvSpPr>
+          <p:cNvPr id="19" name="TextBox 18"/>
+          <p:cNvSpPr txBox="1"/>
+          <p:nvPr/>
+        </p:nvSpPr>
+        <p:spPr>
+          <a:xfrm>
+            <a:off x="1810512" y="2916936"/>
+            <a:ext cx="6583680" cy="329184"/>
           </a:xfrm>
           <a:prstGeom prst="rect">
             <a:avLst/>
@@ -20917,17 +21190,190 @@
           <a:p>
             <a:pPr>
               <a:lnSpc>
-                <a:spcPct val="105000"/>
+                <a:spcPct val="118000"/>
               </a:lnSpc>
-              <a:spcBef>
-                <a:spcPts val="0"/>
-              </a:spcBef>
+              <a:spcAft>
+                <a:spcPts val="200"/>
+              </a:spcAft>
+            </a:pPr>
+            <a:r>
+              <a:rPr sz="800">
+                <a:solidFill>
+                  <a:srgbClr val="FFFFFF"/>
+                </a:solidFill>
+                <a:latin typeface="AvenirNext LT Pro Medium"/>
+              </a:rPr>
+              <a:t>Run the equipment unattended: judge process state from in-situ signals, correct the control variables, and turn engineering intuition into an auditable, reusable software asset.</a:t>
+            </a:r>
+          </a:p>
+        </p:txBody>
+      </p:sp>
+      <p:sp>
+        <p:nvSpPr>
+          <p:cNvPr id="20" name="Rounded Rectangle 19"/>
+          <p:cNvSpPr/>
+          <p:nvPr/>
+        </p:nvSpPr>
+        <p:spPr>
+          <a:xfrm>
+            <a:off x="612648" y="3438144"/>
+            <a:ext cx="7918704" cy="1225296"/>
+          </a:xfrm>
+          <a:prstGeom prst="roundRect">
+            <a:avLst>
+              <a:gd name="adj" fmla="val 9000"/>
+            </a:avLst>
+          </a:prstGeom>
+          <a:solidFill>
+            <a:srgbClr val="F5F5F5"/>
+          </a:solidFill>
+          <a:ln>
+            <a:noFill/>
+          </a:ln>
+          <a:effectLst/>
+        </p:spPr>
+        <p:style>
+          <a:lnRef idx="1">
+            <a:schemeClr val="accent1"/>
+          </a:lnRef>
+          <a:fillRef idx="3">
+            <a:schemeClr val="accent1"/>
+          </a:fillRef>
+          <a:effectRef idx="2">
+            <a:schemeClr val="accent1"/>
+          </a:effectRef>
+          <a:fontRef idx="minor">
+            <a:schemeClr val="lt1"/>
+          </a:fontRef>
+        </p:style>
+        <p:txBody>
+          <a:bodyPr rtlCol="0" anchor="ctr"/>
+          <a:lstStyle/>
+          <a:p>
+            <a:pPr algn="ctr"/>
+          </a:p>
+        </p:txBody>
+      </p:sp>
+      <p:sp>
+        <p:nvSpPr>
+          <p:cNvPr id="21" name="TextBox 20"/>
+          <p:cNvSpPr txBox="1"/>
+          <p:nvPr/>
+        </p:nvSpPr>
+        <p:spPr>
+          <a:xfrm>
+            <a:off x="777240" y="3547872"/>
+            <a:ext cx="7498079" cy="146304"/>
+          </a:xfrm>
+          <a:prstGeom prst="rect">
+            <a:avLst/>
+          </a:prstGeom>
+          <a:noFill/>
+        </p:spPr>
+        <p:txBody>
+          <a:bodyPr wrap="square" anchor="t" lIns="0" rIns="0" tIns="0" bIns="0">
+            <a:spAutoFit/>
+          </a:bodyPr>
+          <a:lstStyle/>
+          <a:p>
+            <a:pPr>
+              <a:lnSpc>
+                <a:spcPct val="120000"/>
+              </a:lnSpc>
+              <a:spcAft>
+                <a:spcPts val="200"/>
+              </a:spcAft>
+            </a:pPr>
+            <a:r>
+              <a:rPr sz="720" spc="60">
+                <a:solidFill>
+                  <a:srgbClr val="666666"/>
+                </a:solidFill>
+                <a:latin typeface="AvenirNext LT Pro Medium"/>
+              </a:rPr>
+              <a:t>WHAT “AUTONOMOUS AGENT” MEANS HERE — THE STRICT DEFINITION</a:t>
+            </a:r>
+          </a:p>
+        </p:txBody>
+      </p:sp>
+      <p:sp>
+        <p:nvSpPr>
+          <p:cNvPr id="22" name="Rounded Rectangle 21"/>
+          <p:cNvSpPr/>
+          <p:nvPr/>
+        </p:nvSpPr>
+        <p:spPr>
+          <a:xfrm>
+            <a:off x="740664" y="3767328"/>
+            <a:ext cx="941832" cy="347472"/>
+          </a:xfrm>
+          <a:prstGeom prst="roundRect">
+            <a:avLst>
+              <a:gd name="adj" fmla="val 50000"/>
+            </a:avLst>
+          </a:prstGeom>
+          <a:solidFill>
+            <a:srgbClr val="FFFFFF"/>
+          </a:solidFill>
+          <a:ln>
+            <a:noFill/>
+          </a:ln>
+          <a:effectLst/>
+        </p:spPr>
+        <p:style>
+          <a:lnRef idx="1">
+            <a:schemeClr val="accent1"/>
+          </a:lnRef>
+          <a:fillRef idx="3">
+            <a:schemeClr val="accent1"/>
+          </a:fillRef>
+          <a:effectRef idx="2">
+            <a:schemeClr val="accent1"/>
+          </a:effectRef>
+          <a:fontRef idx="minor">
+            <a:schemeClr val="lt1"/>
+          </a:fontRef>
+        </p:style>
+        <p:txBody>
+          <a:bodyPr rtlCol="0" anchor="ctr"/>
+          <a:lstStyle/>
+          <a:p>
+            <a:pPr algn="ctr"/>
+          </a:p>
+        </p:txBody>
+      </p:sp>
+      <p:sp>
+        <p:nvSpPr>
+          <p:cNvPr id="23" name="TextBox 22"/>
+          <p:cNvSpPr txBox="1"/>
+          <p:nvPr/>
+        </p:nvSpPr>
+        <p:spPr>
+          <a:xfrm>
+            <a:off x="740664" y="3785615"/>
+            <a:ext cx="941832" cy="310896"/>
+          </a:xfrm>
+          <a:prstGeom prst="rect">
+            <a:avLst/>
+          </a:prstGeom>
+          <a:noFill/>
+        </p:spPr>
+        <p:txBody>
+          <a:bodyPr wrap="square" anchor="ctr" lIns="0" rIns="0" tIns="0" bIns="0">
+            <a:spAutoFit/>
+          </a:bodyPr>
+          <a:lstStyle/>
+          <a:p>
+            <a:pPr algn="ctr">
+              <a:lnSpc>
+                <a:spcPct val="102000"/>
+              </a:lnSpc>
               <a:spcAft>
                 <a:spcPts val="0"/>
               </a:spcAft>
             </a:pPr>
             <a:r>
-              <a:rPr sz="800">
+              <a:rPr sz="760">
                 <a:solidFill>
                   <a:srgbClr val="191919"/>
                 </a:solidFill>
@@ -20940,14 +21386,14 @@
       </p:sp>
       <p:sp>
         <p:nvSpPr>
-          <p:cNvPr id="19" name="TextBox 18"/>
+          <p:cNvPr id="24" name="TextBox 23"/>
           <p:cNvSpPr txBox="1"/>
           <p:nvPr/>
         </p:nvSpPr>
         <p:spPr>
           <a:xfrm>
-            <a:off x="1581912" y="3749039"/>
-            <a:ext cx="182880" cy="365760"/>
+            <a:off x="1682496" y="3767328"/>
+            <a:ext cx="169164" cy="347472"/>
           </a:xfrm>
           <a:prstGeom prst="rect">
             <a:avLst/>
@@ -20960,19 +21406,16 @@
           </a:bodyPr>
           <a:lstStyle/>
           <a:p>
-            <a:pPr>
+            <a:pPr algn="ctr">
               <a:lnSpc>
                 <a:spcPct val="120000"/>
               </a:lnSpc>
-              <a:spcBef>
-                <a:spcPts val="0"/>
-              </a:spcBef>
               <a:spcAft>
                 <a:spcPts val="200"/>
               </a:spcAft>
             </a:pPr>
             <a:r>
-              <a:rPr sz="1100">
+              <a:rPr sz="1000">
                 <a:solidFill>
                   <a:srgbClr val="00B388"/>
                 </a:solidFill>
@@ -20985,14 +21428,60 @@
       </p:sp>
       <p:sp>
         <p:nvSpPr>
-          <p:cNvPr id="20" name="TextBox 19"/>
+          <p:cNvPr id="25" name="Rounded Rectangle 24"/>
+          <p:cNvSpPr/>
+          <p:nvPr/>
+        </p:nvSpPr>
+        <p:spPr>
+          <a:xfrm>
+            <a:off x="1851660" y="3767328"/>
+            <a:ext cx="941832" cy="347472"/>
+          </a:xfrm>
+          <a:prstGeom prst="roundRect">
+            <a:avLst>
+              <a:gd name="adj" fmla="val 50000"/>
+            </a:avLst>
+          </a:prstGeom>
+          <a:solidFill>
+            <a:srgbClr val="FFFFFF"/>
+          </a:solidFill>
+          <a:ln>
+            <a:noFill/>
+          </a:ln>
+          <a:effectLst/>
+        </p:spPr>
+        <p:style>
+          <a:lnRef idx="1">
+            <a:schemeClr val="accent1"/>
+          </a:lnRef>
+          <a:fillRef idx="3">
+            <a:schemeClr val="accent1"/>
+          </a:fillRef>
+          <a:effectRef idx="2">
+            <a:schemeClr val="accent1"/>
+          </a:effectRef>
+          <a:fontRef idx="minor">
+            <a:schemeClr val="lt1"/>
+          </a:fontRef>
+        </p:style>
+        <p:txBody>
+          <a:bodyPr rtlCol="0" anchor="ctr"/>
+          <a:lstStyle/>
+          <a:p>
+            <a:pPr algn="ctr"/>
+          </a:p>
+        </p:txBody>
+      </p:sp>
+      <p:sp>
+        <p:nvSpPr>
+          <p:cNvPr id="26" name="TextBox 25"/>
           <p:cNvSpPr txBox="1"/>
           <p:nvPr/>
         </p:nvSpPr>
         <p:spPr>
           <a:xfrm>
-            <a:off x="1764792" y="3749039"/>
-            <a:ext cx="969264" cy="365760"/>
+            <a:off x="1851660" y="3785615"/>
+            <a:ext cx="941832" cy="310896"/>
           </a:xfrm>
           <a:prstGeom prst="rect">
             <a:avLst/>
@@ -21005,19 +21494,16 @@
           </a:bodyPr>
           <a:lstStyle/>
           <a:p>
-            <a:pPr>
+            <a:pPr algn="ctr">
               <a:lnSpc>
-                <a:spcPct val="105000"/>
+                <a:spcPct val="102000"/>
               </a:lnSpc>
-              <a:spcBef>
-                <a:spcPts val="0"/>
-              </a:spcBef>
               <a:spcAft>
                 <a:spcPts val="0"/>
               </a:spcAft>
             </a:pPr>
             <a:r>
-              <a:rPr sz="800">
+              <a:rPr sz="760">
                 <a:solidFill>
                   <a:srgbClr val="191919"/>
                 </a:solidFill>
@@ -21027,19 +21513,16 @@
             </a:r>
           </a:p>
           <a:p>
-            <a:pPr>
+            <a:pPr algn="ctr">
               <a:lnSpc>
-                <a:spcPct val="105000"/>
+                <a:spcPct val="102000"/>
               </a:lnSpc>
-              <a:spcBef>
-                <a:spcPts val="0"/>
-              </a:spcBef>
               <a:spcAft>
                 <a:spcPts val="0"/>
               </a:spcAft>
             </a:pPr>
             <a:r>
-              <a:rPr sz="800">
+              <a:rPr sz="760">
                 <a:solidFill>
                   <a:srgbClr val="191919"/>
                 </a:solidFill>
@@ -21052,14 +21535,14 @@
       </p:sp>
       <p:sp>
         <p:nvSpPr>
-          <p:cNvPr id="21" name="TextBox 20"/>
+          <p:cNvPr id="27" name="TextBox 26"/>
           <p:cNvSpPr txBox="1"/>
           <p:nvPr/>
         </p:nvSpPr>
         <p:spPr>
           <a:xfrm>
-            <a:off x="2734056" y="3749039"/>
-            <a:ext cx="182880" cy="365760"/>
+            <a:off x="2793492" y="3767328"/>
+            <a:ext cx="169164" cy="347472"/>
           </a:xfrm>
           <a:prstGeom prst="rect">
             <a:avLst/>
@@ -21072,19 +21555,16 @@
           </a:bodyPr>
           <a:lstStyle/>
           <a:p>
-            <a:pPr>
+            <a:pPr algn="ctr">
               <a:lnSpc>
                 <a:spcPct val="120000"/>
               </a:lnSpc>
-              <a:spcBef>
-                <a:spcPts val="0"/>
-              </a:spcBef>
               <a:spcAft>
                 <a:spcPts val="200"/>
               </a:spcAft>
             </a:pPr>
             <a:r>
-              <a:rPr sz="1100">
+              <a:rPr sz="1000">
                 <a:solidFill>
                   <a:srgbClr val="00B388"/>
                 </a:solidFill>
@@ -21097,14 +21577,60 @@
       </p:sp>
       <p:sp>
         <p:nvSpPr>
-          <p:cNvPr id="22" name="TextBox 21"/>
+          <p:cNvPr id="28" name="Rounded Rectangle 27"/>
+          <p:cNvSpPr/>
+          <p:nvPr/>
+        </p:nvSpPr>
+        <p:spPr>
+          <a:xfrm>
+            <a:off x="2962656" y="3767328"/>
+            <a:ext cx="941832" cy="347472"/>
+          </a:xfrm>
+          <a:prstGeom prst="roundRect">
+            <a:avLst>
+              <a:gd name="adj" fmla="val 50000"/>
+            </a:avLst>
+          </a:prstGeom>
+          <a:solidFill>
+            <a:srgbClr val="FFFFFF"/>
+          </a:solidFill>
+          <a:ln>
+            <a:noFill/>
+          </a:ln>
+          <a:effectLst/>
+        </p:spPr>
+        <p:style>
+          <a:lnRef idx="1">
+            <a:schemeClr val="accent1"/>
+          </a:lnRef>
+          <a:fillRef idx="3">
+            <a:schemeClr val="accent1"/>
+          </a:fillRef>
+          <a:effectRef idx="2">
+            <a:schemeClr val="accent1"/>
+          </a:effectRef>
+          <a:fontRef idx="minor">
+            <a:schemeClr val="lt1"/>
+          </a:fontRef>
+        </p:style>
+        <p:txBody>
+          <a:bodyPr rtlCol="0" anchor="ctr"/>
+          <a:lstStyle/>
+          <a:p>
+            <a:pPr algn="ctr"/>
+          </a:p>
+        </p:txBody>
+      </p:sp>
+      <p:sp>
+        <p:nvSpPr>
+          <p:cNvPr id="29" name="TextBox 28"/>
           <p:cNvSpPr txBox="1"/>
           <p:nvPr/>
         </p:nvSpPr>
         <p:spPr>
           <a:xfrm>
-            <a:off x="2916936" y="3749039"/>
-            <a:ext cx="969264" cy="365760"/>
+            <a:off x="2962656" y="3785615"/>
+            <a:ext cx="941832" cy="310896"/>
           </a:xfrm>
           <a:prstGeom prst="rect">
             <a:avLst/>
@@ -21117,19 +21643,16 @@
           </a:bodyPr>
           <a:lstStyle/>
           <a:p>
-            <a:pPr>
+            <a:pPr algn="ctr">
               <a:lnSpc>
-                <a:spcPct val="105000"/>
+                <a:spcPct val="102000"/>
               </a:lnSpc>
-              <a:spcBef>
-                <a:spcPts val="0"/>
-              </a:spcBef>
               <a:spcAft>
                 <a:spcPts val="0"/>
               </a:spcAft>
             </a:pPr>
             <a:r>
-              <a:rPr sz="800">
+              <a:rPr sz="760">
                 <a:solidFill>
                   <a:srgbClr val="191919"/>
                 </a:solidFill>
@@ -21142,14 +21665,14 @@
       </p:sp>
       <p:sp>
         <p:nvSpPr>
-          <p:cNvPr id="23" name="TextBox 22"/>
+          <p:cNvPr id="30" name="TextBox 29"/>
           <p:cNvSpPr txBox="1"/>
           <p:nvPr/>
         </p:nvSpPr>
         <p:spPr>
           <a:xfrm>
-            <a:off x="3886200" y="3749039"/>
-            <a:ext cx="182880" cy="365760"/>
+            <a:off x="3904488" y="3767328"/>
+            <a:ext cx="169164" cy="347472"/>
           </a:xfrm>
           <a:prstGeom prst="rect">
             <a:avLst/>
@@ -21162,19 +21685,16 @@
           </a:bodyPr>
           <a:lstStyle/>
           <a:p>
-            <a:pPr>
+            <a:pPr algn="ctr">
               <a:lnSpc>
                 <a:spcPct val="120000"/>
               </a:lnSpc>
-              <a:spcBef>
-                <a:spcPts val="0"/>
-              </a:spcBef>
               <a:spcAft>
                 <a:spcPts val="200"/>
               </a:spcAft>
             </a:pPr>
             <a:r>
-              <a:rPr sz="1100">
+              <a:rPr sz="1000">
                 <a:solidFill>
                   <a:srgbClr val="00B388"/>
                 </a:solidFill>
@@ -21187,14 +21707,60 @@
       </p:sp>
       <p:sp>
         <p:nvSpPr>
-          <p:cNvPr id="24" name="TextBox 23"/>
+          <p:cNvPr id="31" name="Rounded Rectangle 30"/>
+          <p:cNvSpPr/>
+          <p:nvPr/>
+        </p:nvSpPr>
+        <p:spPr>
+          <a:xfrm>
+            <a:off x="4073652" y="3767328"/>
+            <a:ext cx="941832" cy="347472"/>
+          </a:xfrm>
+          <a:prstGeom prst="roundRect">
+            <a:avLst>
+              <a:gd name="adj" fmla="val 50000"/>
+            </a:avLst>
+          </a:prstGeom>
+          <a:solidFill>
+            <a:srgbClr val="FFFFFF"/>
+          </a:solidFill>
+          <a:ln>
+            <a:noFill/>
+          </a:ln>
+          <a:effectLst/>
+        </p:spPr>
+        <p:style>
+          <a:lnRef idx="1">
+            <a:schemeClr val="accent1"/>
+          </a:lnRef>
+          <a:fillRef idx="3">
+            <a:schemeClr val="accent1"/>
+          </a:fillRef>
+          <a:effectRef idx="2">
+            <a:schemeClr val="accent1"/>
+          </a:effectRef>
+          <a:fontRef idx="minor">
+            <a:schemeClr val="lt1"/>
+          </a:fontRef>
+        </p:style>
+        <p:txBody>
+          <a:bodyPr rtlCol="0" anchor="ctr"/>
+          <a:lstStyle/>
+          <a:p>
+            <a:pPr algn="ctr"/>
+          </a:p>
+        </p:txBody>
+      </p:sp>
+      <p:sp>
+        <p:nvSpPr>
+          <p:cNvPr id="32" name="TextBox 31"/>
           <p:cNvSpPr txBox="1"/>
           <p:nvPr/>
         </p:nvSpPr>
         <p:spPr>
           <a:xfrm>
-            <a:off x="4069080" y="3749039"/>
-            <a:ext cx="969264" cy="365760"/>
+            <a:off x="4073652" y="3785615"/>
+            <a:ext cx="941832" cy="310896"/>
           </a:xfrm>
           <a:prstGeom prst="rect">
             <a:avLst/>
@@ -21207,19 +21773,16 @@
           </a:bodyPr>
           <a:lstStyle/>
           <a:p>
-            <a:pPr>
+            <a:pPr algn="ctr">
               <a:lnSpc>
-                <a:spcPct val="105000"/>
+                <a:spcPct val="102000"/>
               </a:lnSpc>
-              <a:spcBef>
-                <a:spcPts val="0"/>
-              </a:spcBef>
               <a:spcAft>
                 <a:spcPts val="0"/>
               </a:spcAft>
             </a:pPr>
             <a:r>
-              <a:rPr sz="800">
+              <a:rPr sz="760">
                 <a:solidFill>
                   <a:srgbClr val="191919"/>
                 </a:solidFill>
@@ -21229,19 +21792,16 @@
             </a:r>
           </a:p>
           <a:p>
-            <a:pPr>
+            <a:pPr algn="ctr">
               <a:lnSpc>
-                <a:spcPct val="105000"/>
+                <a:spcPct val="102000"/>
               </a:lnSpc>
-              <a:spcBef>
-                <a:spcPts val="0"/>
-              </a:spcBef>
               <a:spcAft>
                 <a:spcPts val="0"/>
               </a:spcAft>
             </a:pPr>
             <a:r>
-              <a:rPr sz="800">
+              <a:rPr sz="760">
                 <a:solidFill>
                   <a:srgbClr val="191919"/>
                 </a:solidFill>
@@ -21254,14 +21814,14 @@
       </p:sp>
       <p:sp>
         <p:nvSpPr>
-          <p:cNvPr id="25" name="TextBox 24"/>
+          <p:cNvPr id="33" name="TextBox 32"/>
           <p:cNvSpPr txBox="1"/>
           <p:nvPr/>
         </p:nvSpPr>
         <p:spPr>
           <a:xfrm>
-            <a:off x="5038344" y="3749039"/>
-            <a:ext cx="182880" cy="365760"/>
+            <a:off x="5015484" y="3767328"/>
+            <a:ext cx="169164" cy="347472"/>
           </a:xfrm>
           <a:prstGeom prst="rect">
             <a:avLst/>
@@ -21274,19 +21834,16 @@
           </a:bodyPr>
           <a:lstStyle/>
           <a:p>
-            <a:pPr>
+            <a:pPr algn="ctr">
               <a:lnSpc>
                 <a:spcPct val="120000"/>
               </a:lnSpc>
-              <a:spcBef>
-                <a:spcPts val="0"/>
-              </a:spcBef>
               <a:spcAft>
                 <a:spcPts val="200"/>
               </a:spcAft>
             </a:pPr>
             <a:r>
-              <a:rPr sz="1100">
+              <a:rPr sz="1000">
                 <a:solidFill>
                   <a:srgbClr val="00B388"/>
                 </a:solidFill>
@@ -21299,14 +21856,60 @@
       </p:sp>
       <p:sp>
         <p:nvSpPr>
-          <p:cNvPr id="26" name="TextBox 25"/>
+          <p:cNvPr id="34" name="Rounded Rectangle 33"/>
+          <p:cNvSpPr/>
+          <p:nvPr/>
+        </p:nvSpPr>
+        <p:spPr>
+          <a:xfrm>
+            <a:off x="5184648" y="3767328"/>
+            <a:ext cx="941832" cy="347472"/>
+          </a:xfrm>
+          <a:prstGeom prst="roundRect">
+            <a:avLst>
+              <a:gd name="adj" fmla="val 50000"/>
+            </a:avLst>
+          </a:prstGeom>
+          <a:solidFill>
+            <a:srgbClr val="FFFFFF"/>
+          </a:solidFill>
+          <a:ln>
+            <a:noFill/>
+          </a:ln>
+          <a:effectLst/>
+        </p:spPr>
+        <p:style>
+          <a:lnRef idx="1">
+            <a:schemeClr val="accent1"/>
+          </a:lnRef>
+          <a:fillRef idx="3">
+            <a:schemeClr val="accent1"/>
+          </a:fillRef>
+          <a:effectRef idx="2">
+            <a:schemeClr val="accent1"/>
+          </a:effectRef>
+          <a:fontRef idx="minor">
+            <a:schemeClr val="lt1"/>
+          </a:fontRef>
+        </p:style>
+        <p:txBody>
+          <a:bodyPr rtlCol="0" anchor="ctr"/>
+          <a:lstStyle/>
+          <a:p>
+            <a:pPr algn="ctr"/>
+          </a:p>
+        </p:txBody>
+      </p:sp>
+      <p:sp>
+        <p:nvSpPr>
+          <p:cNvPr id="35" name="TextBox 34"/>
           <p:cNvSpPr txBox="1"/>
           <p:nvPr/>
         </p:nvSpPr>
         <p:spPr>
           <a:xfrm>
-            <a:off x="5221224" y="3749039"/>
-            <a:ext cx="969264" cy="365760"/>
+            <a:off x="5184648" y="3785615"/>
+            <a:ext cx="941832" cy="310896"/>
           </a:xfrm>
           <a:prstGeom prst="rect">
             <a:avLst/>
@@ -21319,19 +21922,16 @@
           </a:bodyPr>
           <a:lstStyle/>
           <a:p>
-            <a:pPr>
+            <a:pPr algn="ctr">
               <a:lnSpc>
-                <a:spcPct val="105000"/>
+                <a:spcPct val="102000"/>
               </a:lnSpc>
-              <a:spcBef>
-                <a:spcPts val="0"/>
-              </a:spcBef>
               <a:spcAft>
                 <a:spcPts val="0"/>
               </a:spcAft>
             </a:pPr>
             <a:r>
-              <a:rPr sz="800">
+              <a:rPr sz="760">
                 <a:solidFill>
                   <a:srgbClr val="191919"/>
                 </a:solidFill>
@@ -21341,19 +21941,16 @@
             </a:r>
           </a:p>
           <a:p>
-            <a:pPr>
+            <a:pPr algn="ctr">
               <a:lnSpc>
-                <a:spcPct val="105000"/>
+                <a:spcPct val="102000"/>
               </a:lnSpc>
-              <a:spcBef>
-                <a:spcPts val="0"/>
-              </a:spcBef>
               <a:spcAft>
                 <a:spcPts val="0"/>
               </a:spcAft>
             </a:pPr>
             <a:r>
-              <a:rPr sz="800">
+              <a:rPr sz="760">
                 <a:solidFill>
                   <a:srgbClr val="191919"/>
                 </a:solidFill>
@@ -21366,14 +21963,14 @@
       </p:sp>
       <p:sp>
         <p:nvSpPr>
-          <p:cNvPr id="27" name="TextBox 26"/>
+          <p:cNvPr id="36" name="TextBox 35"/>
           <p:cNvSpPr txBox="1"/>
           <p:nvPr/>
         </p:nvSpPr>
         <p:spPr>
           <a:xfrm>
-            <a:off x="6190488" y="3749039"/>
-            <a:ext cx="182880" cy="365760"/>
+            <a:off x="6126480" y="3767328"/>
+            <a:ext cx="169164" cy="347472"/>
           </a:xfrm>
           <a:prstGeom prst="rect">
             <a:avLst/>
@@ -21386,19 +21983,16 @@
           </a:bodyPr>
           <a:lstStyle/>
           <a:p>
-            <a:pPr>
+            <a:pPr algn="ctr">
               <a:lnSpc>
                 <a:spcPct val="120000"/>
               </a:lnSpc>
-              <a:spcBef>
-                <a:spcPts val="0"/>
-              </a:spcBef>
               <a:spcAft>
                 <a:spcPts val="200"/>
               </a:spcAft>
             </a:pPr>
             <a:r>
-              <a:rPr sz="1100">
+              <a:rPr sz="1000">
                 <a:solidFill>
                   <a:srgbClr val="00B388"/>
                 </a:solidFill>
@@ -21411,14 +22005,60 @@
       </p:sp>
       <p:sp>
         <p:nvSpPr>
-          <p:cNvPr id="28" name="TextBox 27"/>
+          <p:cNvPr id="37" name="Rounded Rectangle 36"/>
+          <p:cNvSpPr/>
+          <p:nvPr/>
+        </p:nvSpPr>
+        <p:spPr>
+          <a:xfrm>
+            <a:off x="6295644" y="3767328"/>
+            <a:ext cx="941832" cy="347472"/>
+          </a:xfrm>
+          <a:prstGeom prst="roundRect">
+            <a:avLst>
+              <a:gd name="adj" fmla="val 50000"/>
+            </a:avLst>
+          </a:prstGeom>
+          <a:solidFill>
+            <a:srgbClr val="FFFFFF"/>
+          </a:solidFill>
+          <a:ln>
+            <a:noFill/>
+          </a:ln>
+          <a:effectLst/>
+        </p:spPr>
+        <p:style>
+          <a:lnRef idx="1">
+            <a:schemeClr val="accent1"/>
+          </a:lnRef>
+          <a:fillRef idx="3">
+            <a:schemeClr val="accent1"/>
+          </a:fillRef>
+          <a:effectRef idx="2">
+            <a:schemeClr val="accent1"/>
+          </a:effectRef>
+          <a:fontRef idx="minor">
+            <a:schemeClr val="lt1"/>
+          </a:fontRef>
+        </p:style>
+        <p:txBody>
+          <a:bodyPr rtlCol="0" anchor="ctr"/>
+          <a:lstStyle/>
+          <a:p>
+            <a:pPr algn="ctr"/>
+          </a:p>
+        </p:txBody>
+      </p:sp>
+      <p:sp>
+        <p:nvSpPr>
+          <p:cNvPr id="38" name="TextBox 37"/>
           <p:cNvSpPr txBox="1"/>
           <p:nvPr/>
         </p:nvSpPr>
         <p:spPr>
           <a:xfrm>
-            <a:off x="6373368" y="3749039"/>
-            <a:ext cx="969264" cy="365760"/>
+            <a:off x="6295644" y="3785615"/>
+            <a:ext cx="941832" cy="310896"/>
           </a:xfrm>
           <a:prstGeom prst="rect">
             <a:avLst/>
@@ -21431,19 +22071,16 @@
           </a:bodyPr>
           <a:lstStyle/>
           <a:p>
-            <a:pPr>
+            <a:pPr algn="ctr">
               <a:lnSpc>
-                <a:spcPct val="105000"/>
+                <a:spcPct val="102000"/>
               </a:lnSpc>
-              <a:spcBef>
-                <a:spcPts val="0"/>
-              </a:spcBef>
               <a:spcAft>
                 <a:spcPts val="0"/>
               </a:spcAft>
             </a:pPr>
             <a:r>
-              <a:rPr sz="800">
+              <a:rPr sz="760">
                 <a:solidFill>
                   <a:srgbClr val="191919"/>
                 </a:solidFill>
@@ -21453,19 +22090,16 @@
             </a:r>
           </a:p>
           <a:p>
-            <a:pPr>
+            <a:pPr algn="ctr">
               <a:lnSpc>
-                <a:spcPct val="105000"/>
+                <a:spcPct val="102000"/>
               </a:lnSpc>
-              <a:spcBef>
-                <a:spcPts val="0"/>
-              </a:spcBef>
               <a:spcAft>
                 <a:spcPts val="0"/>
               </a:spcAft>
             </a:pPr>
             <a:r>
-              <a:rPr sz="800">
+              <a:rPr sz="760">
                 <a:solidFill>
                   <a:srgbClr val="191919"/>
                 </a:solidFill>
@@ -21478,14 +22112,14 @@
       </p:sp>
       <p:sp>
         <p:nvSpPr>
-          <p:cNvPr id="29" name="TextBox 28"/>
+          <p:cNvPr id="39" name="TextBox 38"/>
           <p:cNvSpPr txBox="1"/>
           <p:nvPr/>
         </p:nvSpPr>
         <p:spPr>
           <a:xfrm>
-            <a:off x="7342631" y="3749039"/>
-            <a:ext cx="182880" cy="365760"/>
+            <a:off x="7237476" y="3767328"/>
+            <a:ext cx="169164" cy="347472"/>
           </a:xfrm>
           <a:prstGeom prst="rect">
             <a:avLst/>
@@ -21498,19 +22132,16 @@
           </a:bodyPr>
           <a:lstStyle/>
           <a:p>
-            <a:pPr>
+            <a:pPr algn="ctr">
               <a:lnSpc>
                 <a:spcPct val="120000"/>
               </a:lnSpc>
-              <a:spcBef>
-                <a:spcPts val="0"/>
-              </a:spcBef>
               <a:spcAft>
                 <a:spcPts val="200"/>
               </a:spcAft>
             </a:pPr>
             <a:r>
-              <a:rPr sz="1100">
+              <a:rPr sz="1000">
                 <a:solidFill>
                   <a:srgbClr val="00B388"/>
                 </a:solidFill>
@@ -21523,14 +22154,60 @@
       </p:sp>
       <p:sp>
         <p:nvSpPr>
-          <p:cNvPr id="30" name="TextBox 29"/>
+          <p:cNvPr id="40" name="Rounded Rectangle 39"/>
+          <p:cNvSpPr/>
+          <p:nvPr/>
+        </p:nvSpPr>
+        <p:spPr>
+          <a:xfrm>
+            <a:off x="7406640" y="3767328"/>
+            <a:ext cx="941832" cy="347472"/>
+          </a:xfrm>
+          <a:prstGeom prst="roundRect">
+            <a:avLst>
+              <a:gd name="adj" fmla="val 50000"/>
+            </a:avLst>
+          </a:prstGeom>
+          <a:solidFill>
+            <a:srgbClr val="FFFFFF"/>
+          </a:solidFill>
+          <a:ln>
+            <a:noFill/>
+          </a:ln>
+          <a:effectLst/>
+        </p:spPr>
+        <p:style>
+          <a:lnRef idx="1">
+            <a:schemeClr val="accent1"/>
+          </a:lnRef>
+          <a:fillRef idx="3">
+            <a:schemeClr val="accent1"/>
+          </a:fillRef>
+          <a:effectRef idx="2">
+            <a:schemeClr val="accent1"/>
+          </a:effectRef>
+          <a:fontRef idx="minor">
+            <a:schemeClr val="lt1"/>
+          </a:fontRef>
+        </p:style>
+        <p:txBody>
+          <a:bodyPr rtlCol="0" anchor="ctr"/>
+          <a:lstStyle/>
+          <a:p>
+            <a:pPr algn="ctr"/>
+          </a:p>
+        </p:txBody>
+      </p:sp>
+      <p:sp>
+        <p:nvSpPr>
+          <p:cNvPr id="41" name="TextBox 40"/>
           <p:cNvSpPr txBox="1"/>
           <p:nvPr/>
         </p:nvSpPr>
         <p:spPr>
           <a:xfrm>
-            <a:off x="7525512" y="3749039"/>
-            <a:ext cx="969264" cy="365760"/>
+            <a:off x="7406640" y="3785615"/>
+            <a:ext cx="941832" cy="310896"/>
           </a:xfrm>
           <a:prstGeom prst="rect">
             <a:avLst/>
@@ -21543,19 +22220,16 @@
           </a:bodyPr>
           <a:lstStyle/>
           <a:p>
-            <a:pPr>
+            <a:pPr algn="ctr">
               <a:lnSpc>
-                <a:spcPct val="105000"/>
+                <a:spcPct val="102000"/>
               </a:lnSpc>
-              <a:spcBef>
-                <a:spcPts val="0"/>
-              </a:spcBef>
               <a:spcAft>
                 <a:spcPts val="0"/>
               </a:spcAft>
             </a:pPr>
             <a:r>
-              <a:rPr sz="800">
+              <a:rPr sz="760">
                 <a:solidFill>
                   <a:srgbClr val="191919"/>
                 </a:solidFill>
@@ -21565,19 +22239,16 @@
             </a:r>
           </a:p>
           <a:p>
-            <a:pPr>
+            <a:pPr algn="ctr">
               <a:lnSpc>
-                <a:spcPct val="105000"/>
+                <a:spcPct val="102000"/>
               </a:lnSpc>
-              <a:spcBef>
-                <a:spcPts val="0"/>
-              </a:spcBef>
               <a:spcAft>
                 <a:spcPts val="0"/>
               </a:spcAft>
             </a:pPr>
             <a:r>
-              <a:rPr sz="800">
+              <a:rPr sz="760">
                 <a:solidFill>
                   <a:srgbClr val="191919"/>
                 </a:solidFill>
@@ -21590,14 +22261,14 @@
       </p:sp>
       <p:cxnSp>
         <p:nvCxnSpPr>
-          <p:cNvPr id="31" name="Connector 30"/>
+          <p:cNvPr id="42" name="Connector 41"/>
           <p:cNvCxnSpPr/>
           <p:nvPr/>
         </p:nvCxnSpPr>
         <p:spPr>
           <a:xfrm flipH="1">
-            <a:off x="1097280" y="4261104"/>
-            <a:ext cx="6912864" cy="0"/>
+            <a:off x="1211580" y="4279392"/>
+            <a:ext cx="6665976" cy="0"/>
           </a:xfrm>
           <a:prstGeom prst="line">
             <a:avLst/>
@@ -21627,25 +22298,25 @@
       </p:cxnSp>
       <p:sp>
         <p:nvSpPr>
-          <p:cNvPr id="32" name="Rectangle 31"/>
+          <p:cNvPr id="43" name="Rounded Rectangle 42"/>
           <p:cNvSpPr/>
           <p:nvPr/>
         </p:nvSpPr>
         <p:spPr>
           <a:xfrm>
-            <a:off x="2084832" y="4160520"/>
-            <a:ext cx="4937760" cy="201168"/>
-          </a:xfrm>
-          <a:prstGeom prst="rect">
-            <a:avLst/>
+            <a:off x="2121408" y="4187952"/>
+            <a:ext cx="4846320" cy="182880"/>
+          </a:xfrm>
+          <a:prstGeom prst="roundRect">
+            <a:avLst>
+              <a:gd name="adj" fmla="val 50000"/>
+            </a:avLst>
           </a:prstGeom>
           <a:solidFill>
-            <a:srgbClr val="FFFFFF"/>
+            <a:srgbClr val="F5F5F5"/>
           </a:solidFill>
-          <a:ln w="1270">
-            <a:solidFill>
-              <a:srgbClr val="FFFFFF"/>
-            </a:solidFill>
+          <a:ln>
+            <a:noFill/>
           </a:ln>
           <a:effectLst/>
         </p:spPr>
@@ -21673,14 +22344,14 @@
       </p:sp>
       <p:sp>
         <p:nvSpPr>
-          <p:cNvPr id="33" name="TextBox 32"/>
+          <p:cNvPr id="44" name="TextBox 43"/>
           <p:cNvSpPr txBox="1"/>
           <p:nvPr/>
         </p:nvSpPr>
         <p:spPr>
           <a:xfrm>
-            <a:off x="2084832" y="4183380"/>
-            <a:ext cx="4937760" cy="164592"/>
+            <a:off x="2121408" y="4210812"/>
+            <a:ext cx="4846320" cy="146304"/>
           </a:xfrm>
           <a:prstGeom prst="rect">
             <a:avLst/>
@@ -21693,70 +22364,64 @@
           </a:bodyPr>
           <a:lstStyle/>
           <a:p>
+            <a:pPr algn="ctr">
+              <a:lnSpc>
+                <a:spcPct val="120000"/>
+              </a:lnSpc>
+              <a:spcAft>
+                <a:spcPts val="200"/>
+              </a:spcAft>
+            </a:pPr>
+            <a:r>
+              <a:rPr sz="660" spc="30">
+                <a:solidFill>
+                  <a:srgbClr val="00B388"/>
+                </a:solidFill>
+                <a:latin typeface="AvenirNext LT Pro Medium"/>
+              </a:rPr>
+              <a:t>DATA FLYWHEEL · EVERY AUDITED RUN RETURNS AS TRAINING DATA — THE LOOP SHARPENS ITSELF</a:t>
+            </a:r>
+          </a:p>
+        </p:txBody>
+      </p:sp>
+      <p:sp>
+        <p:nvSpPr>
+          <p:cNvPr id="45" name="TextBox 44"/>
+          <p:cNvSpPr txBox="1"/>
+          <p:nvPr/>
+        </p:nvSpPr>
+        <p:spPr>
+          <a:xfrm>
+            <a:off x="777240" y="4443984"/>
+            <a:ext cx="7589520" cy="164592"/>
+          </a:xfrm>
+          <a:prstGeom prst="rect">
+            <a:avLst/>
+          </a:prstGeom>
+          <a:noFill/>
+        </p:spPr>
+        <p:txBody>
+          <a:bodyPr wrap="square" anchor="t" lIns="0" rIns="0" tIns="0" bIns="0">
+            <a:spAutoFit/>
+          </a:bodyPr>
+          <a:lstStyle/>
+          <a:p>
             <a:pPr>
               <a:lnSpc>
                 <a:spcPct val="120000"/>
               </a:lnSpc>
-              <a:spcBef>
-                <a:spcPts val="0"/>
-              </a:spcBef>
               <a:spcAft>
                 <a:spcPts val="200"/>
               </a:spcAft>
             </a:pPr>
             <a:r>
-              <a:rPr sz="680" spc="40">
-                <a:solidFill>
-                  <a:srgbClr val="00B388"/>
-                </a:solidFill>
-                <a:latin typeface="AvenirNext LT Pro Medium"/>
-              </a:rPr>
-              <a:t>DATA FLYWHEEL · EVERY AUDITED RUN RETURNS AS TRAINING DATA — THE LOOP SHARPENS ITSELF</a:t>
-            </a:r>
-          </a:p>
-        </p:txBody>
-      </p:sp>
-      <p:sp>
-        <p:nvSpPr>
-          <p:cNvPr id="34" name="TextBox 33"/>
-          <p:cNvSpPr txBox="1"/>
-          <p:nvPr/>
-        </p:nvSpPr>
-        <p:spPr>
-          <a:xfrm>
-            <a:off x="612648" y="4526280"/>
-            <a:ext cx="7918704" cy="274320"/>
-          </a:xfrm>
-          <a:prstGeom prst="rect">
-            <a:avLst/>
-          </a:prstGeom>
-          <a:noFill/>
-        </p:spPr>
-        <p:txBody>
-          <a:bodyPr wrap="square" anchor="t" lIns="0" rIns="0" tIns="0" bIns="0">
-            <a:spAutoFit/>
-          </a:bodyPr>
-          <a:lstStyle/>
-          <a:p>
-            <a:pPr>
-              <a:lnSpc>
-                <a:spcPct val="120000"/>
-              </a:lnSpc>
-              <a:spcBef>
-                <a:spcPts val="0"/>
-              </a:spcBef>
-              <a:spcAft>
-                <a:spcPts val="200"/>
-              </a:spcAft>
-            </a:pPr>
-            <a:r>
-              <a:rPr sz="720">
+              <a:rPr sz="690">
                 <a:solidFill>
                   <a:srgbClr val="666666"/>
                 </a:solidFill>
                 <a:latin typeface="AvenirNext LT Pro Regular"/>
               </a:rPr>
-              <a:t>Every link carries an acceptance gate. Outside its competence the system returns INFEASIBLE with a diagnosis — it never forces an answer.</a:t>
+              <a:t>Every link carries an acceptance gate — outside its competence the system returns INFEASIBLE with a diagnosis, never a forced answer.</a:t>
             </a:r>
           </a:p>
         </p:txBody>
@@ -21859,9 +22524,6 @@
               <a:lnSpc>
                 <a:spcPct val="120000"/>
               </a:lnSpc>
-              <a:spcBef>
-                <a:spcPts val="0"/>
-              </a:spcBef>
               <a:spcAft>
                 <a:spcPts val="100"/>
               </a:spcAft>
@@ -21881,9 +22543,6 @@
               <a:lnSpc>
                 <a:spcPct val="120000"/>
               </a:lnSpc>
-              <a:spcBef>
-                <a:spcPts val="0"/>
-              </a:spcBef>
               <a:spcAft>
                 <a:spcPts val="200"/>
               </a:spcAft>
@@ -21926,9 +22585,6 @@
               <a:lnSpc>
                 <a:spcPct val="120000"/>
               </a:lnSpc>
-              <a:spcBef>
-                <a:spcPts val="0"/>
-              </a:spcBef>
               <a:spcAft>
                 <a:spcPts val="100"/>
               </a:spcAft>
@@ -21948,9 +22604,6 @@
               <a:lnSpc>
                 <a:spcPct val="120000"/>
               </a:lnSpc>
-              <a:spcBef>
-                <a:spcPts val="0"/>
-              </a:spcBef>
               <a:spcAft>
                 <a:spcPts val="200"/>
               </a:spcAft>
@@ -21993,9 +22646,6 @@
               <a:lnSpc>
                 <a:spcPct val="120000"/>
               </a:lnSpc>
-              <a:spcBef>
-                <a:spcPts val="0"/>
-              </a:spcBef>
               <a:spcAft>
                 <a:spcPts val="100"/>
               </a:spcAft>
@@ -22015,9 +22665,6 @@
               <a:lnSpc>
                 <a:spcPct val="120000"/>
               </a:lnSpc>
-              <a:spcBef>
-                <a:spcPts val="0"/>
-              </a:spcBef>
               <a:spcAft>
                 <a:spcPts val="200"/>
               </a:spcAft>
@@ -22036,7 +22683,7 @@
       </p:sp>
       <p:sp>
         <p:nvSpPr>
-          <p:cNvPr id="7" name="Rectangle 6"/>
+          <p:cNvPr id="7" name="Rounded Rectangle 6"/>
           <p:cNvSpPr/>
           <p:nvPr/>
         </p:nvSpPr>
@@ -22045,14 +22692,16 @@
             <a:off x="2834640" y="1417320"/>
             <a:ext cx="2651760" cy="658368"/>
           </a:xfrm>
-          <a:prstGeom prst="rect">
-            <a:avLst/>
-          </a:prstGeom>
-          <a:noFill/>
-          <a:ln w="12700">
-            <a:solidFill>
-              <a:srgbClr val="191919"/>
-            </a:solidFill>
+          <a:prstGeom prst="roundRect">
+            <a:avLst>
+              <a:gd name="adj" fmla="val 14000"/>
+            </a:avLst>
+          </a:prstGeom>
+          <a:solidFill>
+            <a:srgbClr val="F5F5F5"/>
+          </a:solidFill>
+          <a:ln>
+            <a:noFill/>
           </a:ln>
           <a:effectLst/>
         </p:spPr>
@@ -22086,8 +22735,8 @@
         </p:nvSpPr>
         <p:spPr>
           <a:xfrm>
-            <a:off x="2944368" y="1508760"/>
-            <a:ext cx="2432304" cy="512063"/>
+            <a:off x="2980944" y="1517904"/>
+            <a:ext cx="2359152" cy="493776"/>
           </a:xfrm>
           <a:prstGeom prst="rect">
             <a:avLst/>
@@ -22104,9 +22753,6 @@
               <a:lnSpc>
                 <a:spcPct val="100000"/>
               </a:lnSpc>
-              <a:spcBef>
-                <a:spcPts val="0"/>
-              </a:spcBef>
               <a:spcAft>
                 <a:spcPts val="200"/>
               </a:spcAft>
@@ -22126,9 +22772,6 @@
               <a:lnSpc>
                 <a:spcPct val="112000"/>
               </a:lnSpc>
-              <a:spcBef>
-                <a:spcPts val="0"/>
-              </a:spcBef>
               <a:spcAft>
                 <a:spcPts val="200"/>
               </a:spcAft>
@@ -22147,7 +22790,7 @@
       </p:sp>
       <p:sp>
         <p:nvSpPr>
-          <p:cNvPr id="9" name="Rectangle 8"/>
+          <p:cNvPr id="9" name="Rounded Rectangle 8"/>
           <p:cNvSpPr/>
           <p:nvPr/>
         </p:nvSpPr>
@@ -22156,14 +22799,16 @@
             <a:off x="2834640" y="2697480"/>
             <a:ext cx="2651760" cy="658368"/>
           </a:xfrm>
-          <a:prstGeom prst="rect">
-            <a:avLst/>
-          </a:prstGeom>
-          <a:noFill/>
-          <a:ln w="12700">
-            <a:solidFill>
-              <a:srgbClr val="191919"/>
-            </a:solidFill>
+          <a:prstGeom prst="roundRect">
+            <a:avLst>
+              <a:gd name="adj" fmla="val 14000"/>
+            </a:avLst>
+          </a:prstGeom>
+          <a:solidFill>
+            <a:srgbClr val="F5F5F5"/>
+          </a:solidFill>
+          <a:ln>
+            <a:noFill/>
           </a:ln>
           <a:effectLst/>
         </p:spPr>
@@ -22197,8 +22842,8 @@
         </p:nvSpPr>
         <p:spPr>
           <a:xfrm>
-            <a:off x="2944368" y="2788920"/>
-            <a:ext cx="2432304" cy="512063"/>
+            <a:off x="2980944" y="2798064"/>
+            <a:ext cx="2359152" cy="493776"/>
           </a:xfrm>
           <a:prstGeom prst="rect">
             <a:avLst/>
@@ -22215,9 +22860,6 @@
               <a:lnSpc>
                 <a:spcPct val="100000"/>
               </a:lnSpc>
-              <a:spcBef>
-                <a:spcPts val="0"/>
-              </a:spcBef>
               <a:spcAft>
                 <a:spcPts val="200"/>
               </a:spcAft>
@@ -22237,9 +22879,6 @@
               <a:lnSpc>
                 <a:spcPct val="112000"/>
               </a:lnSpc>
-              <a:spcBef>
-                <a:spcPts val="0"/>
-              </a:spcBef>
               <a:spcAft>
                 <a:spcPts val="200"/>
               </a:spcAft>
@@ -22258,7 +22897,7 @@
       </p:sp>
       <p:sp>
         <p:nvSpPr>
-          <p:cNvPr id="11" name="Rectangle 10"/>
+          <p:cNvPr id="11" name="Rounded Rectangle 10"/>
           <p:cNvSpPr/>
           <p:nvPr/>
         </p:nvSpPr>
@@ -22267,14 +22906,16 @@
             <a:off x="2834640" y="3977639"/>
             <a:ext cx="2651760" cy="658368"/>
           </a:xfrm>
-          <a:prstGeom prst="rect">
-            <a:avLst/>
-          </a:prstGeom>
-          <a:noFill/>
-          <a:ln w="12700">
-            <a:solidFill>
-              <a:srgbClr val="191919"/>
-            </a:solidFill>
+          <a:prstGeom prst="roundRect">
+            <a:avLst>
+              <a:gd name="adj" fmla="val 14000"/>
+            </a:avLst>
+          </a:prstGeom>
+          <a:solidFill>
+            <a:srgbClr val="F5F5F5"/>
+          </a:solidFill>
+          <a:ln>
+            <a:noFill/>
           </a:ln>
           <a:effectLst/>
         </p:spPr>
@@ -22308,8 +22949,8 @@
         </p:nvSpPr>
         <p:spPr>
           <a:xfrm>
-            <a:off x="2944368" y="4069079"/>
-            <a:ext cx="2432304" cy="512063"/>
+            <a:off x="2980944" y="4078224"/>
+            <a:ext cx="2359152" cy="493776"/>
           </a:xfrm>
           <a:prstGeom prst="rect">
             <a:avLst/>
@@ -22326,9 +22967,6 @@
               <a:lnSpc>
                 <a:spcPct val="100000"/>
               </a:lnSpc>
-              <a:spcBef>
-                <a:spcPts val="0"/>
-              </a:spcBef>
               <a:spcAft>
                 <a:spcPts val="200"/>
               </a:spcAft>
@@ -22348,9 +22986,6 @@
               <a:lnSpc>
                 <a:spcPct val="112000"/>
               </a:lnSpc>
-              <a:spcBef>
-                <a:spcPts val="0"/>
-              </a:spcBef>
               <a:spcAft>
                 <a:spcPts val="200"/>
               </a:spcAft>
@@ -22430,9 +23065,6 @@
               <a:lnSpc>
                 <a:spcPct val="120000"/>
               </a:lnSpc>
-              <a:spcBef>
-                <a:spcPts val="0"/>
-              </a:spcBef>
               <a:spcAft>
                 <a:spcPts val="200"/>
               </a:spcAft>
@@ -22512,9 +23144,6 @@
               <a:lnSpc>
                 <a:spcPct val="120000"/>
               </a:lnSpc>
-              <a:spcBef>
-                <a:spcPts val="0"/>
-              </a:spcBef>
               <a:spcAft>
                 <a:spcPts val="200"/>
               </a:spcAft>
@@ -22666,9 +23295,6 @@
               <a:lnSpc>
                 <a:spcPct val="120000"/>
               </a:lnSpc>
-              <a:spcBef>
-                <a:spcPts val="0"/>
-              </a:spcBef>
               <a:spcAft>
                 <a:spcPts val="200"/>
               </a:spcAft>
@@ -22820,9 +23446,6 @@
               <a:lnSpc>
                 <a:spcPct val="120000"/>
               </a:lnSpc>
-              <a:spcBef>
-                <a:spcPts val="0"/>
-              </a:spcBef>
               <a:spcAft>
                 <a:spcPts val="200"/>
               </a:spcAft>
@@ -22841,7 +23464,7 @@
       </p:sp>
       <p:sp>
         <p:nvSpPr>
-          <p:cNvPr id="25" name="Rectangle 24"/>
+          <p:cNvPr id="25" name="Rounded Rectangle 24"/>
           <p:cNvSpPr/>
           <p:nvPr/>
         </p:nvSpPr>
@@ -22850,8 +23473,10 @@
             <a:off x="6784848" y="1417320"/>
             <a:ext cx="1746504" cy="3218687"/>
           </a:xfrm>
-          <a:prstGeom prst="rect">
-            <a:avLst/>
+          <a:prstGeom prst="roundRect">
+            <a:avLst>
+              <a:gd name="adj" fmla="val 6000"/>
+            </a:avLst>
           </a:prstGeom>
           <a:noFill/>
           <a:ln w="12700">
@@ -22892,8 +23517,8 @@
         </p:nvSpPr>
         <p:spPr>
           <a:xfrm>
-            <a:off x="6894576" y="1527048"/>
-            <a:ext cx="1527048" cy="548640"/>
+            <a:off x="6912864" y="1527048"/>
+            <a:ext cx="1490472" cy="548640"/>
           </a:xfrm>
           <a:prstGeom prst="rect">
             <a:avLst/>
@@ -22910,9 +23535,6 @@
               <a:lnSpc>
                 <a:spcPct val="120000"/>
               </a:lnSpc>
-              <a:spcBef>
-                <a:spcPts val="0"/>
-              </a:spcBef>
               <a:spcAft>
                 <a:spcPts val="100"/>
               </a:spcAft>
@@ -22932,9 +23554,6 @@
               <a:lnSpc>
                 <a:spcPct val="110000"/>
               </a:lnSpc>
-              <a:spcBef>
-                <a:spcPts val="0"/>
-              </a:spcBef>
               <a:spcAft>
                 <a:spcPts val="200"/>
               </a:spcAft>
@@ -22959,8 +23578,8 @@
         </p:nvSpPr>
         <p:spPr>
           <a:xfrm>
-            <a:off x="6894576" y="2743200"/>
-            <a:ext cx="1527048" cy="502920"/>
+            <a:off x="6912864" y="2743200"/>
+            <a:ext cx="1490472" cy="502920"/>
           </a:xfrm>
           <a:prstGeom prst="rect">
             <a:avLst/>
@@ -22977,9 +23596,6 @@
               <a:lnSpc>
                 <a:spcPct val="120000"/>
               </a:lnSpc>
-              <a:spcBef>
-                <a:spcPts val="0"/>
-              </a:spcBef>
               <a:spcAft>
                 <a:spcPts val="100"/>
               </a:spcAft>
@@ -22999,9 +23615,6 @@
               <a:lnSpc>
                 <a:spcPct val="110000"/>
               </a:lnSpc>
-              <a:spcBef>
-                <a:spcPts val="0"/>
-              </a:spcBef>
               <a:spcAft>
                 <a:spcPts val="200"/>
               </a:spcAft>
@@ -23082,9 +23695,6 @@
               <a:lnSpc>
                 <a:spcPct val="120000"/>
               </a:lnSpc>
-              <a:spcBef>
-                <a:spcPts val="0"/>
-              </a:spcBef>
               <a:spcAft>
                 <a:spcPts val="200"/>
               </a:spcAft>
@@ -23165,9 +23775,6 @@
               <a:lnSpc>
                 <a:spcPct val="120000"/>
               </a:lnSpc>
-              <a:spcBef>
-                <a:spcPts val="0"/>
-              </a:spcBef>
               <a:spcAft>
                 <a:spcPts val="200"/>
               </a:spcAft>
@@ -23248,9 +23855,6 @@
               <a:lnSpc>
                 <a:spcPct val="120000"/>
               </a:lnSpc>
-              <a:spcBef>
-                <a:spcPts val="0"/>
-              </a:spcBef>
               <a:spcAft>
                 <a:spcPts val="200"/>
               </a:spcAft>
@@ -23341,200 +23945,22 @@
       </p:sp>
       <p:sp>
         <p:nvSpPr>
-          <p:cNvPr id="4" name="TextBox 3"/>
-          <p:cNvSpPr txBox="1"/>
-          <p:nvPr/>
-        </p:nvSpPr>
-        <p:spPr>
-          <a:xfrm>
-            <a:off x="612648" y="1371600"/>
-            <a:ext cx="2487168" cy="457200"/>
-          </a:xfrm>
-          <a:prstGeom prst="rect">
-            <a:avLst/>
-          </a:prstGeom>
-          <a:noFill/>
-        </p:spPr>
-        <p:txBody>
-          <a:bodyPr wrap="square" anchor="t" lIns="0" rIns="0" tIns="0" bIns="0">
-            <a:spAutoFit/>
-          </a:bodyPr>
-          <a:lstStyle/>
-          <a:p>
-            <a:pPr>
-              <a:lnSpc>
-                <a:spcPct val="100000"/>
-              </a:lnSpc>
-              <a:spcBef>
-                <a:spcPts val="0"/>
-              </a:spcBef>
-              <a:spcAft>
-                <a:spcPts val="200"/>
-              </a:spcAft>
-            </a:pPr>
-            <a:r>
-              <a:rPr sz="2600">
-                <a:solidFill>
-                  <a:srgbClr val="191919"/>
-                </a:solidFill>
-                <a:latin typeface="AvenirNext LT Pro Light"/>
-              </a:rPr>
-              <a:t>01</a:t>
-            </a:r>
-          </a:p>
-        </p:txBody>
-      </p:sp>
-      <p:sp>
-        <p:nvSpPr>
-          <p:cNvPr id="5" name="TextBox 4"/>
-          <p:cNvSpPr txBox="1"/>
-          <p:nvPr/>
-        </p:nvSpPr>
-        <p:spPr>
-          <a:xfrm>
-            <a:off x="612648" y="1920240"/>
-            <a:ext cx="2487168" cy="164592"/>
-          </a:xfrm>
-          <a:prstGeom prst="rect">
-            <a:avLst/>
-          </a:prstGeom>
-          <a:noFill/>
-        </p:spPr>
-        <p:txBody>
-          <a:bodyPr wrap="square" anchor="t" lIns="0" rIns="0" tIns="0" bIns="0">
-            <a:spAutoFit/>
-          </a:bodyPr>
-          <a:lstStyle/>
-          <a:p>
-            <a:pPr>
-              <a:lnSpc>
-                <a:spcPct val="120000"/>
-              </a:lnSpc>
-              <a:spcBef>
-                <a:spcPts val="0"/>
-              </a:spcBef>
-              <a:spcAft>
-                <a:spcPts val="200"/>
-              </a:spcAft>
-            </a:pPr>
-            <a:r>
-              <a:rPr sz="700" spc="60">
-                <a:solidFill>
-                  <a:srgbClr val="666666"/>
-                </a:solidFill>
-                <a:latin typeface="AvenirNext LT Pro Medium"/>
-              </a:rPr>
-              <a:t>DATA MODEL</a:t>
-            </a:r>
-          </a:p>
-        </p:txBody>
-      </p:sp>
-      <p:sp>
-        <p:nvSpPr>
-          <p:cNvPr id="6" name="TextBox 5"/>
-          <p:cNvSpPr txBox="1"/>
-          <p:nvPr/>
-        </p:nvSpPr>
-        <p:spPr>
-          <a:xfrm>
-            <a:off x="612648" y="2121408"/>
-            <a:ext cx="2487168" cy="237744"/>
-          </a:xfrm>
-          <a:prstGeom prst="rect">
-            <a:avLst/>
-          </a:prstGeom>
-          <a:noFill/>
-        </p:spPr>
-        <p:txBody>
-          <a:bodyPr wrap="square" anchor="t" lIns="0" rIns="0" tIns="0" bIns="0">
-            <a:spAutoFit/>
-          </a:bodyPr>
-          <a:lstStyle/>
-          <a:p>
-            <a:pPr>
-              <a:lnSpc>
-                <a:spcPct val="120000"/>
-              </a:lnSpc>
-              <a:spcBef>
-                <a:spcPts val="0"/>
-              </a:spcBef>
-              <a:spcAft>
-                <a:spcPts val="200"/>
-              </a:spcAft>
-            </a:pPr>
-            <a:r>
-              <a:rPr sz="1050">
-                <a:solidFill>
-                  <a:srgbClr val="191919"/>
-                </a:solidFill>
-                <a:latin typeface="AvenirNext LT Pro Medium"/>
-              </a:rPr>
-              <a:t>Recipe-Inverse Generator (RIG)</a:t>
-            </a:r>
-          </a:p>
-        </p:txBody>
-      </p:sp>
-      <p:sp>
-        <p:nvSpPr>
-          <p:cNvPr id="7" name="TextBox 6"/>
-          <p:cNvSpPr txBox="1"/>
-          <p:nvPr/>
-        </p:nvSpPr>
-        <p:spPr>
-          <a:xfrm>
-            <a:off x="612648" y="2414016"/>
-            <a:ext cx="2487168" cy="868680"/>
-          </a:xfrm>
-          <a:prstGeom prst="rect">
-            <a:avLst/>
-          </a:prstGeom>
-          <a:noFill/>
-        </p:spPr>
-        <p:txBody>
-          <a:bodyPr wrap="square" anchor="t" lIns="0" rIns="0" tIns="0" bIns="0">
-            <a:spAutoFit/>
-          </a:bodyPr>
-          <a:lstStyle/>
-          <a:p>
-            <a:pPr>
-              <a:lnSpc>
-                <a:spcPct val="122000"/>
-              </a:lnSpc>
-              <a:spcBef>
-                <a:spcPts val="0"/>
-              </a:spcBef>
-              <a:spcAft>
-                <a:spcPts val="200"/>
-              </a:spcAft>
-            </a:pPr>
-            <a:r>
-              <a:rPr sz="750">
-                <a:solidFill>
-                  <a:srgbClr val="191919"/>
-                </a:solidFill>
-                <a:latin typeface="AvenirNext LT Pro Regular"/>
-              </a:rPr>
-              <a:t>A forward model from recipe to result plus an inverse solver that back-calculates candidate recipes to meet a requirement — with calibrated uncertainty and honest refusal (INFEASIBLE + diagnosis).</a:t>
-            </a:r>
-          </a:p>
-        </p:txBody>
-      </p:sp>
-      <p:sp>
-        <p:nvSpPr>
-          <p:cNvPr id="8" name="Rectangle 7"/>
+          <p:cNvPr id="4" name="Rounded Rectangle 3"/>
           <p:cNvSpPr/>
           <p:nvPr/>
         </p:nvSpPr>
         <p:spPr>
           <a:xfrm>
-            <a:off x="612648" y="3401568"/>
-            <a:ext cx="2487168" cy="11430"/>
-          </a:xfrm>
-          <a:prstGeom prst="rect">
-            <a:avLst/>
+            <a:off x="612648" y="1371600"/>
+            <a:ext cx="2551176" cy="3246120"/>
+          </a:xfrm>
+          <a:prstGeom prst="roundRect">
+            <a:avLst>
+              <a:gd name="adj" fmla="val 6000"/>
+            </a:avLst>
           </a:prstGeom>
           <a:solidFill>
-            <a:srgbClr val="00B388"/>
+            <a:srgbClr val="F5F5F5"/>
           </a:solidFill>
           <a:ln>
             <a:noFill/>
@@ -23565,376 +23991,16 @@
       </p:sp>
       <p:sp>
         <p:nvSpPr>
-          <p:cNvPr id="9" name="TextBox 8"/>
-          <p:cNvSpPr txBox="1"/>
-          <p:nvPr/>
-        </p:nvSpPr>
-        <p:spPr>
-          <a:xfrm>
-            <a:off x="612648" y="3474720"/>
-            <a:ext cx="2487168" cy="164592"/>
-          </a:xfrm>
-          <a:prstGeom prst="rect">
-            <a:avLst/>
-          </a:prstGeom>
-          <a:noFill/>
-        </p:spPr>
-        <p:txBody>
-          <a:bodyPr wrap="square" anchor="t" lIns="0" rIns="0" tIns="0" bIns="0">
-            <a:spAutoFit/>
-          </a:bodyPr>
-          <a:lstStyle/>
-          <a:p>
-            <a:pPr>
-              <a:lnSpc>
-                <a:spcPct val="120000"/>
-              </a:lnSpc>
-              <a:spcBef>
-                <a:spcPts val="0"/>
-              </a:spcBef>
-              <a:spcAft>
-                <a:spcPts val="200"/>
-              </a:spcAft>
-            </a:pPr>
-            <a:r>
-              <a:rPr sz="700" spc="60">
-                <a:solidFill>
-                  <a:srgbClr val="00B388"/>
-                </a:solidFill>
-                <a:latin typeface="AvenirNext LT Pro Medium"/>
-              </a:rPr>
-              <a:t>VERIFIED</a:t>
-            </a:r>
-          </a:p>
-        </p:txBody>
-      </p:sp>
-      <p:sp>
-        <p:nvSpPr>
-          <p:cNvPr id="10" name="TextBox 9"/>
-          <p:cNvSpPr txBox="1"/>
-          <p:nvPr/>
-        </p:nvSpPr>
-        <p:spPr>
-          <a:xfrm>
-            <a:off x="612648" y="3657600"/>
-            <a:ext cx="2487168" cy="502920"/>
-          </a:xfrm>
-          <a:prstGeom prst="rect">
-            <a:avLst/>
-          </a:prstGeom>
-          <a:noFill/>
-        </p:spPr>
-        <p:txBody>
-          <a:bodyPr wrap="square" anchor="t" lIns="0" rIns="0" tIns="0" bIns="0">
-            <a:spAutoFit/>
-          </a:bodyPr>
-          <a:lstStyle/>
-          <a:p>
-            <a:pPr>
-              <a:lnSpc>
-                <a:spcPct val="118000"/>
-              </a:lnSpc>
-              <a:spcBef>
-                <a:spcPts val="0"/>
-              </a:spcBef>
-              <a:spcAft>
-                <a:spcPts val="200"/>
-              </a:spcAft>
-            </a:pPr>
-            <a:r>
-              <a:rPr sz="730">
-                <a:solidFill>
-                  <a:srgbClr val="191919"/>
-                </a:solidFill>
-                <a:latin typeface="AvenirNext LT Pro Regular"/>
-              </a:rPr>
-              <a:t>Passed calibration acceptance on Empa's real magnetron-sputtering HiPIMS (PVD) dataset.</a:t>
-            </a:r>
-          </a:p>
-        </p:txBody>
-      </p:sp>
-      <p:sp>
-        <p:nvSpPr>
-          <p:cNvPr id="11" name="TextBox 10"/>
-          <p:cNvSpPr txBox="1"/>
-          <p:nvPr/>
-        </p:nvSpPr>
-        <p:spPr>
-          <a:xfrm>
-            <a:off x="612648" y="4224528"/>
-            <a:ext cx="2487168" cy="164592"/>
-          </a:xfrm>
-          <a:prstGeom prst="rect">
-            <a:avLst/>
-          </a:prstGeom>
-          <a:noFill/>
-        </p:spPr>
-        <p:txBody>
-          <a:bodyPr wrap="square" anchor="t" lIns="0" rIns="0" tIns="0" bIns="0">
-            <a:spAutoFit/>
-          </a:bodyPr>
-          <a:lstStyle/>
-          <a:p>
-            <a:pPr>
-              <a:lnSpc>
-                <a:spcPct val="120000"/>
-              </a:lnSpc>
-              <a:spcBef>
-                <a:spcPts val="0"/>
-              </a:spcBef>
-              <a:spcAft>
-                <a:spcPts val="200"/>
-              </a:spcAft>
-            </a:pPr>
-            <a:r>
-              <a:rPr sz="700" spc="60">
-                <a:solidFill>
-                  <a:srgbClr val="00B388"/>
-                </a:solidFill>
-                <a:latin typeface="AvenirNext LT Pro Medium"/>
-              </a:rPr>
-              <a:t>NEXT</a:t>
-            </a:r>
-          </a:p>
-        </p:txBody>
-      </p:sp>
-      <p:sp>
-        <p:nvSpPr>
-          <p:cNvPr id="12" name="TextBox 11"/>
-          <p:cNvSpPr txBox="1"/>
-          <p:nvPr/>
-        </p:nvSpPr>
-        <p:spPr>
-          <a:xfrm>
-            <a:off x="612648" y="4407408"/>
-            <a:ext cx="2487168" cy="365760"/>
-          </a:xfrm>
-          <a:prstGeom prst="rect">
-            <a:avLst/>
-          </a:prstGeom>
-          <a:noFill/>
-        </p:spPr>
-        <p:txBody>
-          <a:bodyPr wrap="square" anchor="t" lIns="0" rIns="0" tIns="0" bIns="0">
-            <a:spAutoFit/>
-          </a:bodyPr>
-          <a:lstStyle/>
-          <a:p>
-            <a:pPr>
-              <a:lnSpc>
-                <a:spcPct val="118000"/>
-              </a:lnSpc>
-              <a:spcBef>
-                <a:spcPts val="0"/>
-              </a:spcBef>
-              <a:spcAft>
-                <a:spcPts val="200"/>
-              </a:spcAft>
-            </a:pPr>
-            <a:r>
-              <a:rPr sz="730">
-                <a:solidFill>
-                  <a:srgbClr val="191919"/>
-                </a:solidFill>
-                <a:latin typeface="AvenirNext LT Pro Regular"/>
-              </a:rPr>
-              <a:t>Validation on our own tool data.</a:t>
-            </a:r>
-          </a:p>
-        </p:txBody>
-      </p:sp>
-      <p:sp>
-        <p:nvSpPr>
-          <p:cNvPr id="13" name="TextBox 12"/>
-          <p:cNvSpPr txBox="1"/>
-          <p:nvPr/>
-        </p:nvSpPr>
-        <p:spPr>
-          <a:xfrm>
-            <a:off x="3310128" y="1371600"/>
-            <a:ext cx="2487168" cy="457200"/>
-          </a:xfrm>
-          <a:prstGeom prst="rect">
-            <a:avLst/>
-          </a:prstGeom>
-          <a:noFill/>
-        </p:spPr>
-        <p:txBody>
-          <a:bodyPr wrap="square" anchor="t" lIns="0" rIns="0" tIns="0" bIns="0">
-            <a:spAutoFit/>
-          </a:bodyPr>
-          <a:lstStyle/>
-          <a:p>
-            <a:pPr>
-              <a:lnSpc>
-                <a:spcPct val="100000"/>
-              </a:lnSpc>
-              <a:spcBef>
-                <a:spcPts val="0"/>
-              </a:spcBef>
-              <a:spcAft>
-                <a:spcPts val="200"/>
-              </a:spcAft>
-            </a:pPr>
-            <a:r>
-              <a:rPr sz="2600">
-                <a:solidFill>
-                  <a:srgbClr val="191919"/>
-                </a:solidFill>
-                <a:latin typeface="AvenirNext LT Pro Light"/>
-              </a:rPr>
-              <a:t>02</a:t>
-            </a:r>
-          </a:p>
-        </p:txBody>
-      </p:sp>
-      <p:sp>
-        <p:nvSpPr>
-          <p:cNvPr id="14" name="TextBox 13"/>
-          <p:cNvSpPr txBox="1"/>
-          <p:nvPr/>
-        </p:nvSpPr>
-        <p:spPr>
-          <a:xfrm>
-            <a:off x="3310128" y="1920240"/>
-            <a:ext cx="2487168" cy="164592"/>
-          </a:xfrm>
-          <a:prstGeom prst="rect">
-            <a:avLst/>
-          </a:prstGeom>
-          <a:noFill/>
-        </p:spPr>
-        <p:txBody>
-          <a:bodyPr wrap="square" anchor="t" lIns="0" rIns="0" tIns="0" bIns="0">
-            <a:spAutoFit/>
-          </a:bodyPr>
-          <a:lstStyle/>
-          <a:p>
-            <a:pPr>
-              <a:lnSpc>
-                <a:spcPct val="120000"/>
-              </a:lnSpc>
-              <a:spcBef>
-                <a:spcPts val="0"/>
-              </a:spcBef>
-              <a:spcAft>
-                <a:spcPts val="200"/>
-              </a:spcAft>
-            </a:pPr>
-            <a:r>
-              <a:rPr sz="700" spc="60">
-                <a:solidFill>
-                  <a:srgbClr val="666666"/>
-                </a:solidFill>
-                <a:latin typeface="AvenirNext LT Pro Medium"/>
-              </a:rPr>
-              <a:t>SENSING AND CONTROL</a:t>
-            </a:r>
-          </a:p>
-        </p:txBody>
-      </p:sp>
-      <p:sp>
-        <p:nvSpPr>
-          <p:cNvPr id="15" name="TextBox 14"/>
-          <p:cNvSpPr txBox="1"/>
-          <p:nvPr/>
-        </p:nvSpPr>
-        <p:spPr>
-          <a:xfrm>
-            <a:off x="3310128" y="2121408"/>
-            <a:ext cx="2487168" cy="237744"/>
-          </a:xfrm>
-          <a:prstGeom prst="rect">
-            <a:avLst/>
-          </a:prstGeom>
-          <a:noFill/>
-        </p:spPr>
-        <p:txBody>
-          <a:bodyPr wrap="square" anchor="t" lIns="0" rIns="0" tIns="0" bIns="0">
-            <a:spAutoFit/>
-          </a:bodyPr>
-          <a:lstStyle/>
-          <a:p>
-            <a:pPr>
-              <a:lnSpc>
-                <a:spcPct val="120000"/>
-              </a:lnSpc>
-              <a:spcBef>
-                <a:spcPts val="0"/>
-              </a:spcBef>
-              <a:spcAft>
-                <a:spcPts val="200"/>
-              </a:spcAft>
-            </a:pPr>
-            <a:r>
-              <a:rPr sz="1050">
-                <a:solidFill>
-                  <a:srgbClr val="191919"/>
-                </a:solidFill>
-                <a:latin typeface="AvenirNext LT Pro Medium"/>
-              </a:rPr>
-              <a:t>RHEED Analysis</a:t>
-            </a:r>
-          </a:p>
-        </p:txBody>
-      </p:sp>
-      <p:sp>
-        <p:nvSpPr>
-          <p:cNvPr id="16" name="TextBox 15"/>
-          <p:cNvSpPr txBox="1"/>
-          <p:nvPr/>
-        </p:nvSpPr>
-        <p:spPr>
-          <a:xfrm>
-            <a:off x="3310128" y="2414016"/>
-            <a:ext cx="2487168" cy="868680"/>
-          </a:xfrm>
-          <a:prstGeom prst="rect">
-            <a:avLst/>
-          </a:prstGeom>
-          <a:noFill/>
-        </p:spPr>
-        <p:txBody>
-          <a:bodyPr wrap="square" anchor="t" lIns="0" rIns="0" tIns="0" bIns="0">
-            <a:spAutoFit/>
-          </a:bodyPr>
-          <a:lstStyle/>
-          <a:p>
-            <a:pPr>
-              <a:lnSpc>
-                <a:spcPct val="122000"/>
-              </a:lnSpc>
-              <a:spcBef>
-                <a:spcPts val="0"/>
-              </a:spcBef>
-              <a:spcAft>
-                <a:spcPts val="200"/>
-              </a:spcAft>
-            </a:pPr>
-            <a:r>
-              <a:rPr sz="750">
-                <a:solidFill>
-                  <a:srgbClr val="191919"/>
-                </a:solidFill>
-                <a:latin typeface="AvenirNext LT Pro Regular"/>
-              </a:rPr>
-              <a:t>A CNN + ViT computer-vision pipeline for in-situ image analysis and monitoring: finds transition points and anomalies; an LLM co-pilot interprets and suggests actions.</a:t>
-            </a:r>
-          </a:p>
-        </p:txBody>
-      </p:sp>
-      <p:sp>
-        <p:nvSpPr>
-          <p:cNvPr id="17" name="Rectangle 16"/>
+          <p:cNvPr id="5" name="Oval 4"/>
           <p:cNvSpPr/>
           <p:nvPr/>
         </p:nvSpPr>
         <p:spPr>
           <a:xfrm>
-            <a:off x="3310128" y="3401568"/>
-            <a:ext cx="2487168" cy="11430"/>
-          </a:xfrm>
-          <a:prstGeom prst="rect">
+            <a:off x="758952" y="1517904"/>
+            <a:ext cx="310896" cy="310896"/>
+          </a:xfrm>
+          <a:prstGeom prst="ellipse">
             <a:avLst/>
           </a:prstGeom>
           <a:solidFill>
@@ -23960,23 +24026,32 @@
           </a:fontRef>
         </p:style>
         <p:txBody>
-          <a:bodyPr rtlCol="0" anchor="ctr"/>
+          <a:bodyPr rtlCol="0" anchor="ctr" lIns="0" rIns="0" tIns="0" bIns="0" wrap="none"/>
           <a:lstStyle/>
           <a:p>
             <a:pPr algn="ctr"/>
-          </a:p>
-        </p:txBody>
-      </p:sp>
-      <p:sp>
-        <p:nvSpPr>
-          <p:cNvPr id="18" name="TextBox 17"/>
+            <a:r>
+              <a:rPr sz="900">
+                <a:solidFill>
+                  <a:srgbClr val="FFFFFF"/>
+                </a:solidFill>
+                <a:latin typeface="AvenirNext LT Pro Medium"/>
+              </a:rPr>
+              <a:t>01</a:t>
+            </a:r>
+          </a:p>
+        </p:txBody>
+      </p:sp>
+      <p:sp>
+        <p:nvSpPr>
+          <p:cNvPr id="6" name="TextBox 5"/>
           <p:cNvSpPr txBox="1"/>
           <p:nvPr/>
         </p:nvSpPr>
         <p:spPr>
           <a:xfrm>
-            <a:off x="3310128" y="3474720"/>
-            <a:ext cx="2487168" cy="164592"/>
+            <a:off x="1179576" y="1554480"/>
+            <a:ext cx="1856232" cy="164592"/>
           </a:xfrm>
           <a:prstGeom prst="rect">
             <a:avLst/>
@@ -23993,35 +24068,32 @@
               <a:lnSpc>
                 <a:spcPct val="120000"/>
               </a:lnSpc>
-              <a:spcBef>
-                <a:spcPts val="0"/>
-              </a:spcBef>
               <a:spcAft>
                 <a:spcPts val="200"/>
               </a:spcAft>
             </a:pPr>
             <a:r>
-              <a:rPr sz="700" spc="60">
-                <a:solidFill>
-                  <a:srgbClr val="00B388"/>
+              <a:rPr sz="680" spc="60">
+                <a:solidFill>
+                  <a:srgbClr val="666666"/>
                 </a:solidFill>
                 <a:latin typeface="AvenirNext LT Pro Medium"/>
               </a:rPr>
-              <a:t>VERIFIED</a:t>
-            </a:r>
-          </a:p>
-        </p:txBody>
-      </p:sp>
-      <p:sp>
-        <p:nvSpPr>
-          <p:cNvPr id="19" name="TextBox 18"/>
+              <a:t>DATA MODEL</a:t>
+            </a:r>
+          </a:p>
+        </p:txBody>
+      </p:sp>
+      <p:sp>
+        <p:nvSpPr>
+          <p:cNvPr id="7" name="TextBox 6"/>
           <p:cNvSpPr txBox="1"/>
           <p:nvPr/>
         </p:nvSpPr>
         <p:spPr>
           <a:xfrm>
-            <a:off x="3310128" y="3657600"/>
-            <a:ext cx="2487168" cy="502920"/>
+            <a:off x="1179576" y="1737360"/>
+            <a:ext cx="1856232" cy="219456"/>
           </a:xfrm>
           <a:prstGeom prst="rect">
             <a:avLst/>
@@ -24036,37 +24108,34 @@
           <a:p>
             <a:pPr>
               <a:lnSpc>
-                <a:spcPct val="118000"/>
+                <a:spcPct val="120000"/>
               </a:lnSpc>
-              <a:spcBef>
-                <a:spcPts val="0"/>
-              </a:spcBef>
               <a:spcAft>
                 <a:spcPts val="200"/>
               </a:spcAft>
             </a:pPr>
             <a:r>
-              <a:rPr sz="730">
+              <a:rPr sz="950">
                 <a:solidFill>
                   <a:srgbClr val="191919"/>
                 </a:solidFill>
-                <a:latin typeface="AvenirNext LT Pro Regular"/>
+                <a:latin typeface="AvenirNext LT Pro Medium"/>
               </a:rPr>
-              <a:t>Runs end-to-end on two sets of real TiO2 RHEED data; fault-injection evaluation quantifies latency, attribution and false alarms.</a:t>
-            </a:r>
-          </a:p>
-        </p:txBody>
-      </p:sp>
-      <p:sp>
-        <p:nvSpPr>
-          <p:cNvPr id="20" name="TextBox 19"/>
+              <a:t>Recipe-Inverse Generator (RIG)</a:t>
+            </a:r>
+          </a:p>
+        </p:txBody>
+      </p:sp>
+      <p:sp>
+        <p:nvSpPr>
+          <p:cNvPr id="8" name="TextBox 7"/>
           <p:cNvSpPr txBox="1"/>
           <p:nvPr/>
         </p:nvSpPr>
         <p:spPr>
           <a:xfrm>
-            <a:off x="3310128" y="4224528"/>
-            <a:ext cx="2487168" cy="164592"/>
+            <a:off x="758952" y="2157984"/>
+            <a:ext cx="2258568" cy="868680"/>
           </a:xfrm>
           <a:prstGeom prst="rect">
             <a:avLst/>
@@ -24083,266 +24152,40 @@
               <a:lnSpc>
                 <a:spcPct val="120000"/>
               </a:lnSpc>
-              <a:spcBef>
-                <a:spcPts val="0"/>
-              </a:spcBef>
               <a:spcAft>
                 <a:spcPts val="200"/>
               </a:spcAft>
             </a:pPr>
             <a:r>
-              <a:rPr sz="700" spc="60">
-                <a:solidFill>
-                  <a:srgbClr val="00B388"/>
-                </a:solidFill>
-                <a:latin typeface="AvenirNext LT Pro Medium"/>
-              </a:rPr>
-              <a:t>NEXT</a:t>
-            </a:r>
-          </a:p>
-        </p:txBody>
-      </p:sp>
-      <p:sp>
-        <p:nvSpPr>
-          <p:cNvPr id="21" name="TextBox 20"/>
-          <p:cNvSpPr txBox="1"/>
-          <p:nvPr/>
-        </p:nvSpPr>
-        <p:spPr>
-          <a:xfrm>
-            <a:off x="3310128" y="4407408"/>
-            <a:ext cx="2487168" cy="365760"/>
-          </a:xfrm>
-          <a:prstGeom prst="rect">
-            <a:avLst/>
-          </a:prstGeom>
-          <a:noFill/>
-        </p:spPr>
-        <p:txBody>
-          <a:bodyPr wrap="square" anchor="t" lIns="0" rIns="0" tIns="0" bIns="0">
-            <a:spAutoFit/>
-          </a:bodyPr>
-          <a:lstStyle/>
-          <a:p>
-            <a:pPr>
-              <a:lnSpc>
-                <a:spcPct val="118000"/>
-              </a:lnSpc>
-              <a:spcBef>
-                <a:spcPts val="0"/>
-              </a:spcBef>
-              <a:spcAft>
-                <a:spcPts val="200"/>
-              </a:spcAft>
-            </a:pPr>
-            <a:r>
-              <a:rPr sz="730">
+              <a:rPr sz="740">
                 <a:solidFill>
                   <a:srgbClr val="191919"/>
                 </a:solidFill>
                 <a:latin typeface="AvenirNext LT Pro Regular"/>
               </a:rPr>
-              <a:t>GaN RHEED validation + tool validation.</a:t>
-            </a:r>
-          </a:p>
-        </p:txBody>
-      </p:sp>
-      <p:sp>
-        <p:nvSpPr>
-          <p:cNvPr id="22" name="TextBox 21"/>
-          <p:cNvSpPr txBox="1"/>
-          <p:nvPr/>
-        </p:nvSpPr>
-        <p:spPr>
-          <a:xfrm>
-            <a:off x="6007608" y="1371600"/>
-            <a:ext cx="2487168" cy="457200"/>
-          </a:xfrm>
-          <a:prstGeom prst="rect">
-            <a:avLst/>
-          </a:prstGeom>
-          <a:noFill/>
-        </p:spPr>
-        <p:txBody>
-          <a:bodyPr wrap="square" anchor="t" lIns="0" rIns="0" tIns="0" bIns="0">
-            <a:spAutoFit/>
-          </a:bodyPr>
-          <a:lstStyle/>
-          <a:p>
-            <a:pPr>
-              <a:lnSpc>
-                <a:spcPct val="100000"/>
-              </a:lnSpc>
-              <a:spcBef>
-                <a:spcPts val="0"/>
-              </a:spcBef>
-              <a:spcAft>
-                <a:spcPts val="200"/>
-              </a:spcAft>
-            </a:pPr>
-            <a:r>
-              <a:rPr sz="2600">
-                <a:solidFill>
-                  <a:srgbClr val="191919"/>
-                </a:solidFill>
-                <a:latin typeface="AvenirNext LT Pro Light"/>
-              </a:rPr>
-              <a:t>03</a:t>
-            </a:r>
-          </a:p>
-        </p:txBody>
-      </p:sp>
-      <p:sp>
-        <p:nvSpPr>
-          <p:cNvPr id="23" name="TextBox 22"/>
-          <p:cNvSpPr txBox="1"/>
-          <p:nvPr/>
-        </p:nvSpPr>
-        <p:spPr>
-          <a:xfrm>
-            <a:off x="6007608" y="1920240"/>
-            <a:ext cx="2487168" cy="164592"/>
-          </a:xfrm>
-          <a:prstGeom prst="rect">
-            <a:avLst/>
-          </a:prstGeom>
-          <a:noFill/>
-        </p:spPr>
-        <p:txBody>
-          <a:bodyPr wrap="square" anchor="t" lIns="0" rIns="0" tIns="0" bIns="0">
-            <a:spAutoFit/>
-          </a:bodyPr>
-          <a:lstStyle/>
-          <a:p>
-            <a:pPr>
-              <a:lnSpc>
-                <a:spcPct val="120000"/>
-              </a:lnSpc>
-              <a:spcBef>
-                <a:spcPts val="0"/>
-              </a:spcBef>
-              <a:spcAft>
-                <a:spcPts val="200"/>
-              </a:spcAft>
-            </a:pPr>
-            <a:r>
-              <a:rPr sz="700" spc="60">
-                <a:solidFill>
-                  <a:srgbClr val="666666"/>
-                </a:solidFill>
-                <a:latin typeface="AvenirNext LT Pro Medium"/>
-              </a:rPr>
-              <a:t>PHYSICAL SIMULATION</a:t>
-            </a:r>
-          </a:p>
-        </p:txBody>
-      </p:sp>
-      <p:sp>
-        <p:nvSpPr>
-          <p:cNvPr id="24" name="TextBox 23"/>
-          <p:cNvSpPr txBox="1"/>
-          <p:nvPr/>
-        </p:nvSpPr>
-        <p:spPr>
-          <a:xfrm>
-            <a:off x="6007608" y="2121408"/>
-            <a:ext cx="2487168" cy="237744"/>
-          </a:xfrm>
-          <a:prstGeom prst="rect">
-            <a:avLst/>
-          </a:prstGeom>
-          <a:noFill/>
-        </p:spPr>
-        <p:txBody>
-          <a:bodyPr wrap="square" anchor="t" lIns="0" rIns="0" tIns="0" bIns="0">
-            <a:spAutoFit/>
-          </a:bodyPr>
-          <a:lstStyle/>
-          <a:p>
-            <a:pPr>
-              <a:lnSpc>
-                <a:spcPct val="120000"/>
-              </a:lnSpc>
-              <a:spcBef>
-                <a:spcPts val="0"/>
-              </a:spcBef>
-              <a:spcAft>
-                <a:spcPts val="200"/>
-              </a:spcAft>
-            </a:pPr>
-            <a:r>
-              <a:rPr sz="1050">
-                <a:solidFill>
-                  <a:srgbClr val="191919"/>
-                </a:solidFill>
-                <a:latin typeface="AvenirNext LT Pro Medium"/>
-              </a:rPr>
-              <a:t>MBE Simulation</a:t>
-            </a:r>
-          </a:p>
-        </p:txBody>
-      </p:sp>
-      <p:sp>
-        <p:nvSpPr>
-          <p:cNvPr id="25" name="TextBox 24"/>
-          <p:cNvSpPr txBox="1"/>
-          <p:nvPr/>
-        </p:nvSpPr>
-        <p:spPr>
-          <a:xfrm>
-            <a:off x="6007608" y="2414016"/>
-            <a:ext cx="2487168" cy="868680"/>
-          </a:xfrm>
-          <a:prstGeom prst="rect">
-            <a:avLst/>
-          </a:prstGeom>
-          <a:noFill/>
-        </p:spPr>
-        <p:txBody>
-          <a:bodyPr wrap="square" anchor="t" lIns="0" rIns="0" tIns="0" bIns="0">
-            <a:spAutoFit/>
-          </a:bodyPr>
-          <a:lstStyle/>
-          <a:p>
-            <a:pPr>
-              <a:lnSpc>
-                <a:spcPct val="122000"/>
-              </a:lnSpc>
-              <a:spcBef>
-                <a:spcPts val="0"/>
-              </a:spcBef>
-              <a:spcAft>
-                <a:spcPts val="200"/>
-              </a:spcAft>
-            </a:pPr>
-            <a:r>
-              <a:rPr sz="750">
-                <a:solidFill>
-                  <a:srgbClr val="191919"/>
-                </a:solidFill>
-                <a:latin typeface="AvenirNext LT Pro Regular"/>
-              </a:rPr>
-              <a:t>A physics-based simulation model of the MBE chamber: flux geometry, surface kinetics, thermal model and a live machine model.</a:t>
-            </a:r>
-          </a:p>
-        </p:txBody>
-      </p:sp>
-      <p:sp>
-        <p:nvSpPr>
-          <p:cNvPr id="26" name="Rectangle 25"/>
+              <a:t>A forward model from recipe to result plus an inverse solver that back-calculates candidate recipes to meet a requirement — with calibrated uncertainty and honest refusal (INFEASIBLE + diagnosis).</a:t>
+            </a:r>
+          </a:p>
+        </p:txBody>
+      </p:sp>
+      <p:sp>
+        <p:nvSpPr>
+          <p:cNvPr id="9" name="Rounded Rectangle 8"/>
           <p:cNvSpPr/>
           <p:nvPr/>
         </p:nvSpPr>
         <p:spPr>
           <a:xfrm>
-            <a:off x="6007608" y="3401568"/>
-            <a:ext cx="2487168" cy="11430"/>
-          </a:xfrm>
-          <a:prstGeom prst="rect">
-            <a:avLst/>
+            <a:off x="758952" y="3090672"/>
+            <a:ext cx="749808" cy="192024"/>
+          </a:xfrm>
+          <a:prstGeom prst="roundRect">
+            <a:avLst>
+              <a:gd name="adj" fmla="val 50000"/>
+            </a:avLst>
           </a:prstGeom>
           <a:solidFill>
-            <a:srgbClr val="00B388"/>
+            <a:srgbClr val="FFFFFF"/>
           </a:solidFill>
           <a:ln>
             <a:noFill/>
@@ -24373,14 +24216,14 @@
       </p:sp>
       <p:sp>
         <p:nvSpPr>
-          <p:cNvPr id="27" name="TextBox 26"/>
+          <p:cNvPr id="10" name="TextBox 9"/>
           <p:cNvSpPr txBox="1"/>
           <p:nvPr/>
         </p:nvSpPr>
         <p:spPr>
           <a:xfrm>
-            <a:off x="6007608" y="3474720"/>
-            <a:ext cx="2487168" cy="164592"/>
+            <a:off x="758952" y="3122676"/>
+            <a:ext cx="749808" cy="146304"/>
           </a:xfrm>
           <a:prstGeom prst="rect">
             <a:avLst/>
@@ -24393,39 +24236,349 @@
           </a:bodyPr>
           <a:lstStyle/>
           <a:p>
+            <a:pPr algn="ctr">
+              <a:lnSpc>
+                <a:spcPct val="120000"/>
+              </a:lnSpc>
+              <a:spcAft>
+                <a:spcPts val="200"/>
+              </a:spcAft>
+            </a:pPr>
+            <a:r>
+              <a:rPr sz="680" spc="50">
+                <a:solidFill>
+                  <a:srgbClr val="00B388"/>
+                </a:solidFill>
+                <a:latin typeface="AvenirNext LT Pro Medium"/>
+              </a:rPr>
+              <a:t>VERIFIED</a:t>
+            </a:r>
+          </a:p>
+        </p:txBody>
+      </p:sp>
+      <p:sp>
+        <p:nvSpPr>
+          <p:cNvPr id="11" name="TextBox 10"/>
+          <p:cNvSpPr txBox="1"/>
+          <p:nvPr/>
+        </p:nvSpPr>
+        <p:spPr>
+          <a:xfrm>
+            <a:off x="758952" y="3346704"/>
+            <a:ext cx="2258568" cy="502920"/>
+          </a:xfrm>
+          <a:prstGeom prst="rect">
+            <a:avLst/>
+          </a:prstGeom>
+          <a:noFill/>
+        </p:spPr>
+        <p:txBody>
+          <a:bodyPr wrap="square" anchor="t" lIns="0" rIns="0" tIns="0" bIns="0">
+            <a:spAutoFit/>
+          </a:bodyPr>
+          <a:lstStyle/>
+          <a:p>
+            <a:pPr>
+              <a:lnSpc>
+                <a:spcPct val="118000"/>
+              </a:lnSpc>
+              <a:spcAft>
+                <a:spcPts val="200"/>
+              </a:spcAft>
+            </a:pPr>
+            <a:r>
+              <a:rPr sz="720">
+                <a:solidFill>
+                  <a:srgbClr val="191919"/>
+                </a:solidFill>
+                <a:latin typeface="AvenirNext LT Pro Regular"/>
+              </a:rPr>
+              <a:t>Passed calibration acceptance on Empa's real magnetron-sputtering HiPIMS (PVD) dataset.</a:t>
+            </a:r>
+          </a:p>
+        </p:txBody>
+      </p:sp>
+      <p:sp>
+        <p:nvSpPr>
+          <p:cNvPr id="12" name="Rounded Rectangle 11"/>
+          <p:cNvSpPr/>
+          <p:nvPr/>
+        </p:nvSpPr>
+        <p:spPr>
+          <a:xfrm>
+            <a:off x="758952" y="3913632"/>
+            <a:ext cx="566928" cy="192024"/>
+          </a:xfrm>
+          <a:prstGeom prst="roundRect">
+            <a:avLst>
+              <a:gd name="adj" fmla="val 50000"/>
+            </a:avLst>
+          </a:prstGeom>
+          <a:solidFill>
+            <a:srgbClr val="FFFFFF"/>
+          </a:solidFill>
+          <a:ln>
+            <a:noFill/>
+          </a:ln>
+          <a:effectLst/>
+        </p:spPr>
+        <p:style>
+          <a:lnRef idx="1">
+            <a:schemeClr val="accent1"/>
+          </a:lnRef>
+          <a:fillRef idx="3">
+            <a:schemeClr val="accent1"/>
+          </a:fillRef>
+          <a:effectRef idx="2">
+            <a:schemeClr val="accent1"/>
+          </a:effectRef>
+          <a:fontRef idx="minor">
+            <a:schemeClr val="lt1"/>
+          </a:fontRef>
+        </p:style>
+        <p:txBody>
+          <a:bodyPr rtlCol="0" anchor="ctr"/>
+          <a:lstStyle/>
+          <a:p>
+            <a:pPr algn="ctr"/>
+          </a:p>
+        </p:txBody>
+      </p:sp>
+      <p:sp>
+        <p:nvSpPr>
+          <p:cNvPr id="13" name="TextBox 12"/>
+          <p:cNvSpPr txBox="1"/>
+          <p:nvPr/>
+        </p:nvSpPr>
+        <p:spPr>
+          <a:xfrm>
+            <a:off x="758952" y="3945636"/>
+            <a:ext cx="566928" cy="146304"/>
+          </a:xfrm>
+          <a:prstGeom prst="rect">
+            <a:avLst/>
+          </a:prstGeom>
+          <a:noFill/>
+        </p:spPr>
+        <p:txBody>
+          <a:bodyPr wrap="square" anchor="t" lIns="0" rIns="0" tIns="0" bIns="0">
+            <a:spAutoFit/>
+          </a:bodyPr>
+          <a:lstStyle/>
+          <a:p>
+            <a:pPr algn="ctr">
+              <a:lnSpc>
+                <a:spcPct val="120000"/>
+              </a:lnSpc>
+              <a:spcAft>
+                <a:spcPts val="200"/>
+              </a:spcAft>
+            </a:pPr>
+            <a:r>
+              <a:rPr sz="680" spc="50">
+                <a:solidFill>
+                  <a:srgbClr val="00B388"/>
+                </a:solidFill>
+                <a:latin typeface="AvenirNext LT Pro Medium"/>
+              </a:rPr>
+              <a:t>NEXT</a:t>
+            </a:r>
+          </a:p>
+        </p:txBody>
+      </p:sp>
+      <p:sp>
+        <p:nvSpPr>
+          <p:cNvPr id="14" name="TextBox 13"/>
+          <p:cNvSpPr txBox="1"/>
+          <p:nvPr/>
+        </p:nvSpPr>
+        <p:spPr>
+          <a:xfrm>
+            <a:off x="758952" y="4169663"/>
+            <a:ext cx="2258568" cy="384048"/>
+          </a:xfrm>
+          <a:prstGeom prst="rect">
+            <a:avLst/>
+          </a:prstGeom>
+          <a:noFill/>
+        </p:spPr>
+        <p:txBody>
+          <a:bodyPr wrap="square" anchor="t" lIns="0" rIns="0" tIns="0" bIns="0">
+            <a:spAutoFit/>
+          </a:bodyPr>
+          <a:lstStyle/>
+          <a:p>
+            <a:pPr>
+              <a:lnSpc>
+                <a:spcPct val="118000"/>
+              </a:lnSpc>
+              <a:spcAft>
+                <a:spcPts val="200"/>
+              </a:spcAft>
+            </a:pPr>
+            <a:r>
+              <a:rPr sz="720">
+                <a:solidFill>
+                  <a:srgbClr val="191919"/>
+                </a:solidFill>
+                <a:latin typeface="AvenirNext LT Pro Regular"/>
+              </a:rPr>
+              <a:t>Validation on our own tool data.</a:t>
+            </a:r>
+          </a:p>
+        </p:txBody>
+      </p:sp>
+      <p:sp>
+        <p:nvSpPr>
+          <p:cNvPr id="15" name="Rounded Rectangle 14"/>
+          <p:cNvSpPr/>
+          <p:nvPr/>
+        </p:nvSpPr>
+        <p:spPr>
+          <a:xfrm>
+            <a:off x="3310128" y="1371600"/>
+            <a:ext cx="2551176" cy="3246120"/>
+          </a:xfrm>
+          <a:prstGeom prst="roundRect">
+            <a:avLst>
+              <a:gd name="adj" fmla="val 6000"/>
+            </a:avLst>
+          </a:prstGeom>
+          <a:solidFill>
+            <a:srgbClr val="F5F5F5"/>
+          </a:solidFill>
+          <a:ln>
+            <a:noFill/>
+          </a:ln>
+          <a:effectLst/>
+        </p:spPr>
+        <p:style>
+          <a:lnRef idx="1">
+            <a:schemeClr val="accent1"/>
+          </a:lnRef>
+          <a:fillRef idx="3">
+            <a:schemeClr val="accent1"/>
+          </a:fillRef>
+          <a:effectRef idx="2">
+            <a:schemeClr val="accent1"/>
+          </a:effectRef>
+          <a:fontRef idx="minor">
+            <a:schemeClr val="lt1"/>
+          </a:fontRef>
+        </p:style>
+        <p:txBody>
+          <a:bodyPr rtlCol="0" anchor="ctr"/>
+          <a:lstStyle/>
+          <a:p>
+            <a:pPr algn="ctr"/>
+          </a:p>
+        </p:txBody>
+      </p:sp>
+      <p:sp>
+        <p:nvSpPr>
+          <p:cNvPr id="16" name="Oval 15"/>
+          <p:cNvSpPr/>
+          <p:nvPr/>
+        </p:nvSpPr>
+        <p:spPr>
+          <a:xfrm>
+            <a:off x="3456432" y="1517904"/>
+            <a:ext cx="310896" cy="310896"/>
+          </a:xfrm>
+          <a:prstGeom prst="ellipse">
+            <a:avLst/>
+          </a:prstGeom>
+          <a:solidFill>
+            <a:srgbClr val="00B388"/>
+          </a:solidFill>
+          <a:ln>
+            <a:noFill/>
+          </a:ln>
+          <a:effectLst/>
+        </p:spPr>
+        <p:style>
+          <a:lnRef idx="1">
+            <a:schemeClr val="accent1"/>
+          </a:lnRef>
+          <a:fillRef idx="3">
+            <a:schemeClr val="accent1"/>
+          </a:fillRef>
+          <a:effectRef idx="2">
+            <a:schemeClr val="accent1"/>
+          </a:effectRef>
+          <a:fontRef idx="minor">
+            <a:schemeClr val="lt1"/>
+          </a:fontRef>
+        </p:style>
+        <p:txBody>
+          <a:bodyPr rtlCol="0" anchor="ctr" lIns="0" rIns="0" tIns="0" bIns="0" wrap="none"/>
+          <a:lstStyle/>
+          <a:p>
+            <a:pPr algn="ctr"/>
+            <a:r>
+              <a:rPr sz="900">
+                <a:solidFill>
+                  <a:srgbClr val="FFFFFF"/>
+                </a:solidFill>
+                <a:latin typeface="AvenirNext LT Pro Medium"/>
+              </a:rPr>
+              <a:t>02</a:t>
+            </a:r>
+          </a:p>
+        </p:txBody>
+      </p:sp>
+      <p:sp>
+        <p:nvSpPr>
+          <p:cNvPr id="17" name="TextBox 16"/>
+          <p:cNvSpPr txBox="1"/>
+          <p:nvPr/>
+        </p:nvSpPr>
+        <p:spPr>
+          <a:xfrm>
+            <a:off x="3877056" y="1554480"/>
+            <a:ext cx="1856232" cy="164592"/>
+          </a:xfrm>
+          <a:prstGeom prst="rect">
+            <a:avLst/>
+          </a:prstGeom>
+          <a:noFill/>
+        </p:spPr>
+        <p:txBody>
+          <a:bodyPr wrap="square" anchor="t" lIns="0" rIns="0" tIns="0" bIns="0">
+            <a:spAutoFit/>
+          </a:bodyPr>
+          <a:lstStyle/>
+          <a:p>
             <a:pPr>
               <a:lnSpc>
                 <a:spcPct val="120000"/>
               </a:lnSpc>
-              <a:spcBef>
-                <a:spcPts val="0"/>
-              </a:spcBef>
               <a:spcAft>
                 <a:spcPts val="200"/>
               </a:spcAft>
             </a:pPr>
             <a:r>
-              <a:rPr sz="700" spc="60">
-                <a:solidFill>
-                  <a:srgbClr val="00B388"/>
+              <a:rPr sz="680" spc="60">
+                <a:solidFill>
+                  <a:srgbClr val="666666"/>
                 </a:solidFill>
                 <a:latin typeface="AvenirNext LT Pro Medium"/>
               </a:rPr>
-              <a:t>VERIFIED</a:t>
-            </a:r>
-          </a:p>
-        </p:txBody>
-      </p:sp>
-      <p:sp>
-        <p:nvSpPr>
-          <p:cNvPr id="28" name="TextBox 27"/>
+              <a:t>SENSING AND CONTROL</a:t>
+            </a:r>
+          </a:p>
+        </p:txBody>
+      </p:sp>
+      <p:sp>
+        <p:nvSpPr>
+          <p:cNvPr id="18" name="TextBox 17"/>
           <p:cNvSpPr txBox="1"/>
           <p:nvPr/>
         </p:nvSpPr>
         <p:spPr>
           <a:xfrm>
-            <a:off x="6007608" y="3657600"/>
-            <a:ext cx="2487168" cy="502920"/>
+            <a:off x="3877056" y="1737360"/>
+            <a:ext cx="1856232" cy="219456"/>
           </a:xfrm>
           <a:prstGeom prst="rect">
             <a:avLst/>
@@ -24440,37 +24593,34 @@
           <a:p>
             <a:pPr>
               <a:lnSpc>
-                <a:spcPct val="118000"/>
+                <a:spcPct val="120000"/>
               </a:lnSpc>
-              <a:spcBef>
-                <a:spcPts val="0"/>
-              </a:spcBef>
               <a:spcAft>
                 <a:spcPts val="200"/>
               </a:spcAft>
             </a:pPr>
             <a:r>
-              <a:rPr sz="730">
+              <a:rPr sz="950">
                 <a:solidFill>
                   <a:srgbClr val="191919"/>
                 </a:solidFill>
-                <a:latin typeface="AvenirNext LT Pro Regular"/>
+                <a:latin typeface="AvenirNext LT Pro Medium"/>
               </a:rPr>
-              <a:t>Underlying physics built out and refined (literature-anchored calibration).</a:t>
-            </a:r>
-          </a:p>
-        </p:txBody>
-      </p:sp>
-      <p:sp>
-        <p:nvSpPr>
-          <p:cNvPr id="29" name="TextBox 28"/>
+              <a:t>RHEED Analysis</a:t>
+            </a:r>
+          </a:p>
+        </p:txBody>
+      </p:sp>
+      <p:sp>
+        <p:nvSpPr>
+          <p:cNvPr id="19" name="TextBox 18"/>
           <p:cNvSpPr txBox="1"/>
           <p:nvPr/>
         </p:nvSpPr>
         <p:spPr>
           <a:xfrm>
-            <a:off x="6007608" y="4224528"/>
-            <a:ext cx="2487168" cy="164592"/>
+            <a:off x="3456432" y="2157984"/>
+            <a:ext cx="2258568" cy="868680"/>
           </a:xfrm>
           <a:prstGeom prst="rect">
             <a:avLst/>
@@ -24487,35 +24637,78 @@
               <a:lnSpc>
                 <a:spcPct val="120000"/>
               </a:lnSpc>
-              <a:spcBef>
-                <a:spcPts val="0"/>
-              </a:spcBef>
               <a:spcAft>
                 <a:spcPts val="200"/>
               </a:spcAft>
             </a:pPr>
             <a:r>
-              <a:rPr sz="700" spc="60">
-                <a:solidFill>
-                  <a:srgbClr val="00B388"/>
-                </a:solidFill>
-                <a:latin typeface="AvenirNext LT Pro Medium"/>
+              <a:rPr sz="740">
+                <a:solidFill>
+                  <a:srgbClr val="191919"/>
+                </a:solidFill>
+                <a:latin typeface="AvenirNext LT Pro Regular"/>
               </a:rPr>
-              <a:t>NEXT</a:t>
-            </a:r>
-          </a:p>
-        </p:txBody>
-      </p:sp>
-      <p:sp>
-        <p:nvSpPr>
-          <p:cNvPr id="30" name="TextBox 29"/>
+              <a:t>A CNN + ViT computer-vision pipeline for in-situ image analysis and monitoring: finds transition points and anomalies; an LLM co-pilot interprets and suggests actions.</a:t>
+            </a:r>
+          </a:p>
+        </p:txBody>
+      </p:sp>
+      <p:sp>
+        <p:nvSpPr>
+          <p:cNvPr id="20" name="Rounded Rectangle 19"/>
+          <p:cNvSpPr/>
+          <p:nvPr/>
+        </p:nvSpPr>
+        <p:spPr>
+          <a:xfrm>
+            <a:off x="3456432" y="3090672"/>
+            <a:ext cx="749808" cy="192024"/>
+          </a:xfrm>
+          <a:prstGeom prst="roundRect">
+            <a:avLst>
+              <a:gd name="adj" fmla="val 50000"/>
+            </a:avLst>
+          </a:prstGeom>
+          <a:solidFill>
+            <a:srgbClr val="FFFFFF"/>
+          </a:solidFill>
+          <a:ln>
+            <a:noFill/>
+          </a:ln>
+          <a:effectLst/>
+        </p:spPr>
+        <p:style>
+          <a:lnRef idx="1">
+            <a:schemeClr val="accent1"/>
+          </a:lnRef>
+          <a:fillRef idx="3">
+            <a:schemeClr val="accent1"/>
+          </a:fillRef>
+          <a:effectRef idx="2">
+            <a:schemeClr val="accent1"/>
+          </a:effectRef>
+          <a:fontRef idx="minor">
+            <a:schemeClr val="lt1"/>
+          </a:fontRef>
+        </p:style>
+        <p:txBody>
+          <a:bodyPr rtlCol="0" anchor="ctr"/>
+          <a:lstStyle/>
+          <a:p>
+            <a:pPr algn="ctr"/>
+          </a:p>
+        </p:txBody>
+      </p:sp>
+      <p:sp>
+        <p:nvSpPr>
+          <p:cNvPr id="21" name="TextBox 20"/>
           <p:cNvSpPr txBox="1"/>
           <p:nvPr/>
         </p:nvSpPr>
         <p:spPr>
           <a:xfrm>
-            <a:off x="6007608" y="4407408"/>
-            <a:ext cx="2487168" cy="365760"/>
+            <a:off x="3456432" y="3122676"/>
+            <a:ext cx="749808" cy="146304"/>
           </a:xfrm>
           <a:prstGeom prst="rect">
             <a:avLst/>
@@ -24528,19 +24721,673 @@
           </a:bodyPr>
           <a:lstStyle/>
           <a:p>
+            <a:pPr algn="ctr">
+              <a:lnSpc>
+                <a:spcPct val="120000"/>
+              </a:lnSpc>
+              <a:spcAft>
+                <a:spcPts val="200"/>
+              </a:spcAft>
+            </a:pPr>
+            <a:r>
+              <a:rPr sz="680" spc="50">
+                <a:solidFill>
+                  <a:srgbClr val="00B388"/>
+                </a:solidFill>
+                <a:latin typeface="AvenirNext LT Pro Medium"/>
+              </a:rPr>
+              <a:t>VERIFIED</a:t>
+            </a:r>
+          </a:p>
+        </p:txBody>
+      </p:sp>
+      <p:sp>
+        <p:nvSpPr>
+          <p:cNvPr id="22" name="TextBox 21"/>
+          <p:cNvSpPr txBox="1"/>
+          <p:nvPr/>
+        </p:nvSpPr>
+        <p:spPr>
+          <a:xfrm>
+            <a:off x="3456432" y="3346704"/>
+            <a:ext cx="2258568" cy="502920"/>
+          </a:xfrm>
+          <a:prstGeom prst="rect">
+            <a:avLst/>
+          </a:prstGeom>
+          <a:noFill/>
+        </p:spPr>
+        <p:txBody>
+          <a:bodyPr wrap="square" anchor="t" lIns="0" rIns="0" tIns="0" bIns="0">
+            <a:spAutoFit/>
+          </a:bodyPr>
+          <a:lstStyle/>
+          <a:p>
             <a:pPr>
               <a:lnSpc>
                 <a:spcPct val="118000"/>
               </a:lnSpc>
-              <a:spcBef>
-                <a:spcPts val="0"/>
-              </a:spcBef>
               <a:spcAft>
                 <a:spcPts val="200"/>
               </a:spcAft>
             </a:pPr>
             <a:r>
-              <a:rPr sz="730">
+              <a:rPr sz="720">
+                <a:solidFill>
+                  <a:srgbClr val="191919"/>
+                </a:solidFill>
+                <a:latin typeface="AvenirNext LT Pro Regular"/>
+              </a:rPr>
+              <a:t>Runs end-to-end on two sets of real TiO2 RHEED data; fault-injection evaluation quantifies latency, attribution and false alarms.</a:t>
+            </a:r>
+          </a:p>
+        </p:txBody>
+      </p:sp>
+      <p:sp>
+        <p:nvSpPr>
+          <p:cNvPr id="23" name="Rounded Rectangle 22"/>
+          <p:cNvSpPr/>
+          <p:nvPr/>
+        </p:nvSpPr>
+        <p:spPr>
+          <a:xfrm>
+            <a:off x="3456432" y="3913632"/>
+            <a:ext cx="566928" cy="192024"/>
+          </a:xfrm>
+          <a:prstGeom prst="roundRect">
+            <a:avLst>
+              <a:gd name="adj" fmla="val 50000"/>
+            </a:avLst>
+          </a:prstGeom>
+          <a:solidFill>
+            <a:srgbClr val="FFFFFF"/>
+          </a:solidFill>
+          <a:ln>
+            <a:noFill/>
+          </a:ln>
+          <a:effectLst/>
+        </p:spPr>
+        <p:style>
+          <a:lnRef idx="1">
+            <a:schemeClr val="accent1"/>
+          </a:lnRef>
+          <a:fillRef idx="3">
+            <a:schemeClr val="accent1"/>
+          </a:fillRef>
+          <a:effectRef idx="2">
+            <a:schemeClr val="accent1"/>
+          </a:effectRef>
+          <a:fontRef idx="minor">
+            <a:schemeClr val="lt1"/>
+          </a:fontRef>
+        </p:style>
+        <p:txBody>
+          <a:bodyPr rtlCol="0" anchor="ctr"/>
+          <a:lstStyle/>
+          <a:p>
+            <a:pPr algn="ctr"/>
+          </a:p>
+        </p:txBody>
+      </p:sp>
+      <p:sp>
+        <p:nvSpPr>
+          <p:cNvPr id="24" name="TextBox 23"/>
+          <p:cNvSpPr txBox="1"/>
+          <p:nvPr/>
+        </p:nvSpPr>
+        <p:spPr>
+          <a:xfrm>
+            <a:off x="3456432" y="3945636"/>
+            <a:ext cx="566928" cy="146304"/>
+          </a:xfrm>
+          <a:prstGeom prst="rect">
+            <a:avLst/>
+          </a:prstGeom>
+          <a:noFill/>
+        </p:spPr>
+        <p:txBody>
+          <a:bodyPr wrap="square" anchor="t" lIns="0" rIns="0" tIns="0" bIns="0">
+            <a:spAutoFit/>
+          </a:bodyPr>
+          <a:lstStyle/>
+          <a:p>
+            <a:pPr algn="ctr">
+              <a:lnSpc>
+                <a:spcPct val="120000"/>
+              </a:lnSpc>
+              <a:spcAft>
+                <a:spcPts val="200"/>
+              </a:spcAft>
+            </a:pPr>
+            <a:r>
+              <a:rPr sz="680" spc="50">
+                <a:solidFill>
+                  <a:srgbClr val="00B388"/>
+                </a:solidFill>
+                <a:latin typeface="AvenirNext LT Pro Medium"/>
+              </a:rPr>
+              <a:t>NEXT</a:t>
+            </a:r>
+          </a:p>
+        </p:txBody>
+      </p:sp>
+      <p:sp>
+        <p:nvSpPr>
+          <p:cNvPr id="25" name="TextBox 24"/>
+          <p:cNvSpPr txBox="1"/>
+          <p:nvPr/>
+        </p:nvSpPr>
+        <p:spPr>
+          <a:xfrm>
+            <a:off x="3456432" y="4169663"/>
+            <a:ext cx="2258568" cy="384048"/>
+          </a:xfrm>
+          <a:prstGeom prst="rect">
+            <a:avLst/>
+          </a:prstGeom>
+          <a:noFill/>
+        </p:spPr>
+        <p:txBody>
+          <a:bodyPr wrap="square" anchor="t" lIns="0" rIns="0" tIns="0" bIns="0">
+            <a:spAutoFit/>
+          </a:bodyPr>
+          <a:lstStyle/>
+          <a:p>
+            <a:pPr>
+              <a:lnSpc>
+                <a:spcPct val="118000"/>
+              </a:lnSpc>
+              <a:spcAft>
+                <a:spcPts val="200"/>
+              </a:spcAft>
+            </a:pPr>
+            <a:r>
+              <a:rPr sz="720">
+                <a:solidFill>
+                  <a:srgbClr val="191919"/>
+                </a:solidFill>
+                <a:latin typeface="AvenirNext LT Pro Regular"/>
+              </a:rPr>
+              <a:t>GaN RHEED validation + tool validation.</a:t>
+            </a:r>
+          </a:p>
+        </p:txBody>
+      </p:sp>
+      <p:sp>
+        <p:nvSpPr>
+          <p:cNvPr id="26" name="Rounded Rectangle 25"/>
+          <p:cNvSpPr/>
+          <p:nvPr/>
+        </p:nvSpPr>
+        <p:spPr>
+          <a:xfrm>
+            <a:off x="6007608" y="1371600"/>
+            <a:ext cx="2551176" cy="3246120"/>
+          </a:xfrm>
+          <a:prstGeom prst="roundRect">
+            <a:avLst>
+              <a:gd name="adj" fmla="val 6000"/>
+            </a:avLst>
+          </a:prstGeom>
+          <a:solidFill>
+            <a:srgbClr val="F5F5F5"/>
+          </a:solidFill>
+          <a:ln>
+            <a:noFill/>
+          </a:ln>
+          <a:effectLst/>
+        </p:spPr>
+        <p:style>
+          <a:lnRef idx="1">
+            <a:schemeClr val="accent1"/>
+          </a:lnRef>
+          <a:fillRef idx="3">
+            <a:schemeClr val="accent1"/>
+          </a:fillRef>
+          <a:effectRef idx="2">
+            <a:schemeClr val="accent1"/>
+          </a:effectRef>
+          <a:fontRef idx="minor">
+            <a:schemeClr val="lt1"/>
+          </a:fontRef>
+        </p:style>
+        <p:txBody>
+          <a:bodyPr rtlCol="0" anchor="ctr"/>
+          <a:lstStyle/>
+          <a:p>
+            <a:pPr algn="ctr"/>
+          </a:p>
+        </p:txBody>
+      </p:sp>
+      <p:sp>
+        <p:nvSpPr>
+          <p:cNvPr id="27" name="Oval 26"/>
+          <p:cNvSpPr/>
+          <p:nvPr/>
+        </p:nvSpPr>
+        <p:spPr>
+          <a:xfrm>
+            <a:off x="6153912" y="1517904"/>
+            <a:ext cx="310896" cy="310896"/>
+          </a:xfrm>
+          <a:prstGeom prst="ellipse">
+            <a:avLst/>
+          </a:prstGeom>
+          <a:solidFill>
+            <a:srgbClr val="00B388"/>
+          </a:solidFill>
+          <a:ln>
+            <a:noFill/>
+          </a:ln>
+          <a:effectLst/>
+        </p:spPr>
+        <p:style>
+          <a:lnRef idx="1">
+            <a:schemeClr val="accent1"/>
+          </a:lnRef>
+          <a:fillRef idx="3">
+            <a:schemeClr val="accent1"/>
+          </a:fillRef>
+          <a:effectRef idx="2">
+            <a:schemeClr val="accent1"/>
+          </a:effectRef>
+          <a:fontRef idx="minor">
+            <a:schemeClr val="lt1"/>
+          </a:fontRef>
+        </p:style>
+        <p:txBody>
+          <a:bodyPr rtlCol="0" anchor="ctr" lIns="0" rIns="0" tIns="0" bIns="0" wrap="none"/>
+          <a:lstStyle/>
+          <a:p>
+            <a:pPr algn="ctr"/>
+            <a:r>
+              <a:rPr sz="900">
+                <a:solidFill>
+                  <a:srgbClr val="FFFFFF"/>
+                </a:solidFill>
+                <a:latin typeface="AvenirNext LT Pro Medium"/>
+              </a:rPr>
+              <a:t>03</a:t>
+            </a:r>
+          </a:p>
+        </p:txBody>
+      </p:sp>
+      <p:sp>
+        <p:nvSpPr>
+          <p:cNvPr id="28" name="TextBox 27"/>
+          <p:cNvSpPr txBox="1"/>
+          <p:nvPr/>
+        </p:nvSpPr>
+        <p:spPr>
+          <a:xfrm>
+            <a:off x="6574536" y="1554480"/>
+            <a:ext cx="1856232" cy="164592"/>
+          </a:xfrm>
+          <a:prstGeom prst="rect">
+            <a:avLst/>
+          </a:prstGeom>
+          <a:noFill/>
+        </p:spPr>
+        <p:txBody>
+          <a:bodyPr wrap="square" anchor="t" lIns="0" rIns="0" tIns="0" bIns="0">
+            <a:spAutoFit/>
+          </a:bodyPr>
+          <a:lstStyle/>
+          <a:p>
+            <a:pPr>
+              <a:lnSpc>
+                <a:spcPct val="120000"/>
+              </a:lnSpc>
+              <a:spcAft>
+                <a:spcPts val="200"/>
+              </a:spcAft>
+            </a:pPr>
+            <a:r>
+              <a:rPr sz="680" spc="60">
+                <a:solidFill>
+                  <a:srgbClr val="666666"/>
+                </a:solidFill>
+                <a:latin typeface="AvenirNext LT Pro Medium"/>
+              </a:rPr>
+              <a:t>PHYSICAL SIMULATION</a:t>
+            </a:r>
+          </a:p>
+        </p:txBody>
+      </p:sp>
+      <p:sp>
+        <p:nvSpPr>
+          <p:cNvPr id="29" name="TextBox 28"/>
+          <p:cNvSpPr txBox="1"/>
+          <p:nvPr/>
+        </p:nvSpPr>
+        <p:spPr>
+          <a:xfrm>
+            <a:off x="6574536" y="1737360"/>
+            <a:ext cx="1856232" cy="219456"/>
+          </a:xfrm>
+          <a:prstGeom prst="rect">
+            <a:avLst/>
+          </a:prstGeom>
+          <a:noFill/>
+        </p:spPr>
+        <p:txBody>
+          <a:bodyPr wrap="square" anchor="t" lIns="0" rIns="0" tIns="0" bIns="0">
+            <a:spAutoFit/>
+          </a:bodyPr>
+          <a:lstStyle/>
+          <a:p>
+            <a:pPr>
+              <a:lnSpc>
+                <a:spcPct val="120000"/>
+              </a:lnSpc>
+              <a:spcAft>
+                <a:spcPts val="200"/>
+              </a:spcAft>
+            </a:pPr>
+            <a:r>
+              <a:rPr sz="950">
+                <a:solidFill>
+                  <a:srgbClr val="191919"/>
+                </a:solidFill>
+                <a:latin typeface="AvenirNext LT Pro Medium"/>
+              </a:rPr>
+              <a:t>MBE Simulation</a:t>
+            </a:r>
+          </a:p>
+        </p:txBody>
+      </p:sp>
+      <p:sp>
+        <p:nvSpPr>
+          <p:cNvPr id="30" name="TextBox 29"/>
+          <p:cNvSpPr txBox="1"/>
+          <p:nvPr/>
+        </p:nvSpPr>
+        <p:spPr>
+          <a:xfrm>
+            <a:off x="6153912" y="2157984"/>
+            <a:ext cx="2258568" cy="868680"/>
+          </a:xfrm>
+          <a:prstGeom prst="rect">
+            <a:avLst/>
+          </a:prstGeom>
+          <a:noFill/>
+        </p:spPr>
+        <p:txBody>
+          <a:bodyPr wrap="square" anchor="t" lIns="0" rIns="0" tIns="0" bIns="0">
+            <a:spAutoFit/>
+          </a:bodyPr>
+          <a:lstStyle/>
+          <a:p>
+            <a:pPr>
+              <a:lnSpc>
+                <a:spcPct val="120000"/>
+              </a:lnSpc>
+              <a:spcAft>
+                <a:spcPts val="200"/>
+              </a:spcAft>
+            </a:pPr>
+            <a:r>
+              <a:rPr sz="740">
+                <a:solidFill>
+                  <a:srgbClr val="191919"/>
+                </a:solidFill>
+                <a:latin typeface="AvenirNext LT Pro Regular"/>
+              </a:rPr>
+              <a:t>A physics-based simulation model of the MBE chamber: flux geometry, surface kinetics, thermal model and a live machine model.</a:t>
+            </a:r>
+          </a:p>
+        </p:txBody>
+      </p:sp>
+      <p:sp>
+        <p:nvSpPr>
+          <p:cNvPr id="31" name="Rounded Rectangle 30"/>
+          <p:cNvSpPr/>
+          <p:nvPr/>
+        </p:nvSpPr>
+        <p:spPr>
+          <a:xfrm>
+            <a:off x="6153912" y="3090672"/>
+            <a:ext cx="749808" cy="192024"/>
+          </a:xfrm>
+          <a:prstGeom prst="roundRect">
+            <a:avLst>
+              <a:gd name="adj" fmla="val 50000"/>
+            </a:avLst>
+          </a:prstGeom>
+          <a:solidFill>
+            <a:srgbClr val="FFFFFF"/>
+          </a:solidFill>
+          <a:ln>
+            <a:noFill/>
+          </a:ln>
+          <a:effectLst/>
+        </p:spPr>
+        <p:style>
+          <a:lnRef idx="1">
+            <a:schemeClr val="accent1"/>
+          </a:lnRef>
+          <a:fillRef idx="3">
+            <a:schemeClr val="accent1"/>
+          </a:fillRef>
+          <a:effectRef idx="2">
+            <a:schemeClr val="accent1"/>
+          </a:effectRef>
+          <a:fontRef idx="minor">
+            <a:schemeClr val="lt1"/>
+          </a:fontRef>
+        </p:style>
+        <p:txBody>
+          <a:bodyPr rtlCol="0" anchor="ctr"/>
+          <a:lstStyle/>
+          <a:p>
+            <a:pPr algn="ctr"/>
+          </a:p>
+        </p:txBody>
+      </p:sp>
+      <p:sp>
+        <p:nvSpPr>
+          <p:cNvPr id="32" name="TextBox 31"/>
+          <p:cNvSpPr txBox="1"/>
+          <p:nvPr/>
+        </p:nvSpPr>
+        <p:spPr>
+          <a:xfrm>
+            <a:off x="6153912" y="3122676"/>
+            <a:ext cx="749808" cy="146304"/>
+          </a:xfrm>
+          <a:prstGeom prst="rect">
+            <a:avLst/>
+          </a:prstGeom>
+          <a:noFill/>
+        </p:spPr>
+        <p:txBody>
+          <a:bodyPr wrap="square" anchor="t" lIns="0" rIns="0" tIns="0" bIns="0">
+            <a:spAutoFit/>
+          </a:bodyPr>
+          <a:lstStyle/>
+          <a:p>
+            <a:pPr algn="ctr">
+              <a:lnSpc>
+                <a:spcPct val="120000"/>
+              </a:lnSpc>
+              <a:spcAft>
+                <a:spcPts val="200"/>
+              </a:spcAft>
+            </a:pPr>
+            <a:r>
+              <a:rPr sz="680" spc="50">
+                <a:solidFill>
+                  <a:srgbClr val="00B388"/>
+                </a:solidFill>
+                <a:latin typeface="AvenirNext LT Pro Medium"/>
+              </a:rPr>
+              <a:t>VERIFIED</a:t>
+            </a:r>
+          </a:p>
+        </p:txBody>
+      </p:sp>
+      <p:sp>
+        <p:nvSpPr>
+          <p:cNvPr id="33" name="TextBox 32"/>
+          <p:cNvSpPr txBox="1"/>
+          <p:nvPr/>
+        </p:nvSpPr>
+        <p:spPr>
+          <a:xfrm>
+            <a:off x="6153912" y="3346704"/>
+            <a:ext cx="2258568" cy="502920"/>
+          </a:xfrm>
+          <a:prstGeom prst="rect">
+            <a:avLst/>
+          </a:prstGeom>
+          <a:noFill/>
+        </p:spPr>
+        <p:txBody>
+          <a:bodyPr wrap="square" anchor="t" lIns="0" rIns="0" tIns="0" bIns="0">
+            <a:spAutoFit/>
+          </a:bodyPr>
+          <a:lstStyle/>
+          <a:p>
+            <a:pPr>
+              <a:lnSpc>
+                <a:spcPct val="118000"/>
+              </a:lnSpc>
+              <a:spcAft>
+                <a:spcPts val="200"/>
+              </a:spcAft>
+            </a:pPr>
+            <a:r>
+              <a:rPr sz="720">
+                <a:solidFill>
+                  <a:srgbClr val="191919"/>
+                </a:solidFill>
+                <a:latin typeface="AvenirNext LT Pro Regular"/>
+              </a:rPr>
+              <a:t>Underlying physics built out and refined (literature-anchored calibration).</a:t>
+            </a:r>
+          </a:p>
+        </p:txBody>
+      </p:sp>
+      <p:sp>
+        <p:nvSpPr>
+          <p:cNvPr id="34" name="Rounded Rectangle 33"/>
+          <p:cNvSpPr/>
+          <p:nvPr/>
+        </p:nvSpPr>
+        <p:spPr>
+          <a:xfrm>
+            <a:off x="6153912" y="3913632"/>
+            <a:ext cx="566928" cy="192024"/>
+          </a:xfrm>
+          <a:prstGeom prst="roundRect">
+            <a:avLst>
+              <a:gd name="adj" fmla="val 50000"/>
+            </a:avLst>
+          </a:prstGeom>
+          <a:solidFill>
+            <a:srgbClr val="FFFFFF"/>
+          </a:solidFill>
+          <a:ln>
+            <a:noFill/>
+          </a:ln>
+          <a:effectLst/>
+        </p:spPr>
+        <p:style>
+          <a:lnRef idx="1">
+            <a:schemeClr val="accent1"/>
+          </a:lnRef>
+          <a:fillRef idx="3">
+            <a:schemeClr val="accent1"/>
+          </a:fillRef>
+          <a:effectRef idx="2">
+            <a:schemeClr val="accent1"/>
+          </a:effectRef>
+          <a:fontRef idx="minor">
+            <a:schemeClr val="lt1"/>
+          </a:fontRef>
+        </p:style>
+        <p:txBody>
+          <a:bodyPr rtlCol="0" anchor="ctr"/>
+          <a:lstStyle/>
+          <a:p>
+            <a:pPr algn="ctr"/>
+          </a:p>
+        </p:txBody>
+      </p:sp>
+      <p:sp>
+        <p:nvSpPr>
+          <p:cNvPr id="35" name="TextBox 34"/>
+          <p:cNvSpPr txBox="1"/>
+          <p:nvPr/>
+        </p:nvSpPr>
+        <p:spPr>
+          <a:xfrm>
+            <a:off x="6153912" y="3945636"/>
+            <a:ext cx="566928" cy="146304"/>
+          </a:xfrm>
+          <a:prstGeom prst="rect">
+            <a:avLst/>
+          </a:prstGeom>
+          <a:noFill/>
+        </p:spPr>
+        <p:txBody>
+          <a:bodyPr wrap="square" anchor="t" lIns="0" rIns="0" tIns="0" bIns="0">
+            <a:spAutoFit/>
+          </a:bodyPr>
+          <a:lstStyle/>
+          <a:p>
+            <a:pPr algn="ctr">
+              <a:lnSpc>
+                <a:spcPct val="120000"/>
+              </a:lnSpc>
+              <a:spcAft>
+                <a:spcPts val="200"/>
+              </a:spcAft>
+            </a:pPr>
+            <a:r>
+              <a:rPr sz="680" spc="50">
+                <a:solidFill>
+                  <a:srgbClr val="00B388"/>
+                </a:solidFill>
+                <a:latin typeface="AvenirNext LT Pro Medium"/>
+              </a:rPr>
+              <a:t>NEXT</a:t>
+            </a:r>
+          </a:p>
+        </p:txBody>
+      </p:sp>
+      <p:sp>
+        <p:nvSpPr>
+          <p:cNvPr id="36" name="TextBox 35"/>
+          <p:cNvSpPr txBox="1"/>
+          <p:nvPr/>
+        </p:nvSpPr>
+        <p:spPr>
+          <a:xfrm>
+            <a:off x="6153912" y="4169663"/>
+            <a:ext cx="2258568" cy="384048"/>
+          </a:xfrm>
+          <a:prstGeom prst="rect">
+            <a:avLst/>
+          </a:prstGeom>
+          <a:noFill/>
+        </p:spPr>
+        <p:txBody>
+          <a:bodyPr wrap="square" anchor="t" lIns="0" rIns="0" tIns="0" bIns="0">
+            <a:spAutoFit/>
+          </a:bodyPr>
+          <a:lstStyle/>
+          <a:p>
+            <a:pPr>
+              <a:lnSpc>
+                <a:spcPct val="118000"/>
+              </a:lnSpc>
+              <a:spcAft>
+                <a:spcPts val="200"/>
+              </a:spcAft>
+            </a:pPr>
+            <a:r>
+              <a:rPr sz="720">
                 <a:solidFill>
                   <a:srgbClr val="191919"/>
                 </a:solidFill>
@@ -24631,8 +25478,8 @@
         </p:nvSpPr>
         <p:spPr>
           <a:xfrm>
-            <a:off x="1645920" y="1280160"/>
-            <a:ext cx="1920240" cy="182880"/>
+            <a:off x="2331720" y="1298448"/>
+            <a:ext cx="1783080" cy="182880"/>
           </a:xfrm>
           <a:prstGeom prst="rect">
             <a:avLst/>
@@ -24649,9 +25496,6 @@
               <a:lnSpc>
                 <a:spcPct val="120000"/>
               </a:lnSpc>
-              <a:spcBef>
-                <a:spcPts val="0"/>
-              </a:spcBef>
               <a:spcAft>
                 <a:spcPts val="200"/>
               </a:spcAft>
@@ -24676,8 +25520,8 @@
         </p:nvSpPr>
         <p:spPr>
           <a:xfrm>
-            <a:off x="3794760" y="1280160"/>
-            <a:ext cx="4736592" cy="182880"/>
+            <a:off x="4224528" y="1298448"/>
+            <a:ext cx="4206240" cy="182880"/>
           </a:xfrm>
           <a:prstGeom prst="rect">
             <a:avLst/>
@@ -24694,15 +25538,12 @@
               <a:lnSpc>
                 <a:spcPct val="120000"/>
               </a:lnSpc>
-              <a:spcBef>
-                <a:spcPts val="0"/>
-              </a:spcBef>
               <a:spcAft>
                 <a:spcPts val="200"/>
               </a:spcAft>
             </a:pPr>
             <a:r>
-              <a:rPr sz="700" spc="40">
+              <a:rPr sz="700" spc="30">
                 <a:solidFill>
                   <a:srgbClr val="8C8C8C"/>
                 </a:solidFill>
@@ -24715,20 +25556,22 @@
       </p:sp>
       <p:sp>
         <p:nvSpPr>
-          <p:cNvPr id="6" name="Rectangle 5"/>
+          <p:cNvPr id="6" name="Rounded Rectangle 5"/>
           <p:cNvSpPr/>
           <p:nvPr/>
         </p:nvSpPr>
         <p:spPr>
           <a:xfrm>
-            <a:off x="612648" y="1536192"/>
-            <a:ext cx="7918704" cy="11430"/>
-          </a:xfrm>
-          <a:prstGeom prst="rect">
-            <a:avLst/>
+            <a:off x="612648" y="1554480"/>
+            <a:ext cx="7918704" cy="713232"/>
+          </a:xfrm>
+          <a:prstGeom prst="roundRect">
+            <a:avLst>
+              <a:gd name="adj" fmla="val 10000"/>
+            </a:avLst>
           </a:prstGeom>
           <a:solidFill>
-            <a:srgbClr val="00B388"/>
+            <a:srgbClr val="F5F5F5"/>
           </a:solidFill>
           <a:ln>
             <a:noFill/>
@@ -24759,177 +25602,22 @@
       </p:sp>
       <p:sp>
         <p:nvSpPr>
-          <p:cNvPr id="7" name="TextBox 6"/>
-          <p:cNvSpPr txBox="1"/>
-          <p:nvPr/>
-        </p:nvSpPr>
-        <p:spPr>
-          <a:xfrm>
-            <a:off x="612648" y="1627632"/>
-            <a:ext cx="914400" cy="548640"/>
-          </a:xfrm>
-          <a:prstGeom prst="rect">
-            <a:avLst/>
-          </a:prstGeom>
-          <a:noFill/>
-        </p:spPr>
-        <p:txBody>
-          <a:bodyPr wrap="square" anchor="t" lIns="0" rIns="0" tIns="0" bIns="0">
-            <a:spAutoFit/>
-          </a:bodyPr>
-          <a:lstStyle/>
-          <a:p>
-            <a:pPr>
-              <a:lnSpc>
-                <a:spcPct val="100000"/>
-              </a:lnSpc>
-              <a:spcBef>
-                <a:spcPts val="0"/>
-              </a:spcBef>
-              <a:spcAft>
-                <a:spcPts val="100"/>
-              </a:spcAft>
-            </a:pPr>
-            <a:r>
-              <a:rPr sz="2000">
-                <a:solidFill>
-                  <a:srgbClr val="00B388"/>
-                </a:solidFill>
-                <a:latin typeface="AvenirNext LT Pro Light"/>
-              </a:rPr>
-              <a:t>L1</a:t>
-            </a:r>
-          </a:p>
-          <a:p>
-            <a:pPr>
-              <a:lnSpc>
-                <a:spcPct val="120000"/>
-              </a:lnSpc>
-              <a:spcBef>
-                <a:spcPts val="0"/>
-              </a:spcBef>
-              <a:spcAft>
-                <a:spcPts val="200"/>
-              </a:spcAft>
-            </a:pPr>
-            <a:r>
-              <a:rPr sz="800">
-                <a:solidFill>
-                  <a:srgbClr val="191919"/>
-                </a:solidFill>
-                <a:latin typeface="AvenirNext LT Pro Medium"/>
-              </a:rPr>
-              <a:t>Observe</a:t>
-            </a:r>
-          </a:p>
-        </p:txBody>
-      </p:sp>
-      <p:sp>
-        <p:nvSpPr>
-          <p:cNvPr id="8" name="TextBox 7"/>
-          <p:cNvSpPr txBox="1"/>
-          <p:nvPr/>
-        </p:nvSpPr>
-        <p:spPr>
-          <a:xfrm>
-            <a:off x="1645920" y="1645919"/>
-            <a:ext cx="1920240" cy="640080"/>
-          </a:xfrm>
-          <a:prstGeom prst="rect">
-            <a:avLst/>
-          </a:prstGeom>
-          <a:noFill/>
-        </p:spPr>
-        <p:txBody>
-          <a:bodyPr wrap="square" anchor="t" lIns="0" rIns="0" tIns="0" bIns="0">
-            <a:spAutoFit/>
-          </a:bodyPr>
-          <a:lstStyle/>
-          <a:p>
-            <a:pPr>
-              <a:lnSpc>
-                <a:spcPct val="120000"/>
-              </a:lnSpc>
-              <a:spcBef>
-                <a:spcPts val="0"/>
-              </a:spcBef>
-              <a:spcAft>
-                <a:spcPts val="200"/>
-              </a:spcAft>
-            </a:pPr>
-            <a:r>
-              <a:rPr sz="750">
-                <a:solidFill>
-                  <a:srgbClr val="191919"/>
-                </a:solidFill>
-                <a:latin typeface="AvenirNext LT Pro Regular"/>
-              </a:rPr>
-              <a:t>Read-only acquisition; full data capture during runs.</a:t>
-            </a:r>
-          </a:p>
-        </p:txBody>
-      </p:sp>
-      <p:sp>
-        <p:nvSpPr>
-          <p:cNvPr id="9" name="TextBox 8"/>
-          <p:cNvSpPr txBox="1"/>
-          <p:nvPr/>
-        </p:nvSpPr>
-        <p:spPr>
-          <a:xfrm>
-            <a:off x="3794760" y="1645919"/>
-            <a:ext cx="4736592" cy="640080"/>
-          </a:xfrm>
-          <a:prstGeom prst="rect">
-            <a:avLst/>
-          </a:prstGeom>
-          <a:noFill/>
-        </p:spPr>
-        <p:txBody>
-          <a:bodyPr wrap="square" anchor="t" lIns="0" rIns="0" tIns="0" bIns="0">
-            <a:spAutoFit/>
-          </a:bodyPr>
-          <a:lstStyle/>
-          <a:p>
-            <a:pPr>
-              <a:lnSpc>
-                <a:spcPct val="120000"/>
-              </a:lnSpc>
-              <a:spcBef>
-                <a:spcPts val="0"/>
-              </a:spcBef>
-              <a:spcAft>
-                <a:spcPts val="200"/>
-              </a:spcAft>
-            </a:pPr>
-            <a:r>
-              <a:rPr sz="750">
-                <a:solidFill>
-                  <a:srgbClr val="191919"/>
-                </a:solidFill>
-                <a:latin typeface="AvenirNext LT Pro Regular"/>
-              </a:rPr>
-              <a:t>Data contract accepted: every signal captured with trustworthy time synchronisation; the ingest validation layer proven by fault injection to actually reject bad data.</a:t>
-            </a:r>
-          </a:p>
-        </p:txBody>
-      </p:sp>
-      <p:sp>
-        <p:nvSpPr>
-          <p:cNvPr id="10" name="Rectangle 9"/>
+          <p:cNvPr id="7" name="Rounded Rectangle 6"/>
           <p:cNvSpPr/>
           <p:nvPr/>
         </p:nvSpPr>
         <p:spPr>
           <a:xfrm>
-            <a:off x="612648" y="2322576"/>
-            <a:ext cx="7918704" cy="11430"/>
-          </a:xfrm>
-          <a:prstGeom prst="rect">
-            <a:avLst/>
+            <a:off x="749808" y="1700784"/>
+            <a:ext cx="420624" cy="420624"/>
+          </a:xfrm>
+          <a:prstGeom prst="roundRect">
+            <a:avLst>
+              <a:gd name="adj" fmla="val 28000"/>
+            </a:avLst>
           </a:prstGeom>
           <a:solidFill>
-            <a:srgbClr val="00B388"/>
+            <a:srgbClr val="3CDBC0"/>
           </a:solidFill>
           <a:ln>
             <a:noFill/>
@@ -24960,14 +25648,14 @@
       </p:sp>
       <p:sp>
         <p:nvSpPr>
-          <p:cNvPr id="11" name="TextBox 10"/>
+          <p:cNvPr id="8" name="TextBox 7"/>
           <p:cNvSpPr txBox="1"/>
           <p:nvPr/>
         </p:nvSpPr>
         <p:spPr>
           <a:xfrm>
-            <a:off x="612648" y="2414016"/>
-            <a:ext cx="914400" cy="548640"/>
+            <a:off x="749808" y="1801368"/>
+            <a:ext cx="420624" cy="219456"/>
           </a:xfrm>
           <a:prstGeom prst="rect">
             <a:avLst/>
@@ -24980,61 +25668,36 @@
           </a:bodyPr>
           <a:lstStyle/>
           <a:p>
-            <a:pPr>
-              <a:lnSpc>
-                <a:spcPct val="100000"/>
-              </a:lnSpc>
-              <a:spcBef>
-                <a:spcPts val="0"/>
-              </a:spcBef>
-              <a:spcAft>
-                <a:spcPts val="100"/>
-              </a:spcAft>
-            </a:pPr>
-            <a:r>
-              <a:rPr sz="2000">
-                <a:solidFill>
-                  <a:srgbClr val="00B388"/>
-                </a:solidFill>
-                <a:latin typeface="AvenirNext LT Pro Light"/>
-              </a:rPr>
-              <a:t>L2</a:t>
-            </a:r>
-          </a:p>
-          <a:p>
-            <a:pPr>
+            <a:pPr algn="ctr">
               <a:lnSpc>
                 <a:spcPct val="120000"/>
               </a:lnSpc>
-              <a:spcBef>
-                <a:spcPts val="0"/>
-              </a:spcBef>
               <a:spcAft>
                 <a:spcPts val="200"/>
               </a:spcAft>
             </a:pPr>
             <a:r>
-              <a:rPr sz="800">
-                <a:solidFill>
-                  <a:srgbClr val="191919"/>
+              <a:rPr sz="1100">
+                <a:solidFill>
+                  <a:srgbClr val="000000"/>
                 </a:solidFill>
                 <a:latin typeface="AvenirNext LT Pro Medium"/>
               </a:rPr>
-              <a:t>Shadow</a:t>
-            </a:r>
-          </a:p>
-        </p:txBody>
-      </p:sp>
-      <p:sp>
-        <p:nvSpPr>
-          <p:cNvPr id="12" name="TextBox 11"/>
+              <a:t>L1</a:t>
+            </a:r>
+          </a:p>
+        </p:txBody>
+      </p:sp>
+      <p:sp>
+        <p:nvSpPr>
+          <p:cNvPr id="9" name="TextBox 8"/>
           <p:cNvSpPr txBox="1"/>
           <p:nvPr/>
         </p:nvSpPr>
         <p:spPr>
           <a:xfrm>
-            <a:off x="1645920" y="2432304"/>
-            <a:ext cx="1920240" cy="640080"/>
+            <a:off x="1298448" y="1645920"/>
+            <a:ext cx="960120" cy="585216"/>
           </a:xfrm>
           <a:prstGeom prst="rect">
             <a:avLst/>
@@ -25042,44 +25705,41 @@
           <a:noFill/>
         </p:spPr>
         <p:txBody>
-          <a:bodyPr wrap="square" anchor="t" lIns="0" rIns="0" tIns="0" bIns="0">
+          <a:bodyPr wrap="square" anchor="ctr" lIns="0" rIns="0" tIns="0" bIns="0">
             <a:spAutoFit/>
           </a:bodyPr>
           <a:lstStyle/>
           <a:p>
             <a:pPr>
               <a:lnSpc>
-                <a:spcPct val="120000"/>
+                <a:spcPct val="110000"/>
               </a:lnSpc>
-              <a:spcBef>
-                <a:spcPts val="0"/>
-              </a:spcBef>
               <a:spcAft>
                 <a:spcPts val="200"/>
               </a:spcAft>
             </a:pPr>
             <a:r>
-              <a:rPr sz="750">
+              <a:rPr sz="850">
                 <a:solidFill>
                   <a:srgbClr val="191919"/>
                 </a:solidFill>
-                <a:latin typeface="AvenirNext LT Pro Regular"/>
+                <a:latin typeface="AvenirNext LT Pro Medium"/>
               </a:rPr>
-              <a:t>AI issues decisions with rationale; nothing is written to the tool.</a:t>
-            </a:r>
-          </a:p>
-        </p:txBody>
-      </p:sp>
-      <p:sp>
-        <p:nvSpPr>
-          <p:cNvPr id="13" name="TextBox 12"/>
+              <a:t>Observe</a:t>
+            </a:r>
+          </a:p>
+        </p:txBody>
+      </p:sp>
+      <p:sp>
+        <p:nvSpPr>
+          <p:cNvPr id="10" name="TextBox 9"/>
           <p:cNvSpPr txBox="1"/>
           <p:nvPr/>
         </p:nvSpPr>
         <p:spPr>
           <a:xfrm>
-            <a:off x="3794760" y="2432304"/>
-            <a:ext cx="4736592" cy="640080"/>
+            <a:off x="2331720" y="1645920"/>
+            <a:ext cx="1783080" cy="585216"/>
           </a:xfrm>
           <a:prstGeom prst="rect">
             <a:avLst/>
@@ -25087,50 +25747,91 @@
           <a:noFill/>
         </p:spPr>
         <p:txBody>
-          <a:bodyPr wrap="square" anchor="t" lIns="0" rIns="0" tIns="0" bIns="0">
+          <a:bodyPr wrap="square" anchor="ctr" lIns="0" rIns="0" tIns="0" bIns="0">
             <a:spAutoFit/>
           </a:bodyPr>
           <a:lstStyle/>
           <a:p>
             <a:pPr>
               <a:lnSpc>
-                <a:spcPct val="120000"/>
+                <a:spcPct val="118000"/>
               </a:lnSpc>
-              <a:spcBef>
-                <a:spcPts val="0"/>
-              </a:spcBef>
               <a:spcAft>
                 <a:spcPts val="200"/>
               </a:spcAft>
             </a:pPr>
             <a:r>
-              <a:rPr sz="750">
+              <a:rPr sz="730">
                 <a:solidFill>
                   <a:srgbClr val="191919"/>
                 </a:solidFill>
                 <a:latin typeface="AvenirNext LT Pro Regular"/>
               </a:rPr>
-              <a:t>Model calibration passes its acceptance check on our own tool data; perception agrees with expert judgement consistently across a sustained shadow period.</a:t>
-            </a:r>
-          </a:p>
-        </p:txBody>
-      </p:sp>
-      <p:sp>
-        <p:nvSpPr>
-          <p:cNvPr id="14" name="Rectangle 13"/>
+              <a:t>Read-only acquisition; full data capture during runs.</a:t>
+            </a:r>
+          </a:p>
+        </p:txBody>
+      </p:sp>
+      <p:sp>
+        <p:nvSpPr>
+          <p:cNvPr id="11" name="TextBox 10"/>
+          <p:cNvSpPr txBox="1"/>
+          <p:nvPr/>
+        </p:nvSpPr>
+        <p:spPr>
+          <a:xfrm>
+            <a:off x="4224528" y="1645920"/>
+            <a:ext cx="4160520" cy="585216"/>
+          </a:xfrm>
+          <a:prstGeom prst="rect">
+            <a:avLst/>
+          </a:prstGeom>
+          <a:noFill/>
+        </p:spPr>
+        <p:txBody>
+          <a:bodyPr wrap="square" anchor="ctr" lIns="0" rIns="0" tIns="0" bIns="0">
+            <a:spAutoFit/>
+          </a:bodyPr>
+          <a:lstStyle/>
+          <a:p>
+            <a:pPr>
+              <a:lnSpc>
+                <a:spcPct val="118000"/>
+              </a:lnSpc>
+              <a:spcAft>
+                <a:spcPts val="200"/>
+              </a:spcAft>
+            </a:pPr>
+            <a:r>
+              <a:rPr sz="730">
+                <a:solidFill>
+                  <a:srgbClr val="191919"/>
+                </a:solidFill>
+                <a:latin typeface="AvenirNext LT Pro Regular"/>
+              </a:rPr>
+              <a:t>Data contract accepted: every signal captured with trustworthy time synchronisation; the ingest validation layer proven by fault injection to actually reject bad data.</a:t>
+            </a:r>
+          </a:p>
+        </p:txBody>
+      </p:sp>
+      <p:sp>
+        <p:nvSpPr>
+          <p:cNvPr id="12" name="Rounded Rectangle 11"/>
           <p:cNvSpPr/>
           <p:nvPr/>
         </p:nvSpPr>
         <p:spPr>
           <a:xfrm>
-            <a:off x="612648" y="3108960"/>
-            <a:ext cx="7918704" cy="11430"/>
-          </a:xfrm>
-          <a:prstGeom prst="rect">
-            <a:avLst/>
+            <a:off x="612648" y="2322576"/>
+            <a:ext cx="7918704" cy="713232"/>
+          </a:xfrm>
+          <a:prstGeom prst="roundRect">
+            <a:avLst>
+              <a:gd name="adj" fmla="val 10000"/>
+            </a:avLst>
           </a:prstGeom>
           <a:solidFill>
-            <a:srgbClr val="00B388"/>
+            <a:srgbClr val="F5F5F5"/>
           </a:solidFill>
           <a:ln>
             <a:noFill/>
@@ -25161,177 +25862,22 @@
       </p:sp>
       <p:sp>
         <p:nvSpPr>
-          <p:cNvPr id="15" name="TextBox 14"/>
-          <p:cNvSpPr txBox="1"/>
-          <p:nvPr/>
-        </p:nvSpPr>
-        <p:spPr>
-          <a:xfrm>
-            <a:off x="612648" y="3200400"/>
-            <a:ext cx="914400" cy="548640"/>
-          </a:xfrm>
-          <a:prstGeom prst="rect">
-            <a:avLst/>
-          </a:prstGeom>
-          <a:noFill/>
-        </p:spPr>
-        <p:txBody>
-          <a:bodyPr wrap="square" anchor="t" lIns="0" rIns="0" tIns="0" bIns="0">
-            <a:spAutoFit/>
-          </a:bodyPr>
-          <a:lstStyle/>
-          <a:p>
-            <a:pPr>
-              <a:lnSpc>
-                <a:spcPct val="100000"/>
-              </a:lnSpc>
-              <a:spcBef>
-                <a:spcPts val="0"/>
-              </a:spcBef>
-              <a:spcAft>
-                <a:spcPts val="100"/>
-              </a:spcAft>
-            </a:pPr>
-            <a:r>
-              <a:rPr sz="2000">
-                <a:solidFill>
-                  <a:srgbClr val="00B388"/>
-                </a:solidFill>
-                <a:latin typeface="AvenirNext LT Pro Light"/>
-              </a:rPr>
-              <a:t>L3</a:t>
-            </a:r>
-          </a:p>
-          <a:p>
-            <a:pPr>
-              <a:lnSpc>
-                <a:spcPct val="120000"/>
-              </a:lnSpc>
-              <a:spcBef>
-                <a:spcPts val="0"/>
-              </a:spcBef>
-              <a:spcAft>
-                <a:spcPts val="200"/>
-              </a:spcAft>
-            </a:pPr>
-            <a:r>
-              <a:rPr sz="800">
-                <a:solidFill>
-                  <a:srgbClr val="191919"/>
-                </a:solidFill>
-                <a:latin typeface="AvenirNext LT Pro Medium"/>
-              </a:rPr>
-              <a:t>Supervised loop</a:t>
-            </a:r>
-          </a:p>
-        </p:txBody>
-      </p:sp>
-      <p:sp>
-        <p:nvSpPr>
-          <p:cNvPr id="16" name="TextBox 15"/>
-          <p:cNvSpPr txBox="1"/>
-          <p:nvPr/>
-        </p:nvSpPr>
-        <p:spPr>
-          <a:xfrm>
-            <a:off x="1645920" y="3218688"/>
-            <a:ext cx="1920240" cy="640080"/>
-          </a:xfrm>
-          <a:prstGeom prst="rect">
-            <a:avLst/>
-          </a:prstGeom>
-          <a:noFill/>
-        </p:spPr>
-        <p:txBody>
-          <a:bodyPr wrap="square" anchor="t" lIns="0" rIns="0" tIns="0" bIns="0">
-            <a:spAutoFit/>
-          </a:bodyPr>
-          <a:lstStyle/>
-          <a:p>
-            <a:pPr>
-              <a:lnSpc>
-                <a:spcPct val="120000"/>
-              </a:lnSpc>
-              <a:spcBef>
-                <a:spcPts val="0"/>
-              </a:spcBef>
-              <a:spcAft>
-                <a:spcPts val="200"/>
-              </a:spcAft>
-            </a:pPr>
-            <a:r>
-              <a:rPr sz="750">
-                <a:solidFill>
-                  <a:srgbClr val="191919"/>
-                </a:solidFill>
-                <a:latin typeface="AvenirNext LT Pro Regular"/>
-              </a:rPr>
-              <a:t>Single variable, then multivariable (MBE, PVD); one-click engineer takeover at every step.</a:t>
-            </a:r>
-          </a:p>
-        </p:txBody>
-      </p:sp>
-      <p:sp>
-        <p:nvSpPr>
-          <p:cNvPr id="17" name="TextBox 16"/>
-          <p:cNvSpPr txBox="1"/>
-          <p:nvPr/>
-        </p:nvSpPr>
-        <p:spPr>
-          <a:xfrm>
-            <a:off x="3794760" y="3218688"/>
-            <a:ext cx="4736592" cy="640080"/>
-          </a:xfrm>
-          <a:prstGeom prst="rect">
-            <a:avLst/>
-          </a:prstGeom>
-          <a:noFill/>
-        </p:spPr>
-        <p:txBody>
-          <a:bodyPr wrap="square" anchor="t" lIns="0" rIns="0" tIns="0" bIns="0">
-            <a:spAutoFit/>
-          </a:bodyPr>
-          <a:lstStyle/>
-          <a:p>
-            <a:pPr>
-              <a:lnSpc>
-                <a:spcPct val="120000"/>
-              </a:lnSpc>
-              <a:spcBef>
-                <a:spcPts val="0"/>
-              </a:spcBef>
-              <a:spcAft>
-                <a:spcPts val="200"/>
-              </a:spcAft>
-            </a:pPr>
-            <a:r>
-              <a:rPr sz="750">
-                <a:solidFill>
-                  <a:srgbClr val="191919"/>
-                </a:solidFill>
-                <a:latin typeface="AvenirNext LT Pro Regular"/>
-              </a:rPr>
-              <a:t>Control law clears the full fault-injection suite in simulation; write-back latency verified against fast-loop needs; watchdogs and clamps proven in red-then-green drills; every recipe change passes the independent confirmation gate.</a:t>
-            </a:r>
-          </a:p>
-        </p:txBody>
-      </p:sp>
-      <p:sp>
-        <p:nvSpPr>
-          <p:cNvPr id="18" name="Rectangle 17"/>
+          <p:cNvPr id="13" name="Rounded Rectangle 12"/>
           <p:cNvSpPr/>
           <p:nvPr/>
         </p:nvSpPr>
         <p:spPr>
           <a:xfrm>
-            <a:off x="612648" y="3895344"/>
-            <a:ext cx="7918704" cy="11430"/>
-          </a:xfrm>
-          <a:prstGeom prst="rect">
-            <a:avLst/>
+            <a:off x="749808" y="2468880"/>
+            <a:ext cx="420624" cy="420624"/>
+          </a:xfrm>
+          <a:prstGeom prst="roundRect">
+            <a:avLst>
+              <a:gd name="adj" fmla="val 28000"/>
+            </a:avLst>
           </a:prstGeom>
           <a:solidFill>
-            <a:srgbClr val="00B388"/>
+            <a:srgbClr val="307FE2"/>
           </a:solidFill>
           <a:ln>
             <a:noFill/>
@@ -25362,14 +25908,14 @@
       </p:sp>
       <p:sp>
         <p:nvSpPr>
-          <p:cNvPr id="19" name="TextBox 18"/>
+          <p:cNvPr id="14" name="TextBox 13"/>
           <p:cNvSpPr txBox="1"/>
           <p:nvPr/>
         </p:nvSpPr>
         <p:spPr>
           <a:xfrm>
-            <a:off x="612648" y="3986783"/>
-            <a:ext cx="914400" cy="548640"/>
+            <a:off x="749808" y="2569464"/>
+            <a:ext cx="420624" cy="219456"/>
           </a:xfrm>
           <a:prstGeom prst="rect">
             <a:avLst/>
@@ -25382,61 +25928,36 @@
           </a:bodyPr>
           <a:lstStyle/>
           <a:p>
-            <a:pPr>
-              <a:lnSpc>
-                <a:spcPct val="100000"/>
-              </a:lnSpc>
-              <a:spcBef>
-                <a:spcPts val="0"/>
-              </a:spcBef>
-              <a:spcAft>
-                <a:spcPts val="100"/>
-              </a:spcAft>
-            </a:pPr>
-            <a:r>
-              <a:rPr sz="2000">
-                <a:solidFill>
-                  <a:srgbClr val="00B388"/>
-                </a:solidFill>
-                <a:latin typeface="AvenirNext LT Pro Light"/>
-              </a:rPr>
-              <a:t>L4</a:t>
-            </a:r>
-          </a:p>
-          <a:p>
-            <a:pPr>
+            <a:pPr algn="ctr">
               <a:lnSpc>
                 <a:spcPct val="120000"/>
               </a:lnSpc>
-              <a:spcBef>
-                <a:spcPts val="0"/>
-              </a:spcBef>
               <a:spcAft>
                 <a:spcPts val="200"/>
               </a:spcAft>
             </a:pPr>
             <a:r>
-              <a:rPr sz="800">
-                <a:solidFill>
-                  <a:srgbClr val="191919"/>
+              <a:rPr sz="1100">
+                <a:solidFill>
+                  <a:srgbClr val="FFFFFF"/>
                 </a:solidFill>
                 <a:latin typeface="AvenirNext LT Pro Medium"/>
               </a:rPr>
-              <a:t>Unattended</a:t>
-            </a:r>
-          </a:p>
-        </p:txBody>
-      </p:sp>
-      <p:sp>
-        <p:nvSpPr>
-          <p:cNvPr id="20" name="TextBox 19"/>
+              <a:t>L2</a:t>
+            </a:r>
+          </a:p>
+        </p:txBody>
+      </p:sp>
+      <p:sp>
+        <p:nvSpPr>
+          <p:cNvPr id="15" name="TextBox 14"/>
           <p:cNvSpPr txBox="1"/>
           <p:nvPr/>
         </p:nvSpPr>
         <p:spPr>
           <a:xfrm>
-            <a:off x="1645920" y="4005072"/>
-            <a:ext cx="1920240" cy="640080"/>
+            <a:off x="1298448" y="2414016"/>
+            <a:ext cx="960120" cy="585216"/>
           </a:xfrm>
           <a:prstGeom prst="rect">
             <a:avLst/>
@@ -25444,44 +25965,41 @@
           <a:noFill/>
         </p:spPr>
         <p:txBody>
-          <a:bodyPr wrap="square" anchor="t" lIns="0" rIns="0" tIns="0" bIns="0">
+          <a:bodyPr wrap="square" anchor="ctr" lIns="0" rIns="0" tIns="0" bIns="0">
             <a:spAutoFit/>
           </a:bodyPr>
           <a:lstStyle/>
           <a:p>
             <a:pPr>
               <a:lnSpc>
-                <a:spcPct val="120000"/>
+                <a:spcPct val="110000"/>
               </a:lnSpc>
-              <a:spcBef>
-                <a:spcPts val="0"/>
-              </a:spcBef>
               <a:spcAft>
                 <a:spcPts val="200"/>
               </a:spcAft>
             </a:pPr>
             <a:r>
-              <a:rPr sz="750">
+              <a:rPr sz="850">
                 <a:solidFill>
                   <a:srgbClr val="191919"/>
                 </a:solidFill>
-                <a:latin typeface="AvenirNext LT Pro Regular"/>
+                <a:latin typeface="AvenirNext LT Pro Medium"/>
               </a:rPr>
-              <a:t>Continuous unattended operation.</a:t>
-            </a:r>
-          </a:p>
-        </p:txBody>
-      </p:sp>
-      <p:sp>
-        <p:nvSpPr>
-          <p:cNvPr id="21" name="TextBox 20"/>
+              <a:t>Shadow</a:t>
+            </a:r>
+          </a:p>
+        </p:txBody>
+      </p:sp>
+      <p:sp>
+        <p:nvSpPr>
+          <p:cNvPr id="16" name="TextBox 15"/>
           <p:cNvSpPr txBox="1"/>
           <p:nvPr/>
         </p:nvSpPr>
         <p:spPr>
           <a:xfrm>
-            <a:off x="3794760" y="4005072"/>
-            <a:ext cx="4736592" cy="640080"/>
+            <a:off x="2331720" y="2414016"/>
+            <a:ext cx="1783080" cy="585216"/>
           </a:xfrm>
           <a:prstGeom prst="rect">
             <a:avLst/>
@@ -25489,50 +26007,91 @@
           <a:noFill/>
         </p:spPr>
         <p:txBody>
-          <a:bodyPr wrap="square" anchor="t" lIns="0" rIns="0" tIns="0" bIns="0">
+          <a:bodyPr wrap="square" anchor="ctr" lIns="0" rIns="0" tIns="0" bIns="0">
             <a:spAutoFit/>
           </a:bodyPr>
           <a:lstStyle/>
           <a:p>
             <a:pPr>
               <a:lnSpc>
-                <a:spcPct val="120000"/>
+                <a:spcPct val="118000"/>
               </a:lnSpc>
-              <a:spcBef>
-                <a:spcPts val="0"/>
-              </a:spcBef>
               <a:spcAft>
                 <a:spcPts val="200"/>
               </a:spcAft>
             </a:pPr>
             <a:r>
-              <a:rPr sz="750">
+              <a:rPr sz="730">
                 <a:solidFill>
                   <a:srgbClr val="191919"/>
                 </a:solidFill>
                 <a:latin typeface="AvenirNext LT Pro Regular"/>
               </a:rPr>
-              <a:t>Supervised operation stable over a sustained period; EHS and insurance sign-off in writing; unattended and fallback drills (network loss, heartbeat loss, sensor failure) all passed.</a:t>
-            </a:r>
-          </a:p>
-        </p:txBody>
-      </p:sp>
-      <p:sp>
-        <p:nvSpPr>
-          <p:cNvPr id="22" name="Rectangle 21"/>
+              <a:t>AI issues decisions with rationale; nothing is written to the tool.</a:t>
+            </a:r>
+          </a:p>
+        </p:txBody>
+      </p:sp>
+      <p:sp>
+        <p:nvSpPr>
+          <p:cNvPr id="17" name="TextBox 16"/>
+          <p:cNvSpPr txBox="1"/>
+          <p:nvPr/>
+        </p:nvSpPr>
+        <p:spPr>
+          <a:xfrm>
+            <a:off x="4224528" y="2414016"/>
+            <a:ext cx="4160520" cy="585216"/>
+          </a:xfrm>
+          <a:prstGeom prst="rect">
+            <a:avLst/>
+          </a:prstGeom>
+          <a:noFill/>
+        </p:spPr>
+        <p:txBody>
+          <a:bodyPr wrap="square" anchor="ctr" lIns="0" rIns="0" tIns="0" bIns="0">
+            <a:spAutoFit/>
+          </a:bodyPr>
+          <a:lstStyle/>
+          <a:p>
+            <a:pPr>
+              <a:lnSpc>
+                <a:spcPct val="118000"/>
+              </a:lnSpc>
+              <a:spcAft>
+                <a:spcPts val="200"/>
+              </a:spcAft>
+            </a:pPr>
+            <a:r>
+              <a:rPr sz="730">
+                <a:solidFill>
+                  <a:srgbClr val="191919"/>
+                </a:solidFill>
+                <a:latin typeface="AvenirNext LT Pro Regular"/>
+              </a:rPr>
+              <a:t>Model calibration passes its acceptance check on our own tool data; perception agrees with expert judgement consistently across a sustained shadow period.</a:t>
+            </a:r>
+          </a:p>
+        </p:txBody>
+      </p:sp>
+      <p:sp>
+        <p:nvSpPr>
+          <p:cNvPr id="18" name="Rounded Rectangle 17"/>
           <p:cNvSpPr/>
           <p:nvPr/>
         </p:nvSpPr>
         <p:spPr>
           <a:xfrm>
-            <a:off x="612648" y="4681728"/>
-            <a:ext cx="7918704" cy="11430"/>
-          </a:xfrm>
-          <a:prstGeom prst="rect">
-            <a:avLst/>
+            <a:off x="612648" y="3090672"/>
+            <a:ext cx="7918704" cy="713232"/>
+          </a:xfrm>
+          <a:prstGeom prst="roundRect">
+            <a:avLst>
+              <a:gd name="adj" fmla="val 10000"/>
+            </a:avLst>
           </a:prstGeom>
           <a:solidFill>
-            <a:srgbClr val="00B388"/>
+            <a:srgbClr val="F5F5F5"/>
           </a:solidFill>
           <a:ln>
             <a:noFill/>
@@ -25558,6 +26117,480 @@
           <a:lstStyle/>
           <a:p>
             <a:pPr algn="ctr"/>
+          </a:p>
+        </p:txBody>
+      </p:sp>
+      <p:sp>
+        <p:nvSpPr>
+          <p:cNvPr id="19" name="Rounded Rectangle 18"/>
+          <p:cNvSpPr/>
+          <p:nvPr/>
+        </p:nvSpPr>
+        <p:spPr>
+          <a:xfrm>
+            <a:off x="749808" y="3236976"/>
+            <a:ext cx="420624" cy="420624"/>
+          </a:xfrm>
+          <a:prstGeom prst="roundRect">
+            <a:avLst>
+              <a:gd name="adj" fmla="val 28000"/>
+            </a:avLst>
+          </a:prstGeom>
+          <a:solidFill>
+            <a:srgbClr val="6A6DCD"/>
+          </a:solidFill>
+          <a:ln>
+            <a:noFill/>
+          </a:ln>
+          <a:effectLst/>
+        </p:spPr>
+        <p:style>
+          <a:lnRef idx="1">
+            <a:schemeClr val="accent1"/>
+          </a:lnRef>
+          <a:fillRef idx="3">
+            <a:schemeClr val="accent1"/>
+          </a:fillRef>
+          <a:effectRef idx="2">
+            <a:schemeClr val="accent1"/>
+          </a:effectRef>
+          <a:fontRef idx="minor">
+            <a:schemeClr val="lt1"/>
+          </a:fontRef>
+        </p:style>
+        <p:txBody>
+          <a:bodyPr rtlCol="0" anchor="ctr"/>
+          <a:lstStyle/>
+          <a:p>
+            <a:pPr algn="ctr"/>
+          </a:p>
+        </p:txBody>
+      </p:sp>
+      <p:sp>
+        <p:nvSpPr>
+          <p:cNvPr id="20" name="TextBox 19"/>
+          <p:cNvSpPr txBox="1"/>
+          <p:nvPr/>
+        </p:nvSpPr>
+        <p:spPr>
+          <a:xfrm>
+            <a:off x="749808" y="3337560"/>
+            <a:ext cx="420624" cy="219456"/>
+          </a:xfrm>
+          <a:prstGeom prst="rect">
+            <a:avLst/>
+          </a:prstGeom>
+          <a:noFill/>
+        </p:spPr>
+        <p:txBody>
+          <a:bodyPr wrap="square" anchor="t" lIns="0" rIns="0" tIns="0" bIns="0">
+            <a:spAutoFit/>
+          </a:bodyPr>
+          <a:lstStyle/>
+          <a:p>
+            <a:pPr algn="ctr">
+              <a:lnSpc>
+                <a:spcPct val="120000"/>
+              </a:lnSpc>
+              <a:spcAft>
+                <a:spcPts val="200"/>
+              </a:spcAft>
+            </a:pPr>
+            <a:r>
+              <a:rPr sz="1100">
+                <a:solidFill>
+                  <a:srgbClr val="FFFFFF"/>
+                </a:solidFill>
+                <a:latin typeface="AvenirNext LT Pro Medium"/>
+              </a:rPr>
+              <a:t>L3</a:t>
+            </a:r>
+          </a:p>
+        </p:txBody>
+      </p:sp>
+      <p:sp>
+        <p:nvSpPr>
+          <p:cNvPr id="21" name="TextBox 20"/>
+          <p:cNvSpPr txBox="1"/>
+          <p:nvPr/>
+        </p:nvSpPr>
+        <p:spPr>
+          <a:xfrm>
+            <a:off x="1298448" y="3182112"/>
+            <a:ext cx="960120" cy="585216"/>
+          </a:xfrm>
+          <a:prstGeom prst="rect">
+            <a:avLst/>
+          </a:prstGeom>
+          <a:noFill/>
+        </p:spPr>
+        <p:txBody>
+          <a:bodyPr wrap="square" anchor="ctr" lIns="0" rIns="0" tIns="0" bIns="0">
+            <a:spAutoFit/>
+          </a:bodyPr>
+          <a:lstStyle/>
+          <a:p>
+            <a:pPr>
+              <a:lnSpc>
+                <a:spcPct val="110000"/>
+              </a:lnSpc>
+              <a:spcAft>
+                <a:spcPts val="200"/>
+              </a:spcAft>
+            </a:pPr>
+            <a:r>
+              <a:rPr sz="850">
+                <a:solidFill>
+                  <a:srgbClr val="191919"/>
+                </a:solidFill>
+                <a:latin typeface="AvenirNext LT Pro Medium"/>
+              </a:rPr>
+              <a:t>Supervised loop</a:t>
+            </a:r>
+          </a:p>
+        </p:txBody>
+      </p:sp>
+      <p:sp>
+        <p:nvSpPr>
+          <p:cNvPr id="22" name="TextBox 21"/>
+          <p:cNvSpPr txBox="1"/>
+          <p:nvPr/>
+        </p:nvSpPr>
+        <p:spPr>
+          <a:xfrm>
+            <a:off x="2331720" y="3182112"/>
+            <a:ext cx="1783080" cy="585216"/>
+          </a:xfrm>
+          <a:prstGeom prst="rect">
+            <a:avLst/>
+          </a:prstGeom>
+          <a:noFill/>
+        </p:spPr>
+        <p:txBody>
+          <a:bodyPr wrap="square" anchor="ctr" lIns="0" rIns="0" tIns="0" bIns="0">
+            <a:spAutoFit/>
+          </a:bodyPr>
+          <a:lstStyle/>
+          <a:p>
+            <a:pPr>
+              <a:lnSpc>
+                <a:spcPct val="118000"/>
+              </a:lnSpc>
+              <a:spcAft>
+                <a:spcPts val="200"/>
+              </a:spcAft>
+            </a:pPr>
+            <a:r>
+              <a:rPr sz="730">
+                <a:solidFill>
+                  <a:srgbClr val="191919"/>
+                </a:solidFill>
+                <a:latin typeface="AvenirNext LT Pro Regular"/>
+              </a:rPr>
+              <a:t>Single variable, then multivariable (MBE, PVD); one-click engineer takeover at every step.</a:t>
+            </a:r>
+          </a:p>
+        </p:txBody>
+      </p:sp>
+      <p:sp>
+        <p:nvSpPr>
+          <p:cNvPr id="23" name="TextBox 22"/>
+          <p:cNvSpPr txBox="1"/>
+          <p:nvPr/>
+        </p:nvSpPr>
+        <p:spPr>
+          <a:xfrm>
+            <a:off x="4224528" y="3182112"/>
+            <a:ext cx="4160520" cy="585216"/>
+          </a:xfrm>
+          <a:prstGeom prst="rect">
+            <a:avLst/>
+          </a:prstGeom>
+          <a:noFill/>
+        </p:spPr>
+        <p:txBody>
+          <a:bodyPr wrap="square" anchor="ctr" lIns="0" rIns="0" tIns="0" bIns="0">
+            <a:spAutoFit/>
+          </a:bodyPr>
+          <a:lstStyle/>
+          <a:p>
+            <a:pPr>
+              <a:lnSpc>
+                <a:spcPct val="118000"/>
+              </a:lnSpc>
+              <a:spcAft>
+                <a:spcPts val="200"/>
+              </a:spcAft>
+            </a:pPr>
+            <a:r>
+              <a:rPr sz="730">
+                <a:solidFill>
+                  <a:srgbClr val="191919"/>
+                </a:solidFill>
+                <a:latin typeface="AvenirNext LT Pro Regular"/>
+              </a:rPr>
+              <a:t>Control law clears the full fault-injection suite in simulation; write-back latency verified against fast-loop needs; watchdogs and clamps proven in red-then-green drills; every recipe change passes the independent confirmation gate.</a:t>
+            </a:r>
+          </a:p>
+        </p:txBody>
+      </p:sp>
+      <p:sp>
+        <p:nvSpPr>
+          <p:cNvPr id="24" name="Rounded Rectangle 23"/>
+          <p:cNvSpPr/>
+          <p:nvPr/>
+        </p:nvSpPr>
+        <p:spPr>
+          <a:xfrm>
+            <a:off x="612648" y="3858768"/>
+            <a:ext cx="7918704" cy="713232"/>
+          </a:xfrm>
+          <a:prstGeom prst="roundRect">
+            <a:avLst>
+              <a:gd name="adj" fmla="val 10000"/>
+            </a:avLst>
+          </a:prstGeom>
+          <a:solidFill>
+            <a:srgbClr val="F5F5F5"/>
+          </a:solidFill>
+          <a:ln>
+            <a:noFill/>
+          </a:ln>
+          <a:effectLst/>
+        </p:spPr>
+        <p:style>
+          <a:lnRef idx="1">
+            <a:schemeClr val="accent1"/>
+          </a:lnRef>
+          <a:fillRef idx="3">
+            <a:schemeClr val="accent1"/>
+          </a:fillRef>
+          <a:effectRef idx="2">
+            <a:schemeClr val="accent1"/>
+          </a:effectRef>
+          <a:fontRef idx="minor">
+            <a:schemeClr val="lt1"/>
+          </a:fontRef>
+        </p:style>
+        <p:txBody>
+          <a:bodyPr rtlCol="0" anchor="ctr"/>
+          <a:lstStyle/>
+          <a:p>
+            <a:pPr algn="ctr"/>
+          </a:p>
+        </p:txBody>
+      </p:sp>
+      <p:sp>
+        <p:nvSpPr>
+          <p:cNvPr id="25" name="Rounded Rectangle 24"/>
+          <p:cNvSpPr/>
+          <p:nvPr/>
+        </p:nvSpPr>
+        <p:spPr>
+          <a:xfrm>
+            <a:off x="749808" y="4005072"/>
+            <a:ext cx="420624" cy="420624"/>
+          </a:xfrm>
+          <a:prstGeom prst="roundRect">
+            <a:avLst>
+              <a:gd name="adj" fmla="val 28000"/>
+            </a:avLst>
+          </a:prstGeom>
+          <a:solidFill>
+            <a:srgbClr val="00B388"/>
+          </a:solidFill>
+          <a:ln>
+            <a:noFill/>
+          </a:ln>
+          <a:effectLst/>
+        </p:spPr>
+        <p:style>
+          <a:lnRef idx="1">
+            <a:schemeClr val="accent1"/>
+          </a:lnRef>
+          <a:fillRef idx="3">
+            <a:schemeClr val="accent1"/>
+          </a:fillRef>
+          <a:effectRef idx="2">
+            <a:schemeClr val="accent1"/>
+          </a:effectRef>
+          <a:fontRef idx="minor">
+            <a:schemeClr val="lt1"/>
+          </a:fontRef>
+        </p:style>
+        <p:txBody>
+          <a:bodyPr rtlCol="0" anchor="ctr"/>
+          <a:lstStyle/>
+          <a:p>
+            <a:pPr algn="ctr"/>
+          </a:p>
+        </p:txBody>
+      </p:sp>
+      <p:sp>
+        <p:nvSpPr>
+          <p:cNvPr id="26" name="TextBox 25"/>
+          <p:cNvSpPr txBox="1"/>
+          <p:nvPr/>
+        </p:nvSpPr>
+        <p:spPr>
+          <a:xfrm>
+            <a:off x="749808" y="4105656"/>
+            <a:ext cx="420624" cy="219456"/>
+          </a:xfrm>
+          <a:prstGeom prst="rect">
+            <a:avLst/>
+          </a:prstGeom>
+          <a:noFill/>
+        </p:spPr>
+        <p:txBody>
+          <a:bodyPr wrap="square" anchor="t" lIns="0" rIns="0" tIns="0" bIns="0">
+            <a:spAutoFit/>
+          </a:bodyPr>
+          <a:lstStyle/>
+          <a:p>
+            <a:pPr algn="ctr">
+              <a:lnSpc>
+                <a:spcPct val="120000"/>
+              </a:lnSpc>
+              <a:spcAft>
+                <a:spcPts val="200"/>
+              </a:spcAft>
+            </a:pPr>
+            <a:r>
+              <a:rPr sz="1100">
+                <a:solidFill>
+                  <a:srgbClr val="FFFFFF"/>
+                </a:solidFill>
+                <a:latin typeface="AvenirNext LT Pro Medium"/>
+              </a:rPr>
+              <a:t>L4</a:t>
+            </a:r>
+          </a:p>
+        </p:txBody>
+      </p:sp>
+      <p:sp>
+        <p:nvSpPr>
+          <p:cNvPr id="27" name="TextBox 26"/>
+          <p:cNvSpPr txBox="1"/>
+          <p:nvPr/>
+        </p:nvSpPr>
+        <p:spPr>
+          <a:xfrm>
+            <a:off x="1298448" y="3950207"/>
+            <a:ext cx="960120" cy="585216"/>
+          </a:xfrm>
+          <a:prstGeom prst="rect">
+            <a:avLst/>
+          </a:prstGeom>
+          <a:noFill/>
+        </p:spPr>
+        <p:txBody>
+          <a:bodyPr wrap="square" anchor="ctr" lIns="0" rIns="0" tIns="0" bIns="0">
+            <a:spAutoFit/>
+          </a:bodyPr>
+          <a:lstStyle/>
+          <a:p>
+            <a:pPr>
+              <a:lnSpc>
+                <a:spcPct val="110000"/>
+              </a:lnSpc>
+              <a:spcAft>
+                <a:spcPts val="200"/>
+              </a:spcAft>
+            </a:pPr>
+            <a:r>
+              <a:rPr sz="850">
+                <a:solidFill>
+                  <a:srgbClr val="191919"/>
+                </a:solidFill>
+                <a:latin typeface="AvenirNext LT Pro Medium"/>
+              </a:rPr>
+              <a:t>Unattended</a:t>
+            </a:r>
+          </a:p>
+        </p:txBody>
+      </p:sp>
+      <p:sp>
+        <p:nvSpPr>
+          <p:cNvPr id="28" name="TextBox 27"/>
+          <p:cNvSpPr txBox="1"/>
+          <p:nvPr/>
+        </p:nvSpPr>
+        <p:spPr>
+          <a:xfrm>
+            <a:off x="2331720" y="3950207"/>
+            <a:ext cx="1783080" cy="585216"/>
+          </a:xfrm>
+          <a:prstGeom prst="rect">
+            <a:avLst/>
+          </a:prstGeom>
+          <a:noFill/>
+        </p:spPr>
+        <p:txBody>
+          <a:bodyPr wrap="square" anchor="ctr" lIns="0" rIns="0" tIns="0" bIns="0">
+            <a:spAutoFit/>
+          </a:bodyPr>
+          <a:lstStyle/>
+          <a:p>
+            <a:pPr>
+              <a:lnSpc>
+                <a:spcPct val="118000"/>
+              </a:lnSpc>
+              <a:spcAft>
+                <a:spcPts val="200"/>
+              </a:spcAft>
+            </a:pPr>
+            <a:r>
+              <a:rPr sz="730">
+                <a:solidFill>
+                  <a:srgbClr val="191919"/>
+                </a:solidFill>
+                <a:latin typeface="AvenirNext LT Pro Regular"/>
+              </a:rPr>
+              <a:t>Continuous unattended operation.</a:t>
+            </a:r>
+          </a:p>
+        </p:txBody>
+      </p:sp>
+      <p:sp>
+        <p:nvSpPr>
+          <p:cNvPr id="29" name="TextBox 28"/>
+          <p:cNvSpPr txBox="1"/>
+          <p:nvPr/>
+        </p:nvSpPr>
+        <p:spPr>
+          <a:xfrm>
+            <a:off x="4224528" y="3950207"/>
+            <a:ext cx="4160520" cy="585216"/>
+          </a:xfrm>
+          <a:prstGeom prst="rect">
+            <a:avLst/>
+          </a:prstGeom>
+          <a:noFill/>
+        </p:spPr>
+        <p:txBody>
+          <a:bodyPr wrap="square" anchor="ctr" lIns="0" rIns="0" tIns="0" bIns="0">
+            <a:spAutoFit/>
+          </a:bodyPr>
+          <a:lstStyle/>
+          <a:p>
+            <a:pPr>
+              <a:lnSpc>
+                <a:spcPct val="118000"/>
+              </a:lnSpc>
+              <a:spcAft>
+                <a:spcPts val="200"/>
+              </a:spcAft>
+            </a:pPr>
+            <a:r>
+              <a:rPr sz="730">
+                <a:solidFill>
+                  <a:srgbClr val="191919"/>
+                </a:solidFill>
+                <a:latin typeface="AvenirNext LT Pro Regular"/>
+              </a:rPr>
+              <a:t>Supervised operation stable over a sustained period; EHS and insurance sign-off in writing; unattended and fallback drills (network loss, heartbeat loss, sensor failure) all passed.</a:t>
+            </a:r>
           </a:p>
         </p:txBody>
       </p:sp>
